--- a/03-课件PPT/讲次版/第2章-5-讲次 2-5 · Agent Tool Runtime .pptx
+++ b/03-课件PPT/讲次版/第2章-5-讲次 2-5 · Agent Tool Runtime .pptx
@@ -5877,14 +5877,230 @@
       </p:sp>
       <p:sp>
         <p:nvSpPr>
-          <p:cNvPr id="5" name="TextBox 4"/>
+          <p:cNvPr id="5" name="Rounded Rectangle 4"/>
+          <p:cNvSpPr/>
+          <p:nvPr/>
+        </p:nvSpPr>
+        <p:spPr>
+          <a:xfrm>
+            <a:off x="857250" y="2667000"/>
+            <a:ext cx="10477500" cy="1143000"/>
+          </a:xfrm>
+          <a:prstGeom prst="roundRect">
+            <a:avLst>
+              <a:gd name="adj" fmla="val 8000"/>
+            </a:avLst>
+          </a:prstGeom>
+          <a:solidFill>
+            <a:srgbClr val="FFFFFF"/>
+          </a:solidFill>
+          <a:ln w="12700">
+            <a:solidFill>
+              <a:srgbClr val="2563EB"/>
+            </a:solidFill>
+          </a:ln>
+          <a:effectLst/>
+        </p:spPr>
+        <p:style>
+          <a:lnRef idx="1">
+            <a:schemeClr val="accent1"/>
+          </a:lnRef>
+          <a:fillRef idx="3">
+            <a:schemeClr val="accent1"/>
+          </a:fillRef>
+          <a:effectRef idx="2">
+            <a:schemeClr val="accent1"/>
+          </a:effectRef>
+          <a:fontRef idx="minor">
+            <a:schemeClr val="lt1"/>
+          </a:fontRef>
+        </p:style>
+        <p:txBody>
+          <a:bodyPr rtlCol="0" anchor="ctr"/>
+          <a:lstStyle/>
+          <a:p>
+            <a:pPr algn="ctr"/>
+          </a:p>
+        </p:txBody>
+      </p:sp>
+      <p:sp>
+        <p:nvSpPr>
+          <p:cNvPr id="6" name="Rectangle 5"/>
+          <p:cNvSpPr/>
+          <p:nvPr/>
+        </p:nvSpPr>
+        <p:spPr>
+          <a:xfrm>
+            <a:off x="857250" y="2667000"/>
+            <a:ext cx="10477500" cy="57150"/>
+          </a:xfrm>
+          <a:prstGeom prst="rect">
+            <a:avLst/>
+          </a:prstGeom>
+          <a:solidFill>
+            <a:srgbClr val="2563EB"/>
+          </a:solidFill>
+          <a:ln>
+            <a:noFill/>
+          </a:ln>
+          <a:effectLst/>
+        </p:spPr>
+        <p:style>
+          <a:lnRef idx="1">
+            <a:schemeClr val="accent1"/>
+          </a:lnRef>
+          <a:fillRef idx="3">
+            <a:schemeClr val="accent1"/>
+          </a:fillRef>
+          <a:effectRef idx="2">
+            <a:schemeClr val="accent1"/>
+          </a:effectRef>
+          <a:fontRef idx="minor">
+            <a:schemeClr val="lt1"/>
+          </a:fontRef>
+        </p:style>
+        <p:txBody>
+          <a:bodyPr rtlCol="0" anchor="ctr"/>
+          <a:lstStyle/>
+          <a:p>
+            <a:pPr algn="ctr"/>
+          </a:p>
+        </p:txBody>
+      </p:sp>
+      <p:sp>
+        <p:nvSpPr>
+          <p:cNvPr id="7" name="Rounded Rectangle 6"/>
+          <p:cNvSpPr/>
+          <p:nvPr/>
+        </p:nvSpPr>
+        <p:spPr>
+          <a:xfrm>
+            <a:off x="5953125" y="2524125"/>
+            <a:ext cx="285750" cy="285750"/>
+          </a:xfrm>
+          <a:prstGeom prst="roundRect">
+            <a:avLst>
+              <a:gd name="adj" fmla="val 8000"/>
+            </a:avLst>
+          </a:prstGeom>
+          <a:solidFill>
+            <a:srgbClr val="2563EB"/>
+          </a:solidFill>
+          <a:ln>
+            <a:noFill/>
+          </a:ln>
+          <a:effectLst/>
+        </p:spPr>
+        <p:style>
+          <a:lnRef idx="1">
+            <a:schemeClr val="accent1"/>
+          </a:lnRef>
+          <a:fillRef idx="3">
+            <a:schemeClr val="accent1"/>
+          </a:fillRef>
+          <a:effectRef idx="2">
+            <a:schemeClr val="accent1"/>
+          </a:effectRef>
+          <a:fontRef idx="minor">
+            <a:schemeClr val="lt1"/>
+          </a:fontRef>
+        </p:style>
+        <p:txBody>
+          <a:bodyPr rtlCol="0" anchor="ctr"/>
+          <a:lstStyle/>
+          <a:p>
+            <a:pPr algn="ctr"/>
+          </a:p>
+        </p:txBody>
+      </p:sp>
+      <p:sp>
+        <p:nvSpPr>
+          <p:cNvPr id="8" name="TextBox 7"/>
           <p:cNvSpPr txBox="1"/>
           <p:nvPr/>
         </p:nvSpPr>
         <p:spPr>
           <a:xfrm>
-            <a:off x="9334500" y="0"/>
-            <a:ext cx="2667000" cy="704850"/>
+            <a:off x="5953125" y="2514600"/>
+            <a:ext cx="285750" cy="285750"/>
+          </a:xfrm>
+          <a:prstGeom prst="rect">
+            <a:avLst/>
+          </a:prstGeom>
+          <a:noFill/>
+        </p:spPr>
+        <p:txBody>
+          <a:bodyPr wrap="square" anchor="ctr">
+            <a:spAutoFit/>
+          </a:bodyPr>
+          <a:lstStyle/>
+          <a:p>
+            <a:pPr algn="ctr">
+              <a:lnSpc>
+                <a:spcPct val="100000"/>
+              </a:lnSpc>
+            </a:pPr>
+            <a:r>
+              <a:rPr sz="1300" b="1">
+                <a:solidFill>
+                  <a:srgbClr val="FFFFFF"/>
+                </a:solidFill>
+                <a:latin typeface="PingFang SC"/>
+              </a:rPr>
+              <a:t>1</a:t>
+            </a:r>
+          </a:p>
+        </p:txBody>
+      </p:sp>
+      <p:sp>
+        <p:nvSpPr>
+          <p:cNvPr id="9" name="TextBox 8"/>
+          <p:cNvSpPr txBox="1"/>
+          <p:nvPr/>
+        </p:nvSpPr>
+        <p:spPr>
+          <a:xfrm>
+            <a:off x="933450" y="2800350"/>
+            <a:ext cx="10325100" cy="952500"/>
+          </a:xfrm>
+          <a:prstGeom prst="rect">
+            <a:avLst/>
+          </a:prstGeom>
+          <a:noFill/>
+        </p:spPr>
+        <p:txBody>
+          <a:bodyPr wrap="square" anchor="ctr">
+            <a:spAutoFit/>
+          </a:bodyPr>
+          <a:lstStyle/>
+          <a:p>
+            <a:pPr algn="ctr">
+              <a:lnSpc>
+                <a:spcPct val="100000"/>
+              </a:lnSpc>
+            </a:pPr>
+            <a:r>
+              <a:rPr sz="1200" b="1">
+                <a:solidFill>
+                  <a:srgbClr val="475569"/>
+                </a:solidFill>
+                <a:latin typeface="PingFang SC"/>
+              </a:rPr>
+              <a:t>note=同一 Runtime 不同工具包</a:t>
+            </a:r>
+          </a:p>
+        </p:txBody>
+      </p:sp>
+      <p:sp>
+        <p:nvSpPr>
+          <p:cNvPr id="10" name="TextBox 9"/>
+          <p:cNvSpPr txBox="1"/>
+          <p:nvPr/>
+        </p:nvSpPr>
+        <p:spPr>
+          <a:xfrm>
+            <a:off x="10287000" y="6534150"/>
+            <a:ext cx="1619250" cy="266700"/>
           </a:xfrm>
           <a:prstGeom prst="rect">
             <a:avLst/>
@@ -5903,261 +6119,6 @@
               </a:lnSpc>
             </a:pPr>
             <a:r>
-              <a:rPr sz="1100" b="0">
-                <a:solidFill>
-                  <a:srgbClr val="94A3B8"/>
-                </a:solidFill>
-                <a:latin typeface="PingFang SC"/>
-              </a:rPr>
-              <a:t>风险等级即流程节点</a:t>
-            </a:r>
-          </a:p>
-        </p:txBody>
-      </p:sp>
-      <p:sp>
-        <p:nvSpPr>
-          <p:cNvPr id="6" name="Rounded Rectangle 5"/>
-          <p:cNvSpPr/>
-          <p:nvPr/>
-        </p:nvSpPr>
-        <p:spPr>
-          <a:xfrm>
-            <a:off x="857250" y="2667000"/>
-            <a:ext cx="10477500" cy="1143000"/>
-          </a:xfrm>
-          <a:prstGeom prst="roundRect">
-            <a:avLst>
-              <a:gd name="adj" fmla="val 8000"/>
-            </a:avLst>
-          </a:prstGeom>
-          <a:solidFill>
-            <a:srgbClr val="FFFFFF"/>
-          </a:solidFill>
-          <a:ln w="12700">
-            <a:solidFill>
-              <a:srgbClr val="2563EB"/>
-            </a:solidFill>
-          </a:ln>
-          <a:effectLst/>
-        </p:spPr>
-        <p:style>
-          <a:lnRef idx="1">
-            <a:schemeClr val="accent1"/>
-          </a:lnRef>
-          <a:fillRef idx="3">
-            <a:schemeClr val="accent1"/>
-          </a:fillRef>
-          <a:effectRef idx="2">
-            <a:schemeClr val="accent1"/>
-          </a:effectRef>
-          <a:fontRef idx="minor">
-            <a:schemeClr val="lt1"/>
-          </a:fontRef>
-        </p:style>
-        <p:txBody>
-          <a:bodyPr rtlCol="0" anchor="ctr"/>
-          <a:lstStyle/>
-          <a:p>
-            <a:pPr algn="ctr"/>
-          </a:p>
-        </p:txBody>
-      </p:sp>
-      <p:sp>
-        <p:nvSpPr>
-          <p:cNvPr id="7" name="Rectangle 6"/>
-          <p:cNvSpPr/>
-          <p:nvPr/>
-        </p:nvSpPr>
-        <p:spPr>
-          <a:xfrm>
-            <a:off x="857250" y="2667000"/>
-            <a:ext cx="10477500" cy="57150"/>
-          </a:xfrm>
-          <a:prstGeom prst="rect">
-            <a:avLst/>
-          </a:prstGeom>
-          <a:solidFill>
-            <a:srgbClr val="2563EB"/>
-          </a:solidFill>
-          <a:ln>
-            <a:noFill/>
-          </a:ln>
-          <a:effectLst/>
-        </p:spPr>
-        <p:style>
-          <a:lnRef idx="1">
-            <a:schemeClr val="accent1"/>
-          </a:lnRef>
-          <a:fillRef idx="3">
-            <a:schemeClr val="accent1"/>
-          </a:fillRef>
-          <a:effectRef idx="2">
-            <a:schemeClr val="accent1"/>
-          </a:effectRef>
-          <a:fontRef idx="minor">
-            <a:schemeClr val="lt1"/>
-          </a:fontRef>
-        </p:style>
-        <p:txBody>
-          <a:bodyPr rtlCol="0" anchor="ctr"/>
-          <a:lstStyle/>
-          <a:p>
-            <a:pPr algn="ctr"/>
-          </a:p>
-        </p:txBody>
-      </p:sp>
-      <p:sp>
-        <p:nvSpPr>
-          <p:cNvPr id="8" name="Rounded Rectangle 7"/>
-          <p:cNvSpPr/>
-          <p:nvPr/>
-        </p:nvSpPr>
-        <p:spPr>
-          <a:xfrm>
-            <a:off x="5953125" y="2524125"/>
-            <a:ext cx="285750" cy="285750"/>
-          </a:xfrm>
-          <a:prstGeom prst="roundRect">
-            <a:avLst>
-              <a:gd name="adj" fmla="val 8000"/>
-            </a:avLst>
-          </a:prstGeom>
-          <a:solidFill>
-            <a:srgbClr val="2563EB"/>
-          </a:solidFill>
-          <a:ln>
-            <a:noFill/>
-          </a:ln>
-          <a:effectLst/>
-        </p:spPr>
-        <p:style>
-          <a:lnRef idx="1">
-            <a:schemeClr val="accent1"/>
-          </a:lnRef>
-          <a:fillRef idx="3">
-            <a:schemeClr val="accent1"/>
-          </a:fillRef>
-          <a:effectRef idx="2">
-            <a:schemeClr val="accent1"/>
-          </a:effectRef>
-          <a:fontRef idx="minor">
-            <a:schemeClr val="lt1"/>
-          </a:fontRef>
-        </p:style>
-        <p:txBody>
-          <a:bodyPr rtlCol="0" anchor="ctr"/>
-          <a:lstStyle/>
-          <a:p>
-            <a:pPr algn="ctr"/>
-          </a:p>
-        </p:txBody>
-      </p:sp>
-      <p:sp>
-        <p:nvSpPr>
-          <p:cNvPr id="9" name="TextBox 8"/>
-          <p:cNvSpPr txBox="1"/>
-          <p:nvPr/>
-        </p:nvSpPr>
-        <p:spPr>
-          <a:xfrm>
-            <a:off x="5953125" y="2514600"/>
-            <a:ext cx="285750" cy="285750"/>
-          </a:xfrm>
-          <a:prstGeom prst="rect">
-            <a:avLst/>
-          </a:prstGeom>
-          <a:noFill/>
-        </p:spPr>
-        <p:txBody>
-          <a:bodyPr wrap="square" anchor="ctr">
-            <a:spAutoFit/>
-          </a:bodyPr>
-          <a:lstStyle/>
-          <a:p>
-            <a:pPr algn="ctr">
-              <a:lnSpc>
-                <a:spcPct val="100000"/>
-              </a:lnSpc>
-            </a:pPr>
-            <a:r>
-              <a:rPr sz="1300" b="1">
-                <a:solidFill>
-                  <a:srgbClr val="FFFFFF"/>
-                </a:solidFill>
-                <a:latin typeface="PingFang SC"/>
-              </a:rPr>
-              <a:t>1</a:t>
-            </a:r>
-          </a:p>
-        </p:txBody>
-      </p:sp>
-      <p:sp>
-        <p:nvSpPr>
-          <p:cNvPr id="10" name="TextBox 9"/>
-          <p:cNvSpPr txBox="1"/>
-          <p:nvPr/>
-        </p:nvSpPr>
-        <p:spPr>
-          <a:xfrm>
-            <a:off x="933450" y="2800350"/>
-            <a:ext cx="10325100" cy="952500"/>
-          </a:xfrm>
-          <a:prstGeom prst="rect">
-            <a:avLst/>
-          </a:prstGeom>
-          <a:noFill/>
-        </p:spPr>
-        <p:txBody>
-          <a:bodyPr wrap="square" anchor="ctr">
-            <a:spAutoFit/>
-          </a:bodyPr>
-          <a:lstStyle/>
-          <a:p>
-            <a:pPr algn="ctr">
-              <a:lnSpc>
-                <a:spcPct val="100000"/>
-              </a:lnSpc>
-            </a:pPr>
-            <a:r>
-              <a:rPr sz="1200" b="1">
-                <a:solidFill>
-                  <a:srgbClr val="475569"/>
-                </a:solidFill>
-                <a:latin typeface="PingFang SC"/>
-              </a:rPr>
-              <a:t>note=同一 Runtime 不同工具包|风险等级即流程节点</a:t>
-            </a:r>
-          </a:p>
-        </p:txBody>
-      </p:sp>
-      <p:sp>
-        <p:nvSpPr>
-          <p:cNvPr id="11" name="TextBox 10"/>
-          <p:cNvSpPr txBox="1"/>
-          <p:nvPr/>
-        </p:nvSpPr>
-        <p:spPr>
-          <a:xfrm>
-            <a:off x="10287000" y="6534150"/>
-            <a:ext cx="1619250" cy="266700"/>
-          </a:xfrm>
-          <a:prstGeom prst="rect">
-            <a:avLst/>
-          </a:prstGeom>
-          <a:noFill/>
-        </p:spPr>
-        <p:txBody>
-          <a:bodyPr wrap="square" anchor="ctr">
-            <a:spAutoFit/>
-          </a:bodyPr>
-          <a:lstStyle/>
-          <a:p>
-            <a:pPr algn="r">
-              <a:lnSpc>
-                <a:spcPct val="100000"/>
-              </a:lnSpc>
-            </a:pPr>
-            <a:r>
               <a:rPr sz="900" b="0">
                 <a:solidFill>
                   <a:srgbClr val="94A3B8"/>
@@ -6171,7 +6132,7 @@
       </p:sp>
       <p:sp>
         <p:nvSpPr>
-          <p:cNvPr id="12" name="TextBox 11"/>
+          <p:cNvPr id="11" name="TextBox 10"/>
           <p:cNvSpPr txBox="1"/>
           <p:nvPr/>
         </p:nvSpPr>
@@ -12049,7 +12010,7 @@
                 </a:solidFill>
                 <a:latin typeface="PingFang SC"/>
               </a:rPr>
-              <a:t>探活连续通过后重启|健康分=成功率×延迟×超时率加权</a:t>
+              <a:t>探活连续通过后重启</a:t>
             </a:r>
           </a:p>
         </p:txBody>
@@ -16194,14 +16155,850 @@
       </p:sp>
       <p:sp>
         <p:nvSpPr>
-          <p:cNvPr id="5" name="TextBox 4"/>
+          <p:cNvPr id="5" name="Rounded Rectangle 4"/>
+          <p:cNvSpPr/>
+          <p:nvPr/>
+        </p:nvSpPr>
+        <p:spPr>
+          <a:xfrm>
+            <a:off x="1047750" y="1905000"/>
+            <a:ext cx="2309812" cy="2857500"/>
+          </a:xfrm>
+          <a:prstGeom prst="roundRect">
+            <a:avLst>
+              <a:gd name="adj" fmla="val 8000"/>
+            </a:avLst>
+          </a:prstGeom>
+          <a:solidFill>
+            <a:srgbClr val="FFFFFF"/>
+          </a:solidFill>
+          <a:ln w="12700">
+            <a:solidFill>
+              <a:srgbClr val="DDE5EE"/>
+            </a:solidFill>
+          </a:ln>
+          <a:effectLst/>
+        </p:spPr>
+        <p:style>
+          <a:lnRef idx="1">
+            <a:schemeClr val="accent1"/>
+          </a:lnRef>
+          <a:fillRef idx="3">
+            <a:schemeClr val="accent1"/>
+          </a:fillRef>
+          <a:effectRef idx="2">
+            <a:schemeClr val="accent1"/>
+          </a:effectRef>
+          <a:fontRef idx="minor">
+            <a:schemeClr val="lt1"/>
+          </a:fontRef>
+        </p:style>
+        <p:txBody>
+          <a:bodyPr rtlCol="0" anchor="ctr"/>
+          <a:lstStyle/>
+          <a:p>
+            <a:pPr algn="ctr"/>
+          </a:p>
+        </p:txBody>
+      </p:sp>
+      <p:sp>
+        <p:nvSpPr>
+          <p:cNvPr id="6" name="Rectangle 5"/>
+          <p:cNvSpPr/>
+          <p:nvPr/>
+        </p:nvSpPr>
+        <p:spPr>
+          <a:xfrm>
+            <a:off x="1047750" y="1905000"/>
+            <a:ext cx="2309812" cy="76200"/>
+          </a:xfrm>
+          <a:prstGeom prst="rect">
+            <a:avLst/>
+          </a:prstGeom>
+          <a:solidFill>
+            <a:srgbClr val="2563EB"/>
+          </a:solidFill>
+          <a:ln>
+            <a:noFill/>
+          </a:ln>
+          <a:effectLst/>
+        </p:spPr>
+        <p:style>
+          <a:lnRef idx="1">
+            <a:schemeClr val="accent1"/>
+          </a:lnRef>
+          <a:fillRef idx="3">
+            <a:schemeClr val="accent1"/>
+          </a:fillRef>
+          <a:effectRef idx="2">
+            <a:schemeClr val="accent1"/>
+          </a:effectRef>
+          <a:fontRef idx="minor">
+            <a:schemeClr val="lt1"/>
+          </a:fontRef>
+        </p:style>
+        <p:txBody>
+          <a:bodyPr rtlCol="0" anchor="ctr"/>
+          <a:lstStyle/>
+          <a:p>
+            <a:pPr algn="ctr"/>
+          </a:p>
+        </p:txBody>
+      </p:sp>
+      <p:sp>
+        <p:nvSpPr>
+          <p:cNvPr id="7" name="TextBox 6"/>
           <p:cNvSpPr txBox="1"/>
           <p:nvPr/>
         </p:nvSpPr>
         <p:spPr>
           <a:xfrm>
-            <a:off x="9334500" y="0"/>
-            <a:ext cx="2667000" cy="704850"/>
+            <a:off x="1047750" y="2286000"/>
+            <a:ext cx="2309812" cy="1047750"/>
+          </a:xfrm>
+          <a:prstGeom prst="rect">
+            <a:avLst/>
+          </a:prstGeom>
+          <a:noFill/>
+        </p:spPr>
+        <p:txBody>
+          <a:bodyPr wrap="square" anchor="ctr">
+            <a:spAutoFit/>
+          </a:bodyPr>
+          <a:lstStyle/>
+          <a:p>
+            <a:pPr algn="ctr">
+              <a:lnSpc>
+                <a:spcPct val="100000"/>
+              </a:lnSpc>
+            </a:pPr>
+            <a:r>
+              <a:rPr sz="4000" b="1">
+                <a:solidFill>
+                  <a:srgbClr val="2563EB"/>
+                </a:solidFill>
+                <a:latin typeface="PingFang SC"/>
+              </a:rPr>
+              <a:t>22</a:t>
+            </a:r>
+          </a:p>
+        </p:txBody>
+      </p:sp>
+      <p:sp>
+        <p:nvSpPr>
+          <p:cNvPr id="8" name="TextBox 7"/>
+          <p:cNvSpPr txBox="1"/>
+          <p:nvPr/>
+        </p:nvSpPr>
+        <p:spPr>
+          <a:xfrm>
+            <a:off x="1047750" y="3333750"/>
+            <a:ext cx="2309812" cy="323850"/>
+          </a:xfrm>
+          <a:prstGeom prst="rect">
+            <a:avLst/>
+          </a:prstGeom>
+          <a:noFill/>
+        </p:spPr>
+        <p:txBody>
+          <a:bodyPr wrap="square" anchor="ctr">
+            <a:spAutoFit/>
+          </a:bodyPr>
+          <a:lstStyle/>
+          <a:p>
+            <a:pPr algn="ctr">
+              <a:lnSpc>
+                <a:spcPct val="100000"/>
+              </a:lnSpc>
+            </a:pPr>
+            <a:r>
+              <a:rPr sz="1300" b="0">
+                <a:solidFill>
+                  <a:srgbClr val="94A3B8"/>
+                </a:solidFill>
+                <a:latin typeface="PingFang SC"/>
+              </a:rPr>
+              <a:t>测</a:t>
+            </a:r>
+          </a:p>
+        </p:txBody>
+      </p:sp>
+      <p:sp>
+        <p:nvSpPr>
+          <p:cNvPr id="9" name="TextBox 8"/>
+          <p:cNvSpPr txBox="1"/>
+          <p:nvPr/>
+        </p:nvSpPr>
+        <p:spPr>
+          <a:xfrm>
+            <a:off x="1200150" y="4057650"/>
+            <a:ext cx="2005012" cy="571500"/>
+          </a:xfrm>
+          <a:prstGeom prst="rect">
+            <a:avLst/>
+          </a:prstGeom>
+          <a:noFill/>
+        </p:spPr>
+        <p:txBody>
+          <a:bodyPr wrap="square" anchor="ctr">
+            <a:spAutoFit/>
+          </a:bodyPr>
+          <a:lstStyle/>
+          <a:p>
+            <a:pPr algn="ctr">
+              <a:lnSpc>
+                <a:spcPct val="100000"/>
+              </a:lnSpc>
+            </a:pPr>
+            <a:r>
+              <a:rPr sz="1300" b="1">
+                <a:solidFill>
+                  <a:srgbClr val="475569"/>
+                </a:solidFill>
+                <a:latin typeface="PingFang SC"/>
+              </a:rPr>
+              <a:t>工具模块单测</a:t>
+            </a:r>
+          </a:p>
+        </p:txBody>
+      </p:sp>
+      <p:sp>
+        <p:nvSpPr>
+          <p:cNvPr id="10" name="Rounded Rectangle 9"/>
+          <p:cNvSpPr/>
+          <p:nvPr/>
+        </p:nvSpPr>
+        <p:spPr>
+          <a:xfrm>
+            <a:off x="3643312" y="1905000"/>
+            <a:ext cx="2309812" cy="2857500"/>
+          </a:xfrm>
+          <a:prstGeom prst="roundRect">
+            <a:avLst>
+              <a:gd name="adj" fmla="val 8000"/>
+            </a:avLst>
+          </a:prstGeom>
+          <a:solidFill>
+            <a:srgbClr val="FFFFFF"/>
+          </a:solidFill>
+          <a:ln w="12700">
+            <a:solidFill>
+              <a:srgbClr val="DDE5EE"/>
+            </a:solidFill>
+          </a:ln>
+          <a:effectLst/>
+        </p:spPr>
+        <p:style>
+          <a:lnRef idx="1">
+            <a:schemeClr val="accent1"/>
+          </a:lnRef>
+          <a:fillRef idx="3">
+            <a:schemeClr val="accent1"/>
+          </a:fillRef>
+          <a:effectRef idx="2">
+            <a:schemeClr val="accent1"/>
+          </a:effectRef>
+          <a:fontRef idx="minor">
+            <a:schemeClr val="lt1"/>
+          </a:fontRef>
+        </p:style>
+        <p:txBody>
+          <a:bodyPr rtlCol="0" anchor="ctr"/>
+          <a:lstStyle/>
+          <a:p>
+            <a:pPr algn="ctr"/>
+          </a:p>
+        </p:txBody>
+      </p:sp>
+      <p:sp>
+        <p:nvSpPr>
+          <p:cNvPr id="11" name="Rectangle 10"/>
+          <p:cNvSpPr/>
+          <p:nvPr/>
+        </p:nvSpPr>
+        <p:spPr>
+          <a:xfrm>
+            <a:off x="3643312" y="1905000"/>
+            <a:ext cx="2309812" cy="76200"/>
+          </a:xfrm>
+          <a:prstGeom prst="rect">
+            <a:avLst/>
+          </a:prstGeom>
+          <a:solidFill>
+            <a:srgbClr val="14B8A6"/>
+          </a:solidFill>
+          <a:ln>
+            <a:noFill/>
+          </a:ln>
+          <a:effectLst/>
+        </p:spPr>
+        <p:style>
+          <a:lnRef idx="1">
+            <a:schemeClr val="accent1"/>
+          </a:lnRef>
+          <a:fillRef idx="3">
+            <a:schemeClr val="accent1"/>
+          </a:fillRef>
+          <a:effectRef idx="2">
+            <a:schemeClr val="accent1"/>
+          </a:effectRef>
+          <a:fontRef idx="minor">
+            <a:schemeClr val="lt1"/>
+          </a:fontRef>
+        </p:style>
+        <p:txBody>
+          <a:bodyPr rtlCol="0" anchor="ctr"/>
+          <a:lstStyle/>
+          <a:p>
+            <a:pPr algn="ctr"/>
+          </a:p>
+        </p:txBody>
+      </p:sp>
+      <p:sp>
+        <p:nvSpPr>
+          <p:cNvPr id="12" name="TextBox 11"/>
+          <p:cNvSpPr txBox="1"/>
+          <p:nvPr/>
+        </p:nvSpPr>
+        <p:spPr>
+          <a:xfrm>
+            <a:off x="3643312" y="2286000"/>
+            <a:ext cx="2309812" cy="1047750"/>
+          </a:xfrm>
+          <a:prstGeom prst="rect">
+            <a:avLst/>
+          </a:prstGeom>
+          <a:noFill/>
+        </p:spPr>
+        <p:txBody>
+          <a:bodyPr wrap="square" anchor="ctr">
+            <a:spAutoFit/>
+          </a:bodyPr>
+          <a:lstStyle/>
+          <a:p>
+            <a:pPr algn="ctr">
+              <a:lnSpc>
+                <a:spcPct val="100000"/>
+              </a:lnSpc>
+            </a:pPr>
+            <a:r>
+              <a:rPr sz="4000" b="1">
+                <a:solidFill>
+                  <a:srgbClr val="14B8A6"/>
+                </a:solidFill>
+                <a:latin typeface="PingFang SC"/>
+              </a:rPr>
+              <a:t>6</a:t>
+            </a:r>
+          </a:p>
+        </p:txBody>
+      </p:sp>
+      <p:sp>
+        <p:nvSpPr>
+          <p:cNvPr id="13" name="TextBox 12"/>
+          <p:cNvSpPr txBox="1"/>
+          <p:nvPr/>
+        </p:nvSpPr>
+        <p:spPr>
+          <a:xfrm>
+            <a:off x="3643312" y="3333750"/>
+            <a:ext cx="2309812" cy="323850"/>
+          </a:xfrm>
+          <a:prstGeom prst="rect">
+            <a:avLst/>
+          </a:prstGeom>
+          <a:noFill/>
+        </p:spPr>
+        <p:txBody>
+          <a:bodyPr wrap="square" anchor="ctr">
+            <a:spAutoFit/>
+          </a:bodyPr>
+          <a:lstStyle/>
+          <a:p>
+            <a:pPr algn="ctr">
+              <a:lnSpc>
+                <a:spcPct val="100000"/>
+              </a:lnSpc>
+            </a:pPr>
+            <a:r>
+              <a:rPr sz="1300" b="0">
+                <a:solidFill>
+                  <a:srgbClr val="94A3B8"/>
+                </a:solidFill>
+                <a:latin typeface="PingFang SC"/>
+              </a:rPr>
+              <a:t>步</a:t>
+            </a:r>
+          </a:p>
+        </p:txBody>
+      </p:sp>
+      <p:sp>
+        <p:nvSpPr>
+          <p:cNvPr id="14" name="TextBox 13"/>
+          <p:cNvSpPr txBox="1"/>
+          <p:nvPr/>
+        </p:nvSpPr>
+        <p:spPr>
+          <a:xfrm>
+            <a:off x="3795712" y="4057650"/>
+            <a:ext cx="2005012" cy="571500"/>
+          </a:xfrm>
+          <a:prstGeom prst="rect">
+            <a:avLst/>
+          </a:prstGeom>
+          <a:noFill/>
+        </p:spPr>
+        <p:txBody>
+          <a:bodyPr wrap="square" anchor="ctr">
+            <a:spAutoFit/>
+          </a:bodyPr>
+          <a:lstStyle/>
+          <a:p>
+            <a:pPr algn="ctr">
+              <a:lnSpc>
+                <a:spcPct val="100000"/>
+              </a:lnSpc>
+            </a:pPr>
+            <a:r>
+              <a:rPr sz="1300" b="1">
+                <a:solidFill>
+                  <a:srgbClr val="475569"/>
+                </a:solidFill>
+                <a:latin typeface="PingFang SC"/>
+              </a:rPr>
+              <a:t>执行管线</a:t>
+            </a:r>
+          </a:p>
+        </p:txBody>
+      </p:sp>
+      <p:sp>
+        <p:nvSpPr>
+          <p:cNvPr id="15" name="Rounded Rectangle 14"/>
+          <p:cNvSpPr/>
+          <p:nvPr/>
+        </p:nvSpPr>
+        <p:spPr>
+          <a:xfrm>
+            <a:off x="6238874" y="1905000"/>
+            <a:ext cx="2309812" cy="2857500"/>
+          </a:xfrm>
+          <a:prstGeom prst="roundRect">
+            <a:avLst>
+              <a:gd name="adj" fmla="val 8000"/>
+            </a:avLst>
+          </a:prstGeom>
+          <a:solidFill>
+            <a:srgbClr val="FFFFFF"/>
+          </a:solidFill>
+          <a:ln w="12700">
+            <a:solidFill>
+              <a:srgbClr val="DDE5EE"/>
+            </a:solidFill>
+          </a:ln>
+          <a:effectLst/>
+        </p:spPr>
+        <p:style>
+          <a:lnRef idx="1">
+            <a:schemeClr val="accent1"/>
+          </a:lnRef>
+          <a:fillRef idx="3">
+            <a:schemeClr val="accent1"/>
+          </a:fillRef>
+          <a:effectRef idx="2">
+            <a:schemeClr val="accent1"/>
+          </a:effectRef>
+          <a:fontRef idx="minor">
+            <a:schemeClr val="lt1"/>
+          </a:fontRef>
+        </p:style>
+        <p:txBody>
+          <a:bodyPr rtlCol="0" anchor="ctr"/>
+          <a:lstStyle/>
+          <a:p>
+            <a:pPr algn="ctr"/>
+          </a:p>
+        </p:txBody>
+      </p:sp>
+      <p:sp>
+        <p:nvSpPr>
+          <p:cNvPr id="16" name="Rectangle 15"/>
+          <p:cNvSpPr/>
+          <p:nvPr/>
+        </p:nvSpPr>
+        <p:spPr>
+          <a:xfrm>
+            <a:off x="6238874" y="1905000"/>
+            <a:ext cx="2309812" cy="76200"/>
+          </a:xfrm>
+          <a:prstGeom prst="rect">
+            <a:avLst/>
+          </a:prstGeom>
+          <a:solidFill>
+            <a:srgbClr val="8B5CF6"/>
+          </a:solidFill>
+          <a:ln>
+            <a:noFill/>
+          </a:ln>
+          <a:effectLst/>
+        </p:spPr>
+        <p:style>
+          <a:lnRef idx="1">
+            <a:schemeClr val="accent1"/>
+          </a:lnRef>
+          <a:fillRef idx="3">
+            <a:schemeClr val="accent1"/>
+          </a:fillRef>
+          <a:effectRef idx="2">
+            <a:schemeClr val="accent1"/>
+          </a:effectRef>
+          <a:fontRef idx="minor">
+            <a:schemeClr val="lt1"/>
+          </a:fontRef>
+        </p:style>
+        <p:txBody>
+          <a:bodyPr rtlCol="0" anchor="ctr"/>
+          <a:lstStyle/>
+          <a:p>
+            <a:pPr algn="ctr"/>
+          </a:p>
+        </p:txBody>
+      </p:sp>
+      <p:sp>
+        <p:nvSpPr>
+          <p:cNvPr id="17" name="TextBox 16"/>
+          <p:cNvSpPr txBox="1"/>
+          <p:nvPr/>
+        </p:nvSpPr>
+        <p:spPr>
+          <a:xfrm>
+            <a:off x="6238874" y="2286000"/>
+            <a:ext cx="2309812" cy="1047750"/>
+          </a:xfrm>
+          <a:prstGeom prst="rect">
+            <a:avLst/>
+          </a:prstGeom>
+          <a:noFill/>
+        </p:spPr>
+        <p:txBody>
+          <a:bodyPr wrap="square" anchor="ctr">
+            <a:spAutoFit/>
+          </a:bodyPr>
+          <a:lstStyle/>
+          <a:p>
+            <a:pPr algn="ctr">
+              <a:lnSpc>
+                <a:spcPct val="100000"/>
+              </a:lnSpc>
+            </a:pPr>
+            <a:r>
+              <a:rPr sz="4000" b="1">
+                <a:solidFill>
+                  <a:srgbClr val="8B5CF6"/>
+                </a:solidFill>
+                <a:latin typeface="PingFang SC"/>
+              </a:rPr>
+              <a:t>3</a:t>
+            </a:r>
+          </a:p>
+        </p:txBody>
+      </p:sp>
+      <p:sp>
+        <p:nvSpPr>
+          <p:cNvPr id="18" name="TextBox 17"/>
+          <p:cNvSpPr txBox="1"/>
+          <p:nvPr/>
+        </p:nvSpPr>
+        <p:spPr>
+          <a:xfrm>
+            <a:off x="6238874" y="3333750"/>
+            <a:ext cx="2309812" cy="323850"/>
+          </a:xfrm>
+          <a:prstGeom prst="rect">
+            <a:avLst/>
+          </a:prstGeom>
+          <a:noFill/>
+        </p:spPr>
+        <p:txBody>
+          <a:bodyPr wrap="square" anchor="ctr">
+            <a:spAutoFit/>
+          </a:bodyPr>
+          <a:lstStyle/>
+          <a:p>
+            <a:pPr algn="ctr">
+              <a:lnSpc>
+                <a:spcPct val="100000"/>
+              </a:lnSpc>
+            </a:pPr>
+            <a:r>
+              <a:rPr sz="1300" b="0">
+                <a:solidFill>
+                  <a:srgbClr val="94A3B8"/>
+                </a:solidFill>
+                <a:latin typeface="PingFang SC"/>
+              </a:rPr>
+              <a:t>角色</a:t>
+            </a:r>
+          </a:p>
+        </p:txBody>
+      </p:sp>
+      <p:sp>
+        <p:nvSpPr>
+          <p:cNvPr id="19" name="TextBox 18"/>
+          <p:cNvSpPr txBox="1"/>
+          <p:nvPr/>
+        </p:nvSpPr>
+        <p:spPr>
+          <a:xfrm>
+            <a:off x="6391274" y="4057650"/>
+            <a:ext cx="2005012" cy="571500"/>
+          </a:xfrm>
+          <a:prstGeom prst="rect">
+            <a:avLst/>
+          </a:prstGeom>
+          <a:noFill/>
+        </p:spPr>
+        <p:txBody>
+          <a:bodyPr wrap="square" anchor="ctr">
+            <a:spAutoFit/>
+          </a:bodyPr>
+          <a:lstStyle/>
+          <a:p>
+            <a:pPr algn="ctr">
+              <a:lnSpc>
+                <a:spcPct val="100000"/>
+              </a:lnSpc>
+            </a:pPr>
+            <a:r>
+              <a:rPr sz="1300" b="1">
+                <a:solidFill>
+                  <a:srgbClr val="475569"/>
+                </a:solidFill>
+                <a:latin typeface="PingFang SC"/>
+              </a:rPr>
+              <a:t>RBAC</a:t>
+            </a:r>
+          </a:p>
+        </p:txBody>
+      </p:sp>
+      <p:sp>
+        <p:nvSpPr>
+          <p:cNvPr id="20" name="Rounded Rectangle 19"/>
+          <p:cNvSpPr/>
+          <p:nvPr/>
+        </p:nvSpPr>
+        <p:spPr>
+          <a:xfrm>
+            <a:off x="8834436" y="1905000"/>
+            <a:ext cx="2309812" cy="2857500"/>
+          </a:xfrm>
+          <a:prstGeom prst="roundRect">
+            <a:avLst>
+              <a:gd name="adj" fmla="val 8000"/>
+            </a:avLst>
+          </a:prstGeom>
+          <a:solidFill>
+            <a:srgbClr val="FFFFFF"/>
+          </a:solidFill>
+          <a:ln w="12700">
+            <a:solidFill>
+              <a:srgbClr val="DDE5EE"/>
+            </a:solidFill>
+          </a:ln>
+          <a:effectLst/>
+        </p:spPr>
+        <p:style>
+          <a:lnRef idx="1">
+            <a:schemeClr val="accent1"/>
+          </a:lnRef>
+          <a:fillRef idx="3">
+            <a:schemeClr val="accent1"/>
+          </a:fillRef>
+          <a:effectRef idx="2">
+            <a:schemeClr val="accent1"/>
+          </a:effectRef>
+          <a:fontRef idx="minor">
+            <a:schemeClr val="lt1"/>
+          </a:fontRef>
+        </p:style>
+        <p:txBody>
+          <a:bodyPr rtlCol="0" anchor="ctr"/>
+          <a:lstStyle/>
+          <a:p>
+            <a:pPr algn="ctr"/>
+          </a:p>
+        </p:txBody>
+      </p:sp>
+      <p:sp>
+        <p:nvSpPr>
+          <p:cNvPr id="21" name="Rectangle 20"/>
+          <p:cNvSpPr/>
+          <p:nvPr/>
+        </p:nvSpPr>
+        <p:spPr>
+          <a:xfrm>
+            <a:off x="8834436" y="1905000"/>
+            <a:ext cx="2309812" cy="76200"/>
+          </a:xfrm>
+          <a:prstGeom prst="rect">
+            <a:avLst/>
+          </a:prstGeom>
+          <a:solidFill>
+            <a:srgbClr val="F59E0B"/>
+          </a:solidFill>
+          <a:ln>
+            <a:noFill/>
+          </a:ln>
+          <a:effectLst/>
+        </p:spPr>
+        <p:style>
+          <a:lnRef idx="1">
+            <a:schemeClr val="accent1"/>
+          </a:lnRef>
+          <a:fillRef idx="3">
+            <a:schemeClr val="accent1"/>
+          </a:fillRef>
+          <a:effectRef idx="2">
+            <a:schemeClr val="accent1"/>
+          </a:effectRef>
+          <a:fontRef idx="minor">
+            <a:schemeClr val="lt1"/>
+          </a:fontRef>
+        </p:style>
+        <p:txBody>
+          <a:bodyPr rtlCol="0" anchor="ctr"/>
+          <a:lstStyle/>
+          <a:p>
+            <a:pPr algn="ctr"/>
+          </a:p>
+        </p:txBody>
+      </p:sp>
+      <p:sp>
+        <p:nvSpPr>
+          <p:cNvPr id="22" name="TextBox 21"/>
+          <p:cNvSpPr txBox="1"/>
+          <p:nvPr/>
+        </p:nvSpPr>
+        <p:spPr>
+          <a:xfrm>
+            <a:off x="8834436" y="2286000"/>
+            <a:ext cx="2309812" cy="1047750"/>
+          </a:xfrm>
+          <a:prstGeom prst="rect">
+            <a:avLst/>
+          </a:prstGeom>
+          <a:noFill/>
+        </p:spPr>
+        <p:txBody>
+          <a:bodyPr wrap="square" anchor="ctr">
+            <a:spAutoFit/>
+          </a:bodyPr>
+          <a:lstStyle/>
+          <a:p>
+            <a:pPr algn="ctr">
+              <a:lnSpc>
+                <a:spcPct val="100000"/>
+              </a:lnSpc>
+            </a:pPr>
+            <a:r>
+              <a:rPr sz="4000" b="1">
+                <a:solidFill>
+                  <a:srgbClr val="F59E0B"/>
+                </a:solidFill>
+                <a:latin typeface="PingFang SC"/>
+              </a:rPr>
+              <a:t>100%</a:t>
+            </a:r>
+          </a:p>
+        </p:txBody>
+      </p:sp>
+      <p:sp>
+        <p:nvSpPr>
+          <p:cNvPr id="23" name="TextBox 22"/>
+          <p:cNvSpPr txBox="1"/>
+          <p:nvPr/>
+        </p:nvSpPr>
+        <p:spPr>
+          <a:xfrm>
+            <a:off x="8834436" y="3333750"/>
+            <a:ext cx="2309812" cy="323850"/>
+          </a:xfrm>
+          <a:prstGeom prst="rect">
+            <a:avLst/>
+          </a:prstGeom>
+          <a:noFill/>
+        </p:spPr>
+        <p:txBody>
+          <a:bodyPr wrap="square" anchor="ctr">
+            <a:spAutoFit/>
+          </a:bodyPr>
+          <a:lstStyle/>
+          <a:p>
+            <a:pPr algn="ctr">
+              <a:lnSpc>
+                <a:spcPct val="100000"/>
+              </a:lnSpc>
+            </a:pPr>
+            <a:r>
+              <a:rPr sz="1300" b="0">
+                <a:solidFill>
+                  <a:srgbClr val="94A3B8"/>
+                </a:solidFill>
+                <a:latin typeface="PingFang SC"/>
+              </a:rPr>
+              <a:t>高危拦截</a:t>
+            </a:r>
+          </a:p>
+        </p:txBody>
+      </p:sp>
+      <p:sp>
+        <p:nvSpPr>
+          <p:cNvPr id="24" name="TextBox 23"/>
+          <p:cNvSpPr txBox="1"/>
+          <p:nvPr/>
+        </p:nvSpPr>
+        <p:spPr>
+          <a:xfrm>
+            <a:off x="8986836" y="4057650"/>
+            <a:ext cx="2005012" cy="571500"/>
+          </a:xfrm>
+          <a:prstGeom prst="rect">
+            <a:avLst/>
+          </a:prstGeom>
+          <a:noFill/>
+        </p:spPr>
+        <p:txBody>
+          <a:bodyPr wrap="square" anchor="ctr">
+            <a:spAutoFit/>
+          </a:bodyPr>
+          <a:lstStyle/>
+          <a:p>
+            <a:pPr algn="ctr">
+              <a:lnSpc>
+                <a:spcPct val="100000"/>
+              </a:lnSpc>
+            </a:pPr>
+            <a:r>
+              <a:rPr sz="1300" b="1">
+                <a:solidFill>
+                  <a:srgbClr val="475569"/>
+                </a:solidFill>
+                <a:latin typeface="PingFang SC"/>
+              </a:rPr>
+              <a:t>实测</a:t>
+            </a:r>
+          </a:p>
+        </p:txBody>
+      </p:sp>
+      <p:sp>
+        <p:nvSpPr>
+          <p:cNvPr id="25" name="TextBox 24"/>
+          <p:cNvSpPr txBox="1"/>
+          <p:nvPr/>
+        </p:nvSpPr>
+        <p:spPr>
+          <a:xfrm>
+            <a:off x="10287000" y="6534150"/>
+            <a:ext cx="1619250" cy="266700"/>
           </a:xfrm>
           <a:prstGeom prst="rect">
             <a:avLst/>
@@ -16220,881 +17017,6 @@
               </a:lnSpc>
             </a:pPr>
             <a:r>
-              <a:rPr sz="1100" b="0">
-                <a:solidFill>
-                  <a:srgbClr val="94A3B8"/>
-                </a:solidFill>
-                <a:latin typeface="PingFang SC"/>
-              </a:rPr>
-              <a:t>22^测^工具模块单测;6^步^执行管线;3^角色^RBAC;100%^高危拦截^实测|CI 持续绿</a:t>
-            </a:r>
-          </a:p>
-        </p:txBody>
-      </p:sp>
-      <p:sp>
-        <p:nvSpPr>
-          <p:cNvPr id="6" name="Rounded Rectangle 5"/>
-          <p:cNvSpPr/>
-          <p:nvPr/>
-        </p:nvSpPr>
-        <p:spPr>
-          <a:xfrm>
-            <a:off x="1047750" y="1905000"/>
-            <a:ext cx="2309812" cy="2857500"/>
-          </a:xfrm>
-          <a:prstGeom prst="roundRect">
-            <a:avLst>
-              <a:gd name="adj" fmla="val 8000"/>
-            </a:avLst>
-          </a:prstGeom>
-          <a:solidFill>
-            <a:srgbClr val="FFFFFF"/>
-          </a:solidFill>
-          <a:ln w="12700">
-            <a:solidFill>
-              <a:srgbClr val="DDE5EE"/>
-            </a:solidFill>
-          </a:ln>
-          <a:effectLst/>
-        </p:spPr>
-        <p:style>
-          <a:lnRef idx="1">
-            <a:schemeClr val="accent1"/>
-          </a:lnRef>
-          <a:fillRef idx="3">
-            <a:schemeClr val="accent1"/>
-          </a:fillRef>
-          <a:effectRef idx="2">
-            <a:schemeClr val="accent1"/>
-          </a:effectRef>
-          <a:fontRef idx="minor">
-            <a:schemeClr val="lt1"/>
-          </a:fontRef>
-        </p:style>
-        <p:txBody>
-          <a:bodyPr rtlCol="0" anchor="ctr"/>
-          <a:lstStyle/>
-          <a:p>
-            <a:pPr algn="ctr"/>
-          </a:p>
-        </p:txBody>
-      </p:sp>
-      <p:sp>
-        <p:nvSpPr>
-          <p:cNvPr id="7" name="Rectangle 6"/>
-          <p:cNvSpPr/>
-          <p:nvPr/>
-        </p:nvSpPr>
-        <p:spPr>
-          <a:xfrm>
-            <a:off x="1047750" y="1905000"/>
-            <a:ext cx="2309812" cy="76200"/>
-          </a:xfrm>
-          <a:prstGeom prst="rect">
-            <a:avLst/>
-          </a:prstGeom>
-          <a:solidFill>
-            <a:srgbClr val="2563EB"/>
-          </a:solidFill>
-          <a:ln>
-            <a:noFill/>
-          </a:ln>
-          <a:effectLst/>
-        </p:spPr>
-        <p:style>
-          <a:lnRef idx="1">
-            <a:schemeClr val="accent1"/>
-          </a:lnRef>
-          <a:fillRef idx="3">
-            <a:schemeClr val="accent1"/>
-          </a:fillRef>
-          <a:effectRef idx="2">
-            <a:schemeClr val="accent1"/>
-          </a:effectRef>
-          <a:fontRef idx="minor">
-            <a:schemeClr val="lt1"/>
-          </a:fontRef>
-        </p:style>
-        <p:txBody>
-          <a:bodyPr rtlCol="0" anchor="ctr"/>
-          <a:lstStyle/>
-          <a:p>
-            <a:pPr algn="ctr"/>
-          </a:p>
-        </p:txBody>
-      </p:sp>
-      <p:sp>
-        <p:nvSpPr>
-          <p:cNvPr id="8" name="TextBox 7"/>
-          <p:cNvSpPr txBox="1"/>
-          <p:nvPr/>
-        </p:nvSpPr>
-        <p:spPr>
-          <a:xfrm>
-            <a:off x="1047750" y="2286000"/>
-            <a:ext cx="2309812" cy="1047750"/>
-          </a:xfrm>
-          <a:prstGeom prst="rect">
-            <a:avLst/>
-          </a:prstGeom>
-          <a:noFill/>
-        </p:spPr>
-        <p:txBody>
-          <a:bodyPr wrap="square" anchor="ctr">
-            <a:spAutoFit/>
-          </a:bodyPr>
-          <a:lstStyle/>
-          <a:p>
-            <a:pPr algn="ctr">
-              <a:lnSpc>
-                <a:spcPct val="100000"/>
-              </a:lnSpc>
-            </a:pPr>
-            <a:r>
-              <a:rPr sz="4000" b="1">
-                <a:solidFill>
-                  <a:srgbClr val="2563EB"/>
-                </a:solidFill>
-                <a:latin typeface="PingFang SC"/>
-              </a:rPr>
-              <a:t>22</a:t>
-            </a:r>
-          </a:p>
-        </p:txBody>
-      </p:sp>
-      <p:sp>
-        <p:nvSpPr>
-          <p:cNvPr id="9" name="TextBox 8"/>
-          <p:cNvSpPr txBox="1"/>
-          <p:nvPr/>
-        </p:nvSpPr>
-        <p:spPr>
-          <a:xfrm>
-            <a:off x="1047750" y="3333750"/>
-            <a:ext cx="2309812" cy="323850"/>
-          </a:xfrm>
-          <a:prstGeom prst="rect">
-            <a:avLst/>
-          </a:prstGeom>
-          <a:noFill/>
-        </p:spPr>
-        <p:txBody>
-          <a:bodyPr wrap="square" anchor="ctr">
-            <a:spAutoFit/>
-          </a:bodyPr>
-          <a:lstStyle/>
-          <a:p>
-            <a:pPr algn="ctr">
-              <a:lnSpc>
-                <a:spcPct val="100000"/>
-              </a:lnSpc>
-            </a:pPr>
-            <a:r>
-              <a:rPr sz="1300" b="0">
-                <a:solidFill>
-                  <a:srgbClr val="94A3B8"/>
-                </a:solidFill>
-                <a:latin typeface="PingFang SC"/>
-              </a:rPr>
-              <a:t>测</a:t>
-            </a:r>
-          </a:p>
-        </p:txBody>
-      </p:sp>
-      <p:sp>
-        <p:nvSpPr>
-          <p:cNvPr id="10" name="TextBox 9"/>
-          <p:cNvSpPr txBox="1"/>
-          <p:nvPr/>
-        </p:nvSpPr>
-        <p:spPr>
-          <a:xfrm>
-            <a:off x="1200150" y="4057650"/>
-            <a:ext cx="2005012" cy="571500"/>
-          </a:xfrm>
-          <a:prstGeom prst="rect">
-            <a:avLst/>
-          </a:prstGeom>
-          <a:noFill/>
-        </p:spPr>
-        <p:txBody>
-          <a:bodyPr wrap="square" anchor="ctr">
-            <a:spAutoFit/>
-          </a:bodyPr>
-          <a:lstStyle/>
-          <a:p>
-            <a:pPr algn="ctr">
-              <a:lnSpc>
-                <a:spcPct val="100000"/>
-              </a:lnSpc>
-            </a:pPr>
-            <a:r>
-              <a:rPr sz="1300" b="1">
-                <a:solidFill>
-                  <a:srgbClr val="475569"/>
-                </a:solidFill>
-                <a:latin typeface="PingFang SC"/>
-              </a:rPr>
-              <a:t>工具模块单测</a:t>
-            </a:r>
-          </a:p>
-        </p:txBody>
-      </p:sp>
-      <p:sp>
-        <p:nvSpPr>
-          <p:cNvPr id="11" name="Rounded Rectangle 10"/>
-          <p:cNvSpPr/>
-          <p:nvPr/>
-        </p:nvSpPr>
-        <p:spPr>
-          <a:xfrm>
-            <a:off x="3643312" y="1905000"/>
-            <a:ext cx="2309812" cy="2857500"/>
-          </a:xfrm>
-          <a:prstGeom prst="roundRect">
-            <a:avLst>
-              <a:gd name="adj" fmla="val 8000"/>
-            </a:avLst>
-          </a:prstGeom>
-          <a:solidFill>
-            <a:srgbClr val="FFFFFF"/>
-          </a:solidFill>
-          <a:ln w="12700">
-            <a:solidFill>
-              <a:srgbClr val="DDE5EE"/>
-            </a:solidFill>
-          </a:ln>
-          <a:effectLst/>
-        </p:spPr>
-        <p:style>
-          <a:lnRef idx="1">
-            <a:schemeClr val="accent1"/>
-          </a:lnRef>
-          <a:fillRef idx="3">
-            <a:schemeClr val="accent1"/>
-          </a:fillRef>
-          <a:effectRef idx="2">
-            <a:schemeClr val="accent1"/>
-          </a:effectRef>
-          <a:fontRef idx="minor">
-            <a:schemeClr val="lt1"/>
-          </a:fontRef>
-        </p:style>
-        <p:txBody>
-          <a:bodyPr rtlCol="0" anchor="ctr"/>
-          <a:lstStyle/>
-          <a:p>
-            <a:pPr algn="ctr"/>
-          </a:p>
-        </p:txBody>
-      </p:sp>
-      <p:sp>
-        <p:nvSpPr>
-          <p:cNvPr id="12" name="Rectangle 11"/>
-          <p:cNvSpPr/>
-          <p:nvPr/>
-        </p:nvSpPr>
-        <p:spPr>
-          <a:xfrm>
-            <a:off x="3643312" y="1905000"/>
-            <a:ext cx="2309812" cy="76200"/>
-          </a:xfrm>
-          <a:prstGeom prst="rect">
-            <a:avLst/>
-          </a:prstGeom>
-          <a:solidFill>
-            <a:srgbClr val="14B8A6"/>
-          </a:solidFill>
-          <a:ln>
-            <a:noFill/>
-          </a:ln>
-          <a:effectLst/>
-        </p:spPr>
-        <p:style>
-          <a:lnRef idx="1">
-            <a:schemeClr val="accent1"/>
-          </a:lnRef>
-          <a:fillRef idx="3">
-            <a:schemeClr val="accent1"/>
-          </a:fillRef>
-          <a:effectRef idx="2">
-            <a:schemeClr val="accent1"/>
-          </a:effectRef>
-          <a:fontRef idx="minor">
-            <a:schemeClr val="lt1"/>
-          </a:fontRef>
-        </p:style>
-        <p:txBody>
-          <a:bodyPr rtlCol="0" anchor="ctr"/>
-          <a:lstStyle/>
-          <a:p>
-            <a:pPr algn="ctr"/>
-          </a:p>
-        </p:txBody>
-      </p:sp>
-      <p:sp>
-        <p:nvSpPr>
-          <p:cNvPr id="13" name="TextBox 12"/>
-          <p:cNvSpPr txBox="1"/>
-          <p:nvPr/>
-        </p:nvSpPr>
-        <p:spPr>
-          <a:xfrm>
-            <a:off x="3643312" y="2286000"/>
-            <a:ext cx="2309812" cy="1047750"/>
-          </a:xfrm>
-          <a:prstGeom prst="rect">
-            <a:avLst/>
-          </a:prstGeom>
-          <a:noFill/>
-        </p:spPr>
-        <p:txBody>
-          <a:bodyPr wrap="square" anchor="ctr">
-            <a:spAutoFit/>
-          </a:bodyPr>
-          <a:lstStyle/>
-          <a:p>
-            <a:pPr algn="ctr">
-              <a:lnSpc>
-                <a:spcPct val="100000"/>
-              </a:lnSpc>
-            </a:pPr>
-            <a:r>
-              <a:rPr sz="4000" b="1">
-                <a:solidFill>
-                  <a:srgbClr val="14B8A6"/>
-                </a:solidFill>
-                <a:latin typeface="PingFang SC"/>
-              </a:rPr>
-              <a:t>6</a:t>
-            </a:r>
-          </a:p>
-        </p:txBody>
-      </p:sp>
-      <p:sp>
-        <p:nvSpPr>
-          <p:cNvPr id="14" name="TextBox 13"/>
-          <p:cNvSpPr txBox="1"/>
-          <p:nvPr/>
-        </p:nvSpPr>
-        <p:spPr>
-          <a:xfrm>
-            <a:off x="3643312" y="3333750"/>
-            <a:ext cx="2309812" cy="323850"/>
-          </a:xfrm>
-          <a:prstGeom prst="rect">
-            <a:avLst/>
-          </a:prstGeom>
-          <a:noFill/>
-        </p:spPr>
-        <p:txBody>
-          <a:bodyPr wrap="square" anchor="ctr">
-            <a:spAutoFit/>
-          </a:bodyPr>
-          <a:lstStyle/>
-          <a:p>
-            <a:pPr algn="ctr">
-              <a:lnSpc>
-                <a:spcPct val="100000"/>
-              </a:lnSpc>
-            </a:pPr>
-            <a:r>
-              <a:rPr sz="1300" b="0">
-                <a:solidFill>
-                  <a:srgbClr val="94A3B8"/>
-                </a:solidFill>
-                <a:latin typeface="PingFang SC"/>
-              </a:rPr>
-              <a:t>步</a:t>
-            </a:r>
-          </a:p>
-        </p:txBody>
-      </p:sp>
-      <p:sp>
-        <p:nvSpPr>
-          <p:cNvPr id="15" name="TextBox 14"/>
-          <p:cNvSpPr txBox="1"/>
-          <p:nvPr/>
-        </p:nvSpPr>
-        <p:spPr>
-          <a:xfrm>
-            <a:off x="3795712" y="4057650"/>
-            <a:ext cx="2005012" cy="571500"/>
-          </a:xfrm>
-          <a:prstGeom prst="rect">
-            <a:avLst/>
-          </a:prstGeom>
-          <a:noFill/>
-        </p:spPr>
-        <p:txBody>
-          <a:bodyPr wrap="square" anchor="ctr">
-            <a:spAutoFit/>
-          </a:bodyPr>
-          <a:lstStyle/>
-          <a:p>
-            <a:pPr algn="ctr">
-              <a:lnSpc>
-                <a:spcPct val="100000"/>
-              </a:lnSpc>
-            </a:pPr>
-            <a:r>
-              <a:rPr sz="1300" b="1">
-                <a:solidFill>
-                  <a:srgbClr val="475569"/>
-                </a:solidFill>
-                <a:latin typeface="PingFang SC"/>
-              </a:rPr>
-              <a:t>执行管线</a:t>
-            </a:r>
-          </a:p>
-        </p:txBody>
-      </p:sp>
-      <p:sp>
-        <p:nvSpPr>
-          <p:cNvPr id="16" name="Rounded Rectangle 15"/>
-          <p:cNvSpPr/>
-          <p:nvPr/>
-        </p:nvSpPr>
-        <p:spPr>
-          <a:xfrm>
-            <a:off x="6238874" y="1905000"/>
-            <a:ext cx="2309812" cy="2857500"/>
-          </a:xfrm>
-          <a:prstGeom prst="roundRect">
-            <a:avLst>
-              <a:gd name="adj" fmla="val 8000"/>
-            </a:avLst>
-          </a:prstGeom>
-          <a:solidFill>
-            <a:srgbClr val="FFFFFF"/>
-          </a:solidFill>
-          <a:ln w="12700">
-            <a:solidFill>
-              <a:srgbClr val="DDE5EE"/>
-            </a:solidFill>
-          </a:ln>
-          <a:effectLst/>
-        </p:spPr>
-        <p:style>
-          <a:lnRef idx="1">
-            <a:schemeClr val="accent1"/>
-          </a:lnRef>
-          <a:fillRef idx="3">
-            <a:schemeClr val="accent1"/>
-          </a:fillRef>
-          <a:effectRef idx="2">
-            <a:schemeClr val="accent1"/>
-          </a:effectRef>
-          <a:fontRef idx="minor">
-            <a:schemeClr val="lt1"/>
-          </a:fontRef>
-        </p:style>
-        <p:txBody>
-          <a:bodyPr rtlCol="0" anchor="ctr"/>
-          <a:lstStyle/>
-          <a:p>
-            <a:pPr algn="ctr"/>
-          </a:p>
-        </p:txBody>
-      </p:sp>
-      <p:sp>
-        <p:nvSpPr>
-          <p:cNvPr id="17" name="Rectangle 16"/>
-          <p:cNvSpPr/>
-          <p:nvPr/>
-        </p:nvSpPr>
-        <p:spPr>
-          <a:xfrm>
-            <a:off x="6238874" y="1905000"/>
-            <a:ext cx="2309812" cy="76200"/>
-          </a:xfrm>
-          <a:prstGeom prst="rect">
-            <a:avLst/>
-          </a:prstGeom>
-          <a:solidFill>
-            <a:srgbClr val="8B5CF6"/>
-          </a:solidFill>
-          <a:ln>
-            <a:noFill/>
-          </a:ln>
-          <a:effectLst/>
-        </p:spPr>
-        <p:style>
-          <a:lnRef idx="1">
-            <a:schemeClr val="accent1"/>
-          </a:lnRef>
-          <a:fillRef idx="3">
-            <a:schemeClr val="accent1"/>
-          </a:fillRef>
-          <a:effectRef idx="2">
-            <a:schemeClr val="accent1"/>
-          </a:effectRef>
-          <a:fontRef idx="minor">
-            <a:schemeClr val="lt1"/>
-          </a:fontRef>
-        </p:style>
-        <p:txBody>
-          <a:bodyPr rtlCol="0" anchor="ctr"/>
-          <a:lstStyle/>
-          <a:p>
-            <a:pPr algn="ctr"/>
-          </a:p>
-        </p:txBody>
-      </p:sp>
-      <p:sp>
-        <p:nvSpPr>
-          <p:cNvPr id="18" name="TextBox 17"/>
-          <p:cNvSpPr txBox="1"/>
-          <p:nvPr/>
-        </p:nvSpPr>
-        <p:spPr>
-          <a:xfrm>
-            <a:off x="6238874" y="2286000"/>
-            <a:ext cx="2309812" cy="1047750"/>
-          </a:xfrm>
-          <a:prstGeom prst="rect">
-            <a:avLst/>
-          </a:prstGeom>
-          <a:noFill/>
-        </p:spPr>
-        <p:txBody>
-          <a:bodyPr wrap="square" anchor="ctr">
-            <a:spAutoFit/>
-          </a:bodyPr>
-          <a:lstStyle/>
-          <a:p>
-            <a:pPr algn="ctr">
-              <a:lnSpc>
-                <a:spcPct val="100000"/>
-              </a:lnSpc>
-            </a:pPr>
-            <a:r>
-              <a:rPr sz="4000" b="1">
-                <a:solidFill>
-                  <a:srgbClr val="8B5CF6"/>
-                </a:solidFill>
-                <a:latin typeface="PingFang SC"/>
-              </a:rPr>
-              <a:t>3</a:t>
-            </a:r>
-          </a:p>
-        </p:txBody>
-      </p:sp>
-      <p:sp>
-        <p:nvSpPr>
-          <p:cNvPr id="19" name="TextBox 18"/>
-          <p:cNvSpPr txBox="1"/>
-          <p:nvPr/>
-        </p:nvSpPr>
-        <p:spPr>
-          <a:xfrm>
-            <a:off x="6238874" y="3333750"/>
-            <a:ext cx="2309812" cy="323850"/>
-          </a:xfrm>
-          <a:prstGeom prst="rect">
-            <a:avLst/>
-          </a:prstGeom>
-          <a:noFill/>
-        </p:spPr>
-        <p:txBody>
-          <a:bodyPr wrap="square" anchor="ctr">
-            <a:spAutoFit/>
-          </a:bodyPr>
-          <a:lstStyle/>
-          <a:p>
-            <a:pPr algn="ctr">
-              <a:lnSpc>
-                <a:spcPct val="100000"/>
-              </a:lnSpc>
-            </a:pPr>
-            <a:r>
-              <a:rPr sz="1300" b="0">
-                <a:solidFill>
-                  <a:srgbClr val="94A3B8"/>
-                </a:solidFill>
-                <a:latin typeface="PingFang SC"/>
-              </a:rPr>
-              <a:t>角色</a:t>
-            </a:r>
-          </a:p>
-        </p:txBody>
-      </p:sp>
-      <p:sp>
-        <p:nvSpPr>
-          <p:cNvPr id="20" name="TextBox 19"/>
-          <p:cNvSpPr txBox="1"/>
-          <p:nvPr/>
-        </p:nvSpPr>
-        <p:spPr>
-          <a:xfrm>
-            <a:off x="6391274" y="4057650"/>
-            <a:ext cx="2005012" cy="571500"/>
-          </a:xfrm>
-          <a:prstGeom prst="rect">
-            <a:avLst/>
-          </a:prstGeom>
-          <a:noFill/>
-        </p:spPr>
-        <p:txBody>
-          <a:bodyPr wrap="square" anchor="ctr">
-            <a:spAutoFit/>
-          </a:bodyPr>
-          <a:lstStyle/>
-          <a:p>
-            <a:pPr algn="ctr">
-              <a:lnSpc>
-                <a:spcPct val="100000"/>
-              </a:lnSpc>
-            </a:pPr>
-            <a:r>
-              <a:rPr sz="1300" b="1">
-                <a:solidFill>
-                  <a:srgbClr val="475569"/>
-                </a:solidFill>
-                <a:latin typeface="PingFang SC"/>
-              </a:rPr>
-              <a:t>RBAC</a:t>
-            </a:r>
-          </a:p>
-        </p:txBody>
-      </p:sp>
-      <p:sp>
-        <p:nvSpPr>
-          <p:cNvPr id="21" name="Rounded Rectangle 20"/>
-          <p:cNvSpPr/>
-          <p:nvPr/>
-        </p:nvSpPr>
-        <p:spPr>
-          <a:xfrm>
-            <a:off x="8834436" y="1905000"/>
-            <a:ext cx="2309812" cy="2857500"/>
-          </a:xfrm>
-          <a:prstGeom prst="roundRect">
-            <a:avLst>
-              <a:gd name="adj" fmla="val 8000"/>
-            </a:avLst>
-          </a:prstGeom>
-          <a:solidFill>
-            <a:srgbClr val="FFFFFF"/>
-          </a:solidFill>
-          <a:ln w="12700">
-            <a:solidFill>
-              <a:srgbClr val="DDE5EE"/>
-            </a:solidFill>
-          </a:ln>
-          <a:effectLst/>
-        </p:spPr>
-        <p:style>
-          <a:lnRef idx="1">
-            <a:schemeClr val="accent1"/>
-          </a:lnRef>
-          <a:fillRef idx="3">
-            <a:schemeClr val="accent1"/>
-          </a:fillRef>
-          <a:effectRef idx="2">
-            <a:schemeClr val="accent1"/>
-          </a:effectRef>
-          <a:fontRef idx="minor">
-            <a:schemeClr val="lt1"/>
-          </a:fontRef>
-        </p:style>
-        <p:txBody>
-          <a:bodyPr rtlCol="0" anchor="ctr"/>
-          <a:lstStyle/>
-          <a:p>
-            <a:pPr algn="ctr"/>
-          </a:p>
-        </p:txBody>
-      </p:sp>
-      <p:sp>
-        <p:nvSpPr>
-          <p:cNvPr id="22" name="Rectangle 21"/>
-          <p:cNvSpPr/>
-          <p:nvPr/>
-        </p:nvSpPr>
-        <p:spPr>
-          <a:xfrm>
-            <a:off x="8834436" y="1905000"/>
-            <a:ext cx="2309812" cy="76200"/>
-          </a:xfrm>
-          <a:prstGeom prst="rect">
-            <a:avLst/>
-          </a:prstGeom>
-          <a:solidFill>
-            <a:srgbClr val="F59E0B"/>
-          </a:solidFill>
-          <a:ln>
-            <a:noFill/>
-          </a:ln>
-          <a:effectLst/>
-        </p:spPr>
-        <p:style>
-          <a:lnRef idx="1">
-            <a:schemeClr val="accent1"/>
-          </a:lnRef>
-          <a:fillRef idx="3">
-            <a:schemeClr val="accent1"/>
-          </a:fillRef>
-          <a:effectRef idx="2">
-            <a:schemeClr val="accent1"/>
-          </a:effectRef>
-          <a:fontRef idx="minor">
-            <a:schemeClr val="lt1"/>
-          </a:fontRef>
-        </p:style>
-        <p:txBody>
-          <a:bodyPr rtlCol="0" anchor="ctr"/>
-          <a:lstStyle/>
-          <a:p>
-            <a:pPr algn="ctr"/>
-          </a:p>
-        </p:txBody>
-      </p:sp>
-      <p:sp>
-        <p:nvSpPr>
-          <p:cNvPr id="23" name="TextBox 22"/>
-          <p:cNvSpPr txBox="1"/>
-          <p:nvPr/>
-        </p:nvSpPr>
-        <p:spPr>
-          <a:xfrm>
-            <a:off x="8834436" y="2286000"/>
-            <a:ext cx="2309812" cy="1047750"/>
-          </a:xfrm>
-          <a:prstGeom prst="rect">
-            <a:avLst/>
-          </a:prstGeom>
-          <a:noFill/>
-        </p:spPr>
-        <p:txBody>
-          <a:bodyPr wrap="square" anchor="ctr">
-            <a:spAutoFit/>
-          </a:bodyPr>
-          <a:lstStyle/>
-          <a:p>
-            <a:pPr algn="ctr">
-              <a:lnSpc>
-                <a:spcPct val="100000"/>
-              </a:lnSpc>
-            </a:pPr>
-            <a:r>
-              <a:rPr sz="4000" b="1">
-                <a:solidFill>
-                  <a:srgbClr val="F59E0B"/>
-                </a:solidFill>
-                <a:latin typeface="PingFang SC"/>
-              </a:rPr>
-              <a:t>100%</a:t>
-            </a:r>
-          </a:p>
-        </p:txBody>
-      </p:sp>
-      <p:sp>
-        <p:nvSpPr>
-          <p:cNvPr id="24" name="TextBox 23"/>
-          <p:cNvSpPr txBox="1"/>
-          <p:nvPr/>
-        </p:nvSpPr>
-        <p:spPr>
-          <a:xfrm>
-            <a:off x="8834436" y="3333750"/>
-            <a:ext cx="2309812" cy="323850"/>
-          </a:xfrm>
-          <a:prstGeom prst="rect">
-            <a:avLst/>
-          </a:prstGeom>
-          <a:noFill/>
-        </p:spPr>
-        <p:txBody>
-          <a:bodyPr wrap="square" anchor="ctr">
-            <a:spAutoFit/>
-          </a:bodyPr>
-          <a:lstStyle/>
-          <a:p>
-            <a:pPr algn="ctr">
-              <a:lnSpc>
-                <a:spcPct val="100000"/>
-              </a:lnSpc>
-            </a:pPr>
-            <a:r>
-              <a:rPr sz="1300" b="0">
-                <a:solidFill>
-                  <a:srgbClr val="94A3B8"/>
-                </a:solidFill>
-                <a:latin typeface="PingFang SC"/>
-              </a:rPr>
-              <a:t>高危拦截</a:t>
-            </a:r>
-          </a:p>
-        </p:txBody>
-      </p:sp>
-      <p:sp>
-        <p:nvSpPr>
-          <p:cNvPr id="25" name="TextBox 24"/>
-          <p:cNvSpPr txBox="1"/>
-          <p:nvPr/>
-        </p:nvSpPr>
-        <p:spPr>
-          <a:xfrm>
-            <a:off x="8986836" y="4057650"/>
-            <a:ext cx="2005012" cy="571500"/>
-          </a:xfrm>
-          <a:prstGeom prst="rect">
-            <a:avLst/>
-          </a:prstGeom>
-          <a:noFill/>
-        </p:spPr>
-        <p:txBody>
-          <a:bodyPr wrap="square" anchor="ctr">
-            <a:spAutoFit/>
-          </a:bodyPr>
-          <a:lstStyle/>
-          <a:p>
-            <a:pPr algn="ctr">
-              <a:lnSpc>
-                <a:spcPct val="100000"/>
-              </a:lnSpc>
-            </a:pPr>
-            <a:r>
-              <a:rPr sz="1300" b="1">
-                <a:solidFill>
-                  <a:srgbClr val="475569"/>
-                </a:solidFill>
-                <a:latin typeface="PingFang SC"/>
-              </a:rPr>
-              <a:t>实测|CI 持续绿</a:t>
-            </a:r>
-          </a:p>
-        </p:txBody>
-      </p:sp>
-      <p:sp>
-        <p:nvSpPr>
-          <p:cNvPr id="26" name="TextBox 25"/>
-          <p:cNvSpPr txBox="1"/>
-          <p:nvPr/>
-        </p:nvSpPr>
-        <p:spPr>
-          <a:xfrm>
-            <a:off x="10287000" y="6534150"/>
-            <a:ext cx="1619250" cy="266700"/>
-          </a:xfrm>
-          <a:prstGeom prst="rect">
-            <a:avLst/>
-          </a:prstGeom>
-          <a:noFill/>
-        </p:spPr>
-        <p:txBody>
-          <a:bodyPr wrap="square" anchor="ctr">
-            <a:spAutoFit/>
-          </a:bodyPr>
-          <a:lstStyle/>
-          <a:p>
-            <a:pPr algn="r">
-              <a:lnSpc>
-                <a:spcPct val="100000"/>
-              </a:lnSpc>
-            </a:pPr>
-            <a:r>
               <a:rPr sz="900" b="0">
                 <a:solidFill>
                   <a:srgbClr val="94A3B8"/>
@@ -17108,7 +17030,7 @@
       </p:sp>
       <p:sp>
         <p:nvSpPr>
-          <p:cNvPr id="27" name="TextBox 26"/>
+          <p:cNvPr id="26" name="TextBox 25"/>
           <p:cNvSpPr txBox="1"/>
           <p:nvPr/>
         </p:nvSpPr>
@@ -18503,14 +18425,641 @@
       </p:sp>
       <p:sp>
         <p:nvSpPr>
-          <p:cNvPr id="5" name="TextBox 4"/>
+          <p:cNvPr id="5" name="Rounded Rectangle 4"/>
+          <p:cNvSpPr/>
+          <p:nvPr/>
+        </p:nvSpPr>
+        <p:spPr>
+          <a:xfrm>
+            <a:off x="1047750" y="1905000"/>
+            <a:ext cx="3175000" cy="2857500"/>
+          </a:xfrm>
+          <a:prstGeom prst="roundRect">
+            <a:avLst>
+              <a:gd name="adj" fmla="val 8000"/>
+            </a:avLst>
+          </a:prstGeom>
+          <a:solidFill>
+            <a:srgbClr val="FFFFFF"/>
+          </a:solidFill>
+          <a:ln w="12700">
+            <a:solidFill>
+              <a:srgbClr val="DDE5EE"/>
+            </a:solidFill>
+          </a:ln>
+          <a:effectLst/>
+        </p:spPr>
+        <p:style>
+          <a:lnRef idx="1">
+            <a:schemeClr val="accent1"/>
+          </a:lnRef>
+          <a:fillRef idx="3">
+            <a:schemeClr val="accent1"/>
+          </a:fillRef>
+          <a:effectRef idx="2">
+            <a:schemeClr val="accent1"/>
+          </a:effectRef>
+          <a:fontRef idx="minor">
+            <a:schemeClr val="lt1"/>
+          </a:fontRef>
+        </p:style>
+        <p:txBody>
+          <a:bodyPr rtlCol="0" anchor="ctr"/>
+          <a:lstStyle/>
+          <a:p>
+            <a:pPr algn="ctr"/>
+          </a:p>
+        </p:txBody>
+      </p:sp>
+      <p:sp>
+        <p:nvSpPr>
+          <p:cNvPr id="6" name="Rectangle 5"/>
+          <p:cNvSpPr/>
+          <p:nvPr/>
+        </p:nvSpPr>
+        <p:spPr>
+          <a:xfrm>
+            <a:off x="1047750" y="1905000"/>
+            <a:ext cx="3175000" cy="76200"/>
+          </a:xfrm>
+          <a:prstGeom prst="rect">
+            <a:avLst/>
+          </a:prstGeom>
+          <a:solidFill>
+            <a:srgbClr val="2563EB"/>
+          </a:solidFill>
+          <a:ln>
+            <a:noFill/>
+          </a:ln>
+          <a:effectLst/>
+        </p:spPr>
+        <p:style>
+          <a:lnRef idx="1">
+            <a:schemeClr val="accent1"/>
+          </a:lnRef>
+          <a:fillRef idx="3">
+            <a:schemeClr val="accent1"/>
+          </a:fillRef>
+          <a:effectRef idx="2">
+            <a:schemeClr val="accent1"/>
+          </a:effectRef>
+          <a:fontRef idx="minor">
+            <a:schemeClr val="lt1"/>
+          </a:fontRef>
+        </p:style>
+        <p:txBody>
+          <a:bodyPr rtlCol="0" anchor="ctr"/>
+          <a:lstStyle/>
+          <a:p>
+            <a:pPr algn="ctr"/>
+          </a:p>
+        </p:txBody>
+      </p:sp>
+      <p:sp>
+        <p:nvSpPr>
+          <p:cNvPr id="7" name="TextBox 6"/>
           <p:cNvSpPr txBox="1"/>
           <p:nvPr/>
         </p:nvSpPr>
         <p:spPr>
           <a:xfrm>
-            <a:off x="9334500" y="0"/>
-            <a:ext cx="2667000" cy="704850"/>
+            <a:off x="1047750" y="2286000"/>
+            <a:ext cx="3175000" cy="1047750"/>
+          </a:xfrm>
+          <a:prstGeom prst="rect">
+            <a:avLst/>
+          </a:prstGeom>
+          <a:noFill/>
+        </p:spPr>
+        <p:txBody>
+          <a:bodyPr wrap="square" anchor="ctr">
+            <a:spAutoFit/>
+          </a:bodyPr>
+          <a:lstStyle/>
+          <a:p>
+            <a:pPr algn="ctr">
+              <a:lnSpc>
+                <a:spcPct val="100000"/>
+              </a:lnSpc>
+            </a:pPr>
+            <a:r>
+              <a:rPr sz="4000" b="1">
+                <a:solidFill>
+                  <a:srgbClr val="2563EB"/>
+                </a:solidFill>
+                <a:latin typeface="PingFang SC"/>
+              </a:rPr>
+              <a:t>25</a:t>
+            </a:r>
+          </a:p>
+        </p:txBody>
+      </p:sp>
+      <p:sp>
+        <p:nvSpPr>
+          <p:cNvPr id="8" name="TextBox 7"/>
+          <p:cNvSpPr txBox="1"/>
+          <p:nvPr/>
+        </p:nvSpPr>
+        <p:spPr>
+          <a:xfrm>
+            <a:off x="1047750" y="3333750"/>
+            <a:ext cx="3175000" cy="323850"/>
+          </a:xfrm>
+          <a:prstGeom prst="rect">
+            <a:avLst/>
+          </a:prstGeom>
+          <a:noFill/>
+        </p:spPr>
+        <p:txBody>
+          <a:bodyPr wrap="square" anchor="ctr">
+            <a:spAutoFit/>
+          </a:bodyPr>
+          <a:lstStyle/>
+          <a:p>
+            <a:pPr algn="ctr">
+              <a:lnSpc>
+                <a:spcPct val="100000"/>
+              </a:lnSpc>
+            </a:pPr>
+            <a:r>
+              <a:rPr sz="1300" b="0">
+                <a:solidFill>
+                  <a:srgbClr val="94A3B8"/>
+                </a:solidFill>
+                <a:latin typeface="PingFang SC"/>
+              </a:rPr>
+              <a:t>视觉页</a:t>
+            </a:r>
+          </a:p>
+        </p:txBody>
+      </p:sp>
+      <p:sp>
+        <p:nvSpPr>
+          <p:cNvPr id="9" name="TextBox 8"/>
+          <p:cNvSpPr txBox="1"/>
+          <p:nvPr/>
+        </p:nvSpPr>
+        <p:spPr>
+          <a:xfrm>
+            <a:off x="1200150" y="4057650"/>
+            <a:ext cx="2870200" cy="571500"/>
+          </a:xfrm>
+          <a:prstGeom prst="rect">
+            <a:avLst/>
+          </a:prstGeom>
+          <a:noFill/>
+        </p:spPr>
+        <p:txBody>
+          <a:bodyPr wrap="square" anchor="ctr">
+            <a:spAutoFit/>
+          </a:bodyPr>
+          <a:lstStyle/>
+          <a:p>
+            <a:pPr algn="ctr">
+              <a:lnSpc>
+                <a:spcPct val="100000"/>
+              </a:lnSpc>
+            </a:pPr>
+            <a:r>
+              <a:rPr sz="1300" b="1">
+                <a:solidFill>
+                  <a:srgbClr val="475569"/>
+                </a:solidFill>
+                <a:latin typeface="PingFang SC"/>
+              </a:rPr>
+              <a:t>本章</a:t>
+            </a:r>
+          </a:p>
+        </p:txBody>
+      </p:sp>
+      <p:sp>
+        <p:nvSpPr>
+          <p:cNvPr id="10" name="Rounded Rectangle 9"/>
+          <p:cNvSpPr/>
+          <p:nvPr/>
+        </p:nvSpPr>
+        <p:spPr>
+          <a:xfrm>
+            <a:off x="4508500" y="1905000"/>
+            <a:ext cx="3175000" cy="2857500"/>
+          </a:xfrm>
+          <a:prstGeom prst="roundRect">
+            <a:avLst>
+              <a:gd name="adj" fmla="val 8000"/>
+            </a:avLst>
+          </a:prstGeom>
+          <a:solidFill>
+            <a:srgbClr val="FFFFFF"/>
+          </a:solidFill>
+          <a:ln w="12700">
+            <a:solidFill>
+              <a:srgbClr val="DDE5EE"/>
+            </a:solidFill>
+          </a:ln>
+          <a:effectLst/>
+        </p:spPr>
+        <p:style>
+          <a:lnRef idx="1">
+            <a:schemeClr val="accent1"/>
+          </a:lnRef>
+          <a:fillRef idx="3">
+            <a:schemeClr val="accent1"/>
+          </a:fillRef>
+          <a:effectRef idx="2">
+            <a:schemeClr val="accent1"/>
+          </a:effectRef>
+          <a:fontRef idx="minor">
+            <a:schemeClr val="lt1"/>
+          </a:fontRef>
+        </p:style>
+        <p:txBody>
+          <a:bodyPr rtlCol="0" anchor="ctr"/>
+          <a:lstStyle/>
+          <a:p>
+            <a:pPr algn="ctr"/>
+          </a:p>
+        </p:txBody>
+      </p:sp>
+      <p:sp>
+        <p:nvSpPr>
+          <p:cNvPr id="11" name="Rectangle 10"/>
+          <p:cNvSpPr/>
+          <p:nvPr/>
+        </p:nvSpPr>
+        <p:spPr>
+          <a:xfrm>
+            <a:off x="4508500" y="1905000"/>
+            <a:ext cx="3175000" cy="76200"/>
+          </a:xfrm>
+          <a:prstGeom prst="rect">
+            <a:avLst/>
+          </a:prstGeom>
+          <a:solidFill>
+            <a:srgbClr val="14B8A6"/>
+          </a:solidFill>
+          <a:ln>
+            <a:noFill/>
+          </a:ln>
+          <a:effectLst/>
+        </p:spPr>
+        <p:style>
+          <a:lnRef idx="1">
+            <a:schemeClr val="accent1"/>
+          </a:lnRef>
+          <a:fillRef idx="3">
+            <a:schemeClr val="accent1"/>
+          </a:fillRef>
+          <a:effectRef idx="2">
+            <a:schemeClr val="accent1"/>
+          </a:effectRef>
+          <a:fontRef idx="minor">
+            <a:schemeClr val="lt1"/>
+          </a:fontRef>
+        </p:style>
+        <p:txBody>
+          <a:bodyPr rtlCol="0" anchor="ctr"/>
+          <a:lstStyle/>
+          <a:p>
+            <a:pPr algn="ctr"/>
+          </a:p>
+        </p:txBody>
+      </p:sp>
+      <p:sp>
+        <p:nvSpPr>
+          <p:cNvPr id="12" name="TextBox 11"/>
+          <p:cNvSpPr txBox="1"/>
+          <p:nvPr/>
+        </p:nvSpPr>
+        <p:spPr>
+          <a:xfrm>
+            <a:off x="4508500" y="2286000"/>
+            <a:ext cx="3175000" cy="1047750"/>
+          </a:xfrm>
+          <a:prstGeom prst="rect">
+            <a:avLst/>
+          </a:prstGeom>
+          <a:noFill/>
+        </p:spPr>
+        <p:txBody>
+          <a:bodyPr wrap="square" anchor="ctr">
+            <a:spAutoFit/>
+          </a:bodyPr>
+          <a:lstStyle/>
+          <a:p>
+            <a:pPr algn="ctr">
+              <a:lnSpc>
+                <a:spcPct val="100000"/>
+              </a:lnSpc>
+            </a:pPr>
+            <a:r>
+              <a:rPr sz="4000" b="1">
+                <a:solidFill>
+                  <a:srgbClr val="14B8A6"/>
+                </a:solidFill>
+                <a:latin typeface="PingFang SC"/>
+              </a:rPr>
+              <a:t>10</a:t>
+            </a:r>
+          </a:p>
+        </p:txBody>
+      </p:sp>
+      <p:sp>
+        <p:nvSpPr>
+          <p:cNvPr id="13" name="TextBox 12"/>
+          <p:cNvSpPr txBox="1"/>
+          <p:nvPr/>
+        </p:nvSpPr>
+        <p:spPr>
+          <a:xfrm>
+            <a:off x="4508500" y="3333750"/>
+            <a:ext cx="3175000" cy="323850"/>
+          </a:xfrm>
+          <a:prstGeom prst="rect">
+            <a:avLst/>
+          </a:prstGeom>
+          <a:noFill/>
+        </p:spPr>
+        <p:txBody>
+          <a:bodyPr wrap="square" anchor="ctr">
+            <a:spAutoFit/>
+          </a:bodyPr>
+          <a:lstStyle/>
+          <a:p>
+            <a:pPr algn="ctr">
+              <a:lnSpc>
+                <a:spcPct val="100000"/>
+              </a:lnSpc>
+            </a:pPr>
+            <a:r>
+              <a:rPr sz="1300" b="0">
+                <a:solidFill>
+                  <a:srgbClr val="94A3B8"/>
+                </a:solidFill>
+                <a:latin typeface="PingFang SC"/>
+              </a:rPr>
+              <a:t>组件</a:t>
+            </a:r>
+          </a:p>
+        </p:txBody>
+      </p:sp>
+      <p:sp>
+        <p:nvSpPr>
+          <p:cNvPr id="14" name="TextBox 13"/>
+          <p:cNvSpPr txBox="1"/>
+          <p:nvPr/>
+        </p:nvSpPr>
+        <p:spPr>
+          <a:xfrm>
+            <a:off x="4660900" y="4057650"/>
+            <a:ext cx="2870200" cy="571500"/>
+          </a:xfrm>
+          <a:prstGeom prst="rect">
+            <a:avLst/>
+          </a:prstGeom>
+          <a:noFill/>
+        </p:spPr>
+        <p:txBody>
+          <a:bodyPr wrap="square" anchor="ctr">
+            <a:spAutoFit/>
+          </a:bodyPr>
+          <a:lstStyle/>
+          <a:p>
+            <a:pPr algn="ctr">
+              <a:lnSpc>
+                <a:spcPct val="100000"/>
+              </a:lnSpc>
+            </a:pPr>
+            <a:r>
+              <a:rPr sz="1300" b="1">
+                <a:solidFill>
+                  <a:srgbClr val="475569"/>
+                </a:solidFill>
+                <a:latin typeface="PingFang SC"/>
+              </a:rPr>
+              <a:t>图形类型</a:t>
+            </a:r>
+          </a:p>
+        </p:txBody>
+      </p:sp>
+      <p:sp>
+        <p:nvSpPr>
+          <p:cNvPr id="15" name="Rounded Rectangle 14"/>
+          <p:cNvSpPr/>
+          <p:nvPr/>
+        </p:nvSpPr>
+        <p:spPr>
+          <a:xfrm>
+            <a:off x="7969250" y="1905000"/>
+            <a:ext cx="3175000" cy="2857500"/>
+          </a:xfrm>
+          <a:prstGeom prst="roundRect">
+            <a:avLst>
+              <a:gd name="adj" fmla="val 8000"/>
+            </a:avLst>
+          </a:prstGeom>
+          <a:solidFill>
+            <a:srgbClr val="FFFFFF"/>
+          </a:solidFill>
+          <a:ln w="12700">
+            <a:solidFill>
+              <a:srgbClr val="DDE5EE"/>
+            </a:solidFill>
+          </a:ln>
+          <a:effectLst/>
+        </p:spPr>
+        <p:style>
+          <a:lnRef idx="1">
+            <a:schemeClr val="accent1"/>
+          </a:lnRef>
+          <a:fillRef idx="3">
+            <a:schemeClr val="accent1"/>
+          </a:fillRef>
+          <a:effectRef idx="2">
+            <a:schemeClr val="accent1"/>
+          </a:effectRef>
+          <a:fontRef idx="minor">
+            <a:schemeClr val="lt1"/>
+          </a:fontRef>
+        </p:style>
+        <p:txBody>
+          <a:bodyPr rtlCol="0" anchor="ctr"/>
+          <a:lstStyle/>
+          <a:p>
+            <a:pPr algn="ctr"/>
+          </a:p>
+        </p:txBody>
+      </p:sp>
+      <p:sp>
+        <p:nvSpPr>
+          <p:cNvPr id="16" name="Rectangle 15"/>
+          <p:cNvSpPr/>
+          <p:nvPr/>
+        </p:nvSpPr>
+        <p:spPr>
+          <a:xfrm>
+            <a:off x="7969250" y="1905000"/>
+            <a:ext cx="3175000" cy="76200"/>
+          </a:xfrm>
+          <a:prstGeom prst="rect">
+            <a:avLst/>
+          </a:prstGeom>
+          <a:solidFill>
+            <a:srgbClr val="8B5CF6"/>
+          </a:solidFill>
+          <a:ln>
+            <a:noFill/>
+          </a:ln>
+          <a:effectLst/>
+        </p:spPr>
+        <p:style>
+          <a:lnRef idx="1">
+            <a:schemeClr val="accent1"/>
+          </a:lnRef>
+          <a:fillRef idx="3">
+            <a:schemeClr val="accent1"/>
+          </a:fillRef>
+          <a:effectRef idx="2">
+            <a:schemeClr val="accent1"/>
+          </a:effectRef>
+          <a:fontRef idx="minor">
+            <a:schemeClr val="lt1"/>
+          </a:fontRef>
+        </p:style>
+        <p:txBody>
+          <a:bodyPr rtlCol="0" anchor="ctr"/>
+          <a:lstStyle/>
+          <a:p>
+            <a:pPr algn="ctr"/>
+          </a:p>
+        </p:txBody>
+      </p:sp>
+      <p:sp>
+        <p:nvSpPr>
+          <p:cNvPr id="17" name="TextBox 16"/>
+          <p:cNvSpPr txBox="1"/>
+          <p:nvPr/>
+        </p:nvSpPr>
+        <p:spPr>
+          <a:xfrm>
+            <a:off x="7969250" y="2286000"/>
+            <a:ext cx="3175000" cy="1047750"/>
+          </a:xfrm>
+          <a:prstGeom prst="rect">
+            <a:avLst/>
+          </a:prstGeom>
+          <a:noFill/>
+        </p:spPr>
+        <p:txBody>
+          <a:bodyPr wrap="square" anchor="ctr">
+            <a:spAutoFit/>
+          </a:bodyPr>
+          <a:lstStyle/>
+          <a:p>
+            <a:pPr algn="ctr">
+              <a:lnSpc>
+                <a:spcPct val="100000"/>
+              </a:lnSpc>
+            </a:pPr>
+            <a:r>
+              <a:rPr sz="4000" b="1">
+                <a:solidFill>
+                  <a:srgbClr val="8B5CF6"/>
+                </a:solidFill>
+                <a:latin typeface="PingFang SC"/>
+              </a:rPr>
+              <a:t>6.7</a:t>
+            </a:r>
+          </a:p>
+        </p:txBody>
+      </p:sp>
+      <p:sp>
+        <p:nvSpPr>
+          <p:cNvPr id="18" name="TextBox 17"/>
+          <p:cNvSpPr txBox="1"/>
+          <p:nvPr/>
+        </p:nvSpPr>
+        <p:spPr>
+          <a:xfrm>
+            <a:off x="7969250" y="3333750"/>
+            <a:ext cx="3175000" cy="323850"/>
+          </a:xfrm>
+          <a:prstGeom prst="rect">
+            <a:avLst/>
+          </a:prstGeom>
+          <a:noFill/>
+        </p:spPr>
+        <p:txBody>
+          <a:bodyPr wrap="square" anchor="ctr">
+            <a:spAutoFit/>
+          </a:bodyPr>
+          <a:lstStyle/>
+          <a:p>
+            <a:pPr algn="ctr">
+              <a:lnSpc>
+                <a:spcPct val="100000"/>
+              </a:lnSpc>
+            </a:pPr>
+            <a:r>
+              <a:rPr sz="1300" b="0">
+                <a:solidFill>
+                  <a:srgbClr val="94A3B8"/>
+                </a:solidFill>
+                <a:latin typeface="PingFang SC"/>
+              </a:rPr>
+              <a:t>图/讲</a:t>
+            </a:r>
+          </a:p>
+        </p:txBody>
+      </p:sp>
+      <p:sp>
+        <p:nvSpPr>
+          <p:cNvPr id="19" name="TextBox 18"/>
+          <p:cNvSpPr txBox="1"/>
+          <p:nvPr/>
+        </p:nvSpPr>
+        <p:spPr>
+          <a:xfrm>
+            <a:off x="8121650" y="4057650"/>
+            <a:ext cx="2870200" cy="571500"/>
+          </a:xfrm>
+          <a:prstGeom prst="rect">
+            <a:avLst/>
+          </a:prstGeom>
+          <a:noFill/>
+        </p:spPr>
+        <p:txBody>
+          <a:bodyPr wrap="square" anchor="ctr">
+            <a:spAutoFit/>
+          </a:bodyPr>
+          <a:lstStyle/>
+          <a:p>
+            <a:pPr algn="ctr">
+              <a:lnSpc>
+                <a:spcPct val="100000"/>
+              </a:lnSpc>
+            </a:pPr>
+            <a:r>
+              <a:rPr sz="1300" b="1">
+                <a:solidFill>
+                  <a:srgbClr val="475569"/>
+                </a:solidFill>
+                <a:latin typeface="PingFang SC"/>
+              </a:rPr>
+              <a:t>全课程均值</a:t>
+            </a:r>
+          </a:p>
+        </p:txBody>
+      </p:sp>
+      <p:sp>
+        <p:nvSpPr>
+          <p:cNvPr id="20" name="TextBox 19"/>
+          <p:cNvSpPr txBox="1"/>
+          <p:nvPr/>
+        </p:nvSpPr>
+        <p:spPr>
+          <a:xfrm>
+            <a:off x="10287000" y="6534150"/>
+            <a:ext cx="1619250" cy="266700"/>
           </a:xfrm>
           <a:prstGeom prst="rect">
             <a:avLst/>
@@ -18529,672 +19078,6 @@
               </a:lnSpc>
             </a:pPr>
             <a:r>
-              <a:rPr sz="1100" b="0">
-                <a:solidFill>
-                  <a:srgbClr val="94A3B8"/>
-                </a:solidFill>
-                <a:latin typeface="PingFang SC"/>
-              </a:rPr>
-              <a:t>25^视觉页^本章;10^组件^图形类型;6.7^图/讲^全课程均值|数据持续更新</a:t>
-            </a:r>
-          </a:p>
-        </p:txBody>
-      </p:sp>
-      <p:sp>
-        <p:nvSpPr>
-          <p:cNvPr id="6" name="Rounded Rectangle 5"/>
-          <p:cNvSpPr/>
-          <p:nvPr/>
-        </p:nvSpPr>
-        <p:spPr>
-          <a:xfrm>
-            <a:off x="1047750" y="1905000"/>
-            <a:ext cx="3175000" cy="2857500"/>
-          </a:xfrm>
-          <a:prstGeom prst="roundRect">
-            <a:avLst>
-              <a:gd name="adj" fmla="val 8000"/>
-            </a:avLst>
-          </a:prstGeom>
-          <a:solidFill>
-            <a:srgbClr val="FFFFFF"/>
-          </a:solidFill>
-          <a:ln w="12700">
-            <a:solidFill>
-              <a:srgbClr val="DDE5EE"/>
-            </a:solidFill>
-          </a:ln>
-          <a:effectLst/>
-        </p:spPr>
-        <p:style>
-          <a:lnRef idx="1">
-            <a:schemeClr val="accent1"/>
-          </a:lnRef>
-          <a:fillRef idx="3">
-            <a:schemeClr val="accent1"/>
-          </a:fillRef>
-          <a:effectRef idx="2">
-            <a:schemeClr val="accent1"/>
-          </a:effectRef>
-          <a:fontRef idx="minor">
-            <a:schemeClr val="lt1"/>
-          </a:fontRef>
-        </p:style>
-        <p:txBody>
-          <a:bodyPr rtlCol="0" anchor="ctr"/>
-          <a:lstStyle/>
-          <a:p>
-            <a:pPr algn="ctr"/>
-          </a:p>
-        </p:txBody>
-      </p:sp>
-      <p:sp>
-        <p:nvSpPr>
-          <p:cNvPr id="7" name="Rectangle 6"/>
-          <p:cNvSpPr/>
-          <p:nvPr/>
-        </p:nvSpPr>
-        <p:spPr>
-          <a:xfrm>
-            <a:off x="1047750" y="1905000"/>
-            <a:ext cx="3175000" cy="76200"/>
-          </a:xfrm>
-          <a:prstGeom prst="rect">
-            <a:avLst/>
-          </a:prstGeom>
-          <a:solidFill>
-            <a:srgbClr val="2563EB"/>
-          </a:solidFill>
-          <a:ln>
-            <a:noFill/>
-          </a:ln>
-          <a:effectLst/>
-        </p:spPr>
-        <p:style>
-          <a:lnRef idx="1">
-            <a:schemeClr val="accent1"/>
-          </a:lnRef>
-          <a:fillRef idx="3">
-            <a:schemeClr val="accent1"/>
-          </a:fillRef>
-          <a:effectRef idx="2">
-            <a:schemeClr val="accent1"/>
-          </a:effectRef>
-          <a:fontRef idx="minor">
-            <a:schemeClr val="lt1"/>
-          </a:fontRef>
-        </p:style>
-        <p:txBody>
-          <a:bodyPr rtlCol="0" anchor="ctr"/>
-          <a:lstStyle/>
-          <a:p>
-            <a:pPr algn="ctr"/>
-          </a:p>
-        </p:txBody>
-      </p:sp>
-      <p:sp>
-        <p:nvSpPr>
-          <p:cNvPr id="8" name="TextBox 7"/>
-          <p:cNvSpPr txBox="1"/>
-          <p:nvPr/>
-        </p:nvSpPr>
-        <p:spPr>
-          <a:xfrm>
-            <a:off x="1047750" y="2286000"/>
-            <a:ext cx="3175000" cy="1047750"/>
-          </a:xfrm>
-          <a:prstGeom prst="rect">
-            <a:avLst/>
-          </a:prstGeom>
-          <a:noFill/>
-        </p:spPr>
-        <p:txBody>
-          <a:bodyPr wrap="square" anchor="ctr">
-            <a:spAutoFit/>
-          </a:bodyPr>
-          <a:lstStyle/>
-          <a:p>
-            <a:pPr algn="ctr">
-              <a:lnSpc>
-                <a:spcPct val="100000"/>
-              </a:lnSpc>
-            </a:pPr>
-            <a:r>
-              <a:rPr sz="4000" b="1">
-                <a:solidFill>
-                  <a:srgbClr val="2563EB"/>
-                </a:solidFill>
-                <a:latin typeface="PingFang SC"/>
-              </a:rPr>
-              <a:t>25</a:t>
-            </a:r>
-          </a:p>
-        </p:txBody>
-      </p:sp>
-      <p:sp>
-        <p:nvSpPr>
-          <p:cNvPr id="9" name="TextBox 8"/>
-          <p:cNvSpPr txBox="1"/>
-          <p:nvPr/>
-        </p:nvSpPr>
-        <p:spPr>
-          <a:xfrm>
-            <a:off x="1047750" y="3333750"/>
-            <a:ext cx="3175000" cy="323850"/>
-          </a:xfrm>
-          <a:prstGeom prst="rect">
-            <a:avLst/>
-          </a:prstGeom>
-          <a:noFill/>
-        </p:spPr>
-        <p:txBody>
-          <a:bodyPr wrap="square" anchor="ctr">
-            <a:spAutoFit/>
-          </a:bodyPr>
-          <a:lstStyle/>
-          <a:p>
-            <a:pPr algn="ctr">
-              <a:lnSpc>
-                <a:spcPct val="100000"/>
-              </a:lnSpc>
-            </a:pPr>
-            <a:r>
-              <a:rPr sz="1300" b="0">
-                <a:solidFill>
-                  <a:srgbClr val="94A3B8"/>
-                </a:solidFill>
-                <a:latin typeface="PingFang SC"/>
-              </a:rPr>
-              <a:t>视觉页</a:t>
-            </a:r>
-          </a:p>
-        </p:txBody>
-      </p:sp>
-      <p:sp>
-        <p:nvSpPr>
-          <p:cNvPr id="10" name="TextBox 9"/>
-          <p:cNvSpPr txBox="1"/>
-          <p:nvPr/>
-        </p:nvSpPr>
-        <p:spPr>
-          <a:xfrm>
-            <a:off x="1200150" y="4057650"/>
-            <a:ext cx="2870200" cy="571500"/>
-          </a:xfrm>
-          <a:prstGeom prst="rect">
-            <a:avLst/>
-          </a:prstGeom>
-          <a:noFill/>
-        </p:spPr>
-        <p:txBody>
-          <a:bodyPr wrap="square" anchor="ctr">
-            <a:spAutoFit/>
-          </a:bodyPr>
-          <a:lstStyle/>
-          <a:p>
-            <a:pPr algn="ctr">
-              <a:lnSpc>
-                <a:spcPct val="100000"/>
-              </a:lnSpc>
-            </a:pPr>
-            <a:r>
-              <a:rPr sz="1300" b="1">
-                <a:solidFill>
-                  <a:srgbClr val="475569"/>
-                </a:solidFill>
-                <a:latin typeface="PingFang SC"/>
-              </a:rPr>
-              <a:t>本章</a:t>
-            </a:r>
-          </a:p>
-        </p:txBody>
-      </p:sp>
-      <p:sp>
-        <p:nvSpPr>
-          <p:cNvPr id="11" name="Rounded Rectangle 10"/>
-          <p:cNvSpPr/>
-          <p:nvPr/>
-        </p:nvSpPr>
-        <p:spPr>
-          <a:xfrm>
-            <a:off x="4508500" y="1905000"/>
-            <a:ext cx="3175000" cy="2857500"/>
-          </a:xfrm>
-          <a:prstGeom prst="roundRect">
-            <a:avLst>
-              <a:gd name="adj" fmla="val 8000"/>
-            </a:avLst>
-          </a:prstGeom>
-          <a:solidFill>
-            <a:srgbClr val="FFFFFF"/>
-          </a:solidFill>
-          <a:ln w="12700">
-            <a:solidFill>
-              <a:srgbClr val="DDE5EE"/>
-            </a:solidFill>
-          </a:ln>
-          <a:effectLst/>
-        </p:spPr>
-        <p:style>
-          <a:lnRef idx="1">
-            <a:schemeClr val="accent1"/>
-          </a:lnRef>
-          <a:fillRef idx="3">
-            <a:schemeClr val="accent1"/>
-          </a:fillRef>
-          <a:effectRef idx="2">
-            <a:schemeClr val="accent1"/>
-          </a:effectRef>
-          <a:fontRef idx="minor">
-            <a:schemeClr val="lt1"/>
-          </a:fontRef>
-        </p:style>
-        <p:txBody>
-          <a:bodyPr rtlCol="0" anchor="ctr"/>
-          <a:lstStyle/>
-          <a:p>
-            <a:pPr algn="ctr"/>
-          </a:p>
-        </p:txBody>
-      </p:sp>
-      <p:sp>
-        <p:nvSpPr>
-          <p:cNvPr id="12" name="Rectangle 11"/>
-          <p:cNvSpPr/>
-          <p:nvPr/>
-        </p:nvSpPr>
-        <p:spPr>
-          <a:xfrm>
-            <a:off x="4508500" y="1905000"/>
-            <a:ext cx="3175000" cy="76200"/>
-          </a:xfrm>
-          <a:prstGeom prst="rect">
-            <a:avLst/>
-          </a:prstGeom>
-          <a:solidFill>
-            <a:srgbClr val="14B8A6"/>
-          </a:solidFill>
-          <a:ln>
-            <a:noFill/>
-          </a:ln>
-          <a:effectLst/>
-        </p:spPr>
-        <p:style>
-          <a:lnRef idx="1">
-            <a:schemeClr val="accent1"/>
-          </a:lnRef>
-          <a:fillRef idx="3">
-            <a:schemeClr val="accent1"/>
-          </a:fillRef>
-          <a:effectRef idx="2">
-            <a:schemeClr val="accent1"/>
-          </a:effectRef>
-          <a:fontRef idx="minor">
-            <a:schemeClr val="lt1"/>
-          </a:fontRef>
-        </p:style>
-        <p:txBody>
-          <a:bodyPr rtlCol="0" anchor="ctr"/>
-          <a:lstStyle/>
-          <a:p>
-            <a:pPr algn="ctr"/>
-          </a:p>
-        </p:txBody>
-      </p:sp>
-      <p:sp>
-        <p:nvSpPr>
-          <p:cNvPr id="13" name="TextBox 12"/>
-          <p:cNvSpPr txBox="1"/>
-          <p:nvPr/>
-        </p:nvSpPr>
-        <p:spPr>
-          <a:xfrm>
-            <a:off x="4508500" y="2286000"/>
-            <a:ext cx="3175000" cy="1047750"/>
-          </a:xfrm>
-          <a:prstGeom prst="rect">
-            <a:avLst/>
-          </a:prstGeom>
-          <a:noFill/>
-        </p:spPr>
-        <p:txBody>
-          <a:bodyPr wrap="square" anchor="ctr">
-            <a:spAutoFit/>
-          </a:bodyPr>
-          <a:lstStyle/>
-          <a:p>
-            <a:pPr algn="ctr">
-              <a:lnSpc>
-                <a:spcPct val="100000"/>
-              </a:lnSpc>
-            </a:pPr>
-            <a:r>
-              <a:rPr sz="4000" b="1">
-                <a:solidFill>
-                  <a:srgbClr val="14B8A6"/>
-                </a:solidFill>
-                <a:latin typeface="PingFang SC"/>
-              </a:rPr>
-              <a:t>10</a:t>
-            </a:r>
-          </a:p>
-        </p:txBody>
-      </p:sp>
-      <p:sp>
-        <p:nvSpPr>
-          <p:cNvPr id="14" name="TextBox 13"/>
-          <p:cNvSpPr txBox="1"/>
-          <p:nvPr/>
-        </p:nvSpPr>
-        <p:spPr>
-          <a:xfrm>
-            <a:off x="4508500" y="3333750"/>
-            <a:ext cx="3175000" cy="323850"/>
-          </a:xfrm>
-          <a:prstGeom prst="rect">
-            <a:avLst/>
-          </a:prstGeom>
-          <a:noFill/>
-        </p:spPr>
-        <p:txBody>
-          <a:bodyPr wrap="square" anchor="ctr">
-            <a:spAutoFit/>
-          </a:bodyPr>
-          <a:lstStyle/>
-          <a:p>
-            <a:pPr algn="ctr">
-              <a:lnSpc>
-                <a:spcPct val="100000"/>
-              </a:lnSpc>
-            </a:pPr>
-            <a:r>
-              <a:rPr sz="1300" b="0">
-                <a:solidFill>
-                  <a:srgbClr val="94A3B8"/>
-                </a:solidFill>
-                <a:latin typeface="PingFang SC"/>
-              </a:rPr>
-              <a:t>组件</a:t>
-            </a:r>
-          </a:p>
-        </p:txBody>
-      </p:sp>
-      <p:sp>
-        <p:nvSpPr>
-          <p:cNvPr id="15" name="TextBox 14"/>
-          <p:cNvSpPr txBox="1"/>
-          <p:nvPr/>
-        </p:nvSpPr>
-        <p:spPr>
-          <a:xfrm>
-            <a:off x="4660900" y="4057650"/>
-            <a:ext cx="2870200" cy="571500"/>
-          </a:xfrm>
-          <a:prstGeom prst="rect">
-            <a:avLst/>
-          </a:prstGeom>
-          <a:noFill/>
-        </p:spPr>
-        <p:txBody>
-          <a:bodyPr wrap="square" anchor="ctr">
-            <a:spAutoFit/>
-          </a:bodyPr>
-          <a:lstStyle/>
-          <a:p>
-            <a:pPr algn="ctr">
-              <a:lnSpc>
-                <a:spcPct val="100000"/>
-              </a:lnSpc>
-            </a:pPr>
-            <a:r>
-              <a:rPr sz="1300" b="1">
-                <a:solidFill>
-                  <a:srgbClr val="475569"/>
-                </a:solidFill>
-                <a:latin typeface="PingFang SC"/>
-              </a:rPr>
-              <a:t>图形类型</a:t>
-            </a:r>
-          </a:p>
-        </p:txBody>
-      </p:sp>
-      <p:sp>
-        <p:nvSpPr>
-          <p:cNvPr id="16" name="Rounded Rectangle 15"/>
-          <p:cNvSpPr/>
-          <p:nvPr/>
-        </p:nvSpPr>
-        <p:spPr>
-          <a:xfrm>
-            <a:off x="7969250" y="1905000"/>
-            <a:ext cx="3175000" cy="2857500"/>
-          </a:xfrm>
-          <a:prstGeom prst="roundRect">
-            <a:avLst>
-              <a:gd name="adj" fmla="val 8000"/>
-            </a:avLst>
-          </a:prstGeom>
-          <a:solidFill>
-            <a:srgbClr val="FFFFFF"/>
-          </a:solidFill>
-          <a:ln w="12700">
-            <a:solidFill>
-              <a:srgbClr val="DDE5EE"/>
-            </a:solidFill>
-          </a:ln>
-          <a:effectLst/>
-        </p:spPr>
-        <p:style>
-          <a:lnRef idx="1">
-            <a:schemeClr val="accent1"/>
-          </a:lnRef>
-          <a:fillRef idx="3">
-            <a:schemeClr val="accent1"/>
-          </a:fillRef>
-          <a:effectRef idx="2">
-            <a:schemeClr val="accent1"/>
-          </a:effectRef>
-          <a:fontRef idx="minor">
-            <a:schemeClr val="lt1"/>
-          </a:fontRef>
-        </p:style>
-        <p:txBody>
-          <a:bodyPr rtlCol="0" anchor="ctr"/>
-          <a:lstStyle/>
-          <a:p>
-            <a:pPr algn="ctr"/>
-          </a:p>
-        </p:txBody>
-      </p:sp>
-      <p:sp>
-        <p:nvSpPr>
-          <p:cNvPr id="17" name="Rectangle 16"/>
-          <p:cNvSpPr/>
-          <p:nvPr/>
-        </p:nvSpPr>
-        <p:spPr>
-          <a:xfrm>
-            <a:off x="7969250" y="1905000"/>
-            <a:ext cx="3175000" cy="76200"/>
-          </a:xfrm>
-          <a:prstGeom prst="rect">
-            <a:avLst/>
-          </a:prstGeom>
-          <a:solidFill>
-            <a:srgbClr val="8B5CF6"/>
-          </a:solidFill>
-          <a:ln>
-            <a:noFill/>
-          </a:ln>
-          <a:effectLst/>
-        </p:spPr>
-        <p:style>
-          <a:lnRef idx="1">
-            <a:schemeClr val="accent1"/>
-          </a:lnRef>
-          <a:fillRef idx="3">
-            <a:schemeClr val="accent1"/>
-          </a:fillRef>
-          <a:effectRef idx="2">
-            <a:schemeClr val="accent1"/>
-          </a:effectRef>
-          <a:fontRef idx="minor">
-            <a:schemeClr val="lt1"/>
-          </a:fontRef>
-        </p:style>
-        <p:txBody>
-          <a:bodyPr rtlCol="0" anchor="ctr"/>
-          <a:lstStyle/>
-          <a:p>
-            <a:pPr algn="ctr"/>
-          </a:p>
-        </p:txBody>
-      </p:sp>
-      <p:sp>
-        <p:nvSpPr>
-          <p:cNvPr id="18" name="TextBox 17"/>
-          <p:cNvSpPr txBox="1"/>
-          <p:nvPr/>
-        </p:nvSpPr>
-        <p:spPr>
-          <a:xfrm>
-            <a:off x="7969250" y="2286000"/>
-            <a:ext cx="3175000" cy="1047750"/>
-          </a:xfrm>
-          <a:prstGeom prst="rect">
-            <a:avLst/>
-          </a:prstGeom>
-          <a:noFill/>
-        </p:spPr>
-        <p:txBody>
-          <a:bodyPr wrap="square" anchor="ctr">
-            <a:spAutoFit/>
-          </a:bodyPr>
-          <a:lstStyle/>
-          <a:p>
-            <a:pPr algn="ctr">
-              <a:lnSpc>
-                <a:spcPct val="100000"/>
-              </a:lnSpc>
-            </a:pPr>
-            <a:r>
-              <a:rPr sz="4000" b="1">
-                <a:solidFill>
-                  <a:srgbClr val="8B5CF6"/>
-                </a:solidFill>
-                <a:latin typeface="PingFang SC"/>
-              </a:rPr>
-              <a:t>6.7</a:t>
-            </a:r>
-          </a:p>
-        </p:txBody>
-      </p:sp>
-      <p:sp>
-        <p:nvSpPr>
-          <p:cNvPr id="19" name="TextBox 18"/>
-          <p:cNvSpPr txBox="1"/>
-          <p:nvPr/>
-        </p:nvSpPr>
-        <p:spPr>
-          <a:xfrm>
-            <a:off x="7969250" y="3333750"/>
-            <a:ext cx="3175000" cy="323850"/>
-          </a:xfrm>
-          <a:prstGeom prst="rect">
-            <a:avLst/>
-          </a:prstGeom>
-          <a:noFill/>
-        </p:spPr>
-        <p:txBody>
-          <a:bodyPr wrap="square" anchor="ctr">
-            <a:spAutoFit/>
-          </a:bodyPr>
-          <a:lstStyle/>
-          <a:p>
-            <a:pPr algn="ctr">
-              <a:lnSpc>
-                <a:spcPct val="100000"/>
-              </a:lnSpc>
-            </a:pPr>
-            <a:r>
-              <a:rPr sz="1300" b="0">
-                <a:solidFill>
-                  <a:srgbClr val="94A3B8"/>
-                </a:solidFill>
-                <a:latin typeface="PingFang SC"/>
-              </a:rPr>
-              <a:t>图/讲</a:t>
-            </a:r>
-          </a:p>
-        </p:txBody>
-      </p:sp>
-      <p:sp>
-        <p:nvSpPr>
-          <p:cNvPr id="20" name="TextBox 19"/>
-          <p:cNvSpPr txBox="1"/>
-          <p:nvPr/>
-        </p:nvSpPr>
-        <p:spPr>
-          <a:xfrm>
-            <a:off x="8121650" y="4057650"/>
-            <a:ext cx="2870200" cy="571500"/>
-          </a:xfrm>
-          <a:prstGeom prst="rect">
-            <a:avLst/>
-          </a:prstGeom>
-          <a:noFill/>
-        </p:spPr>
-        <p:txBody>
-          <a:bodyPr wrap="square" anchor="ctr">
-            <a:spAutoFit/>
-          </a:bodyPr>
-          <a:lstStyle/>
-          <a:p>
-            <a:pPr algn="ctr">
-              <a:lnSpc>
-                <a:spcPct val="100000"/>
-              </a:lnSpc>
-            </a:pPr>
-            <a:r>
-              <a:rPr sz="1300" b="1">
-                <a:solidFill>
-                  <a:srgbClr val="475569"/>
-                </a:solidFill>
-                <a:latin typeface="PingFang SC"/>
-              </a:rPr>
-              <a:t>全课程均值|数据持续更新</a:t>
-            </a:r>
-          </a:p>
-        </p:txBody>
-      </p:sp>
-      <p:sp>
-        <p:nvSpPr>
-          <p:cNvPr id="21" name="TextBox 20"/>
-          <p:cNvSpPr txBox="1"/>
-          <p:nvPr/>
-        </p:nvSpPr>
-        <p:spPr>
-          <a:xfrm>
-            <a:off x="10287000" y="6534150"/>
-            <a:ext cx="1619250" cy="266700"/>
-          </a:xfrm>
-          <a:prstGeom prst="rect">
-            <a:avLst/>
-          </a:prstGeom>
-          <a:noFill/>
-        </p:spPr>
-        <p:txBody>
-          <a:bodyPr wrap="square" anchor="ctr">
-            <a:spAutoFit/>
-          </a:bodyPr>
-          <a:lstStyle/>
-          <a:p>
-            <a:pPr algn="r">
-              <a:lnSpc>
-                <a:spcPct val="100000"/>
-              </a:lnSpc>
-            </a:pPr>
-            <a:r>
               <a:rPr sz="900" b="0">
                 <a:solidFill>
                   <a:srgbClr val="94A3B8"/>
@@ -19208,7 +19091,7 @@
       </p:sp>
       <p:sp>
         <p:nvSpPr>
-          <p:cNvPr id="22" name="TextBox 21"/>
+          <p:cNvPr id="21" name="TextBox 20"/>
           <p:cNvSpPr txBox="1"/>
           <p:nvPr/>
         </p:nvSpPr>
@@ -25108,21 +24991,407 @@
                 </a:solidFill>
                 <a:latin typeface="PingFang SC"/>
               </a:rPr>
-              <a:t>CLI 工具调试实测,$ aep tools list;get_weather [read] search_code [read];run_test [write] drop_table [dangerous];$ aep tools call get_weather --city BJ;sunny::BJ  (latency 0.4ms);# 工具先单测,再接模型</a:t>
-            </a:r>
-          </a:p>
-        </p:txBody>
-      </p:sp>
-      <p:sp>
-        <p:nvSpPr>
-          <p:cNvPr id="5" name="TextBox 4"/>
+              <a:t>CLI 工具调试实测</a:t>
+            </a:r>
+          </a:p>
+        </p:txBody>
+      </p:sp>
+      <p:sp>
+        <p:nvSpPr>
+          <p:cNvPr id="5" name="Rounded Rectangle 4"/>
+          <p:cNvSpPr/>
+          <p:nvPr/>
+        </p:nvSpPr>
+        <p:spPr>
+          <a:xfrm>
+            <a:off x="1333500" y="1047750"/>
+            <a:ext cx="9525000" cy="2952750"/>
+          </a:xfrm>
+          <a:prstGeom prst="roundRect">
+            <a:avLst>
+              <a:gd name="adj" fmla="val 8000"/>
+            </a:avLst>
+          </a:prstGeom>
+          <a:solidFill>
+            <a:srgbClr val="0D1117"/>
+          </a:solidFill>
+          <a:ln>
+            <a:noFill/>
+          </a:ln>
+          <a:effectLst/>
+        </p:spPr>
+        <p:style>
+          <a:lnRef idx="1">
+            <a:schemeClr val="accent1"/>
+          </a:lnRef>
+          <a:fillRef idx="3">
+            <a:schemeClr val="accent1"/>
+          </a:fillRef>
+          <a:effectRef idx="2">
+            <a:schemeClr val="accent1"/>
+          </a:effectRef>
+          <a:fontRef idx="minor">
+            <a:schemeClr val="lt1"/>
+          </a:fontRef>
+        </p:style>
+        <p:txBody>
+          <a:bodyPr rtlCol="0" anchor="ctr"/>
+          <a:lstStyle/>
+          <a:p>
+            <a:pPr algn="ctr"/>
+          </a:p>
+        </p:txBody>
+      </p:sp>
+      <p:sp>
+        <p:nvSpPr>
+          <p:cNvPr id="6" name="Rectangle 5"/>
+          <p:cNvSpPr/>
+          <p:nvPr/>
+        </p:nvSpPr>
+        <p:spPr>
+          <a:xfrm>
+            <a:off x="1333500" y="1047750"/>
+            <a:ext cx="9525000" cy="381000"/>
+          </a:xfrm>
+          <a:prstGeom prst="rect">
+            <a:avLst/>
+          </a:prstGeom>
+          <a:solidFill>
+            <a:srgbClr val="1F2937"/>
+          </a:solidFill>
+          <a:ln>
+            <a:noFill/>
+          </a:ln>
+          <a:effectLst/>
+        </p:spPr>
+        <p:style>
+          <a:lnRef idx="1">
+            <a:schemeClr val="accent1"/>
+          </a:lnRef>
+          <a:fillRef idx="3">
+            <a:schemeClr val="accent1"/>
+          </a:fillRef>
+          <a:effectRef idx="2">
+            <a:schemeClr val="accent1"/>
+          </a:effectRef>
+          <a:fontRef idx="minor">
+            <a:schemeClr val="lt1"/>
+          </a:fontRef>
+        </p:style>
+        <p:txBody>
+          <a:bodyPr rtlCol="0" anchor="ctr"/>
+          <a:lstStyle/>
+          <a:p>
+            <a:pPr algn="ctr"/>
+          </a:p>
+        </p:txBody>
+      </p:sp>
+      <p:sp>
+        <p:nvSpPr>
+          <p:cNvPr id="7" name="Rounded Rectangle 6"/>
+          <p:cNvSpPr/>
+          <p:nvPr/>
+        </p:nvSpPr>
+        <p:spPr>
+          <a:xfrm>
+            <a:off x="1504950" y="1181100"/>
+            <a:ext cx="123825" cy="123825"/>
+          </a:xfrm>
+          <a:prstGeom prst="roundRect">
+            <a:avLst>
+              <a:gd name="adj" fmla="val 8000"/>
+            </a:avLst>
+          </a:prstGeom>
+          <a:solidFill>
+            <a:srgbClr val="F87171"/>
+          </a:solidFill>
+          <a:ln>
+            <a:noFill/>
+          </a:ln>
+          <a:effectLst/>
+        </p:spPr>
+        <p:style>
+          <a:lnRef idx="1">
+            <a:schemeClr val="accent1"/>
+          </a:lnRef>
+          <a:fillRef idx="3">
+            <a:schemeClr val="accent1"/>
+          </a:fillRef>
+          <a:effectRef idx="2">
+            <a:schemeClr val="accent1"/>
+          </a:effectRef>
+          <a:fontRef idx="minor">
+            <a:schemeClr val="lt1"/>
+          </a:fontRef>
+        </p:style>
+        <p:txBody>
+          <a:bodyPr rtlCol="0" anchor="ctr"/>
+          <a:lstStyle/>
+          <a:p>
+            <a:pPr algn="ctr"/>
+          </a:p>
+        </p:txBody>
+      </p:sp>
+      <p:sp>
+        <p:nvSpPr>
+          <p:cNvPr id="8" name="Rounded Rectangle 7"/>
+          <p:cNvSpPr/>
+          <p:nvPr/>
+        </p:nvSpPr>
+        <p:spPr>
+          <a:xfrm>
+            <a:off x="1752600" y="1181100"/>
+            <a:ext cx="123825" cy="123825"/>
+          </a:xfrm>
+          <a:prstGeom prst="roundRect">
+            <a:avLst>
+              <a:gd name="adj" fmla="val 8000"/>
+            </a:avLst>
+          </a:prstGeom>
+          <a:solidFill>
+            <a:srgbClr val="F59E0B"/>
+          </a:solidFill>
+          <a:ln>
+            <a:noFill/>
+          </a:ln>
+          <a:effectLst/>
+        </p:spPr>
+        <p:style>
+          <a:lnRef idx="1">
+            <a:schemeClr val="accent1"/>
+          </a:lnRef>
+          <a:fillRef idx="3">
+            <a:schemeClr val="accent1"/>
+          </a:fillRef>
+          <a:effectRef idx="2">
+            <a:schemeClr val="accent1"/>
+          </a:effectRef>
+          <a:fontRef idx="minor">
+            <a:schemeClr val="lt1"/>
+          </a:fontRef>
+        </p:style>
+        <p:txBody>
+          <a:bodyPr rtlCol="0" anchor="ctr"/>
+          <a:lstStyle/>
+          <a:p>
+            <a:pPr algn="ctr"/>
+          </a:p>
+        </p:txBody>
+      </p:sp>
+      <p:sp>
+        <p:nvSpPr>
+          <p:cNvPr id="9" name="Rounded Rectangle 8"/>
+          <p:cNvSpPr/>
+          <p:nvPr/>
+        </p:nvSpPr>
+        <p:spPr>
+          <a:xfrm>
+            <a:off x="2000250" y="1181100"/>
+            <a:ext cx="123825" cy="123825"/>
+          </a:xfrm>
+          <a:prstGeom prst="roundRect">
+            <a:avLst>
+              <a:gd name="adj" fmla="val 8000"/>
+            </a:avLst>
+          </a:prstGeom>
+          <a:solidFill>
+            <a:srgbClr val="34D399"/>
+          </a:solidFill>
+          <a:ln>
+            <a:noFill/>
+          </a:ln>
+          <a:effectLst/>
+        </p:spPr>
+        <p:style>
+          <a:lnRef idx="1">
+            <a:schemeClr val="accent1"/>
+          </a:lnRef>
+          <a:fillRef idx="3">
+            <a:schemeClr val="accent1"/>
+          </a:fillRef>
+          <a:effectRef idx="2">
+            <a:schemeClr val="accent1"/>
+          </a:effectRef>
+          <a:fontRef idx="minor">
+            <a:schemeClr val="lt1"/>
+          </a:fontRef>
+        </p:style>
+        <p:txBody>
+          <a:bodyPr rtlCol="0" anchor="ctr"/>
+          <a:lstStyle/>
+          <a:p>
+            <a:pPr algn="ctr"/>
+          </a:p>
+        </p:txBody>
+      </p:sp>
+      <p:sp>
+        <p:nvSpPr>
+          <p:cNvPr id="10" name="TextBox 9"/>
           <p:cNvSpPr txBox="1"/>
           <p:nvPr/>
         </p:nvSpPr>
         <p:spPr>
           <a:xfrm>
-            <a:off x="9334500" y="0"/>
-            <a:ext cx="2667000" cy="704850"/>
+            <a:off x="2381250" y="1047750"/>
+            <a:ext cx="8286750" cy="381000"/>
+          </a:xfrm>
+          <a:prstGeom prst="rect">
+            <a:avLst/>
+          </a:prstGeom>
+          <a:noFill/>
+        </p:spPr>
+        <p:txBody>
+          <a:bodyPr wrap="square" anchor="ctr">
+            <a:spAutoFit/>
+          </a:bodyPr>
+          <a:lstStyle/>
+          <a:p>
+            <a:pPr algn="l">
+              <a:lnSpc>
+                <a:spcPct val="100000"/>
+              </a:lnSpc>
+            </a:pPr>
+            <a:r>
+              <a:rPr sz="1100" b="0">
+                <a:solidFill>
+                  <a:srgbClr val="94A3B8"/>
+                </a:solidFill>
+                <a:latin typeface="PingFang SC"/>
+              </a:rPr>
+              <a:t>terminal — 平台实测</a:t>
+            </a:r>
+          </a:p>
+        </p:txBody>
+      </p:sp>
+      <p:sp>
+        <p:nvSpPr>
+          <p:cNvPr id="11" name="TextBox 10"/>
+          <p:cNvSpPr txBox="1"/>
+          <p:nvPr/>
+        </p:nvSpPr>
+        <p:spPr>
+          <a:xfrm>
+            <a:off x="1562100" y="1581150"/>
+            <a:ext cx="9067800" cy="2286000"/>
+          </a:xfrm>
+          <a:prstGeom prst="rect">
+            <a:avLst/>
+          </a:prstGeom>
+          <a:noFill/>
+        </p:spPr>
+        <p:txBody>
+          <a:bodyPr wrap="square">
+            <a:spAutoFit/>
+          </a:bodyPr>
+          <a:lstStyle/>
+          <a:p>
+            <a:pPr>
+              <a:lnSpc>
+                <a:spcPct val="115000"/>
+              </a:lnSpc>
+            </a:pPr>
+            <a:r>
+              <a:rPr sz="1300" b="1">
+                <a:solidFill>
+                  <a:srgbClr val="34D399"/>
+                </a:solidFill>
+                <a:latin typeface="Menlo"/>
+              </a:rPr>
+              <a:t>$ aep tools list</a:t>
+            </a:r>
+          </a:p>
+          <a:p>
+            <a:pPr>
+              <a:lnSpc>
+                <a:spcPct val="115000"/>
+              </a:lnSpc>
+            </a:pPr>
+            <a:r>
+              <a:rPr sz="1300">
+                <a:solidFill>
+                  <a:srgbClr val="CBD5E1"/>
+                </a:solidFill>
+                <a:latin typeface="Menlo"/>
+              </a:rPr>
+              <a:t>get_weather [read] search_code [read]</a:t>
+            </a:r>
+          </a:p>
+          <a:p>
+            <a:pPr>
+              <a:lnSpc>
+                <a:spcPct val="115000"/>
+              </a:lnSpc>
+            </a:pPr>
+            <a:r>
+              <a:rPr sz="1300">
+                <a:solidFill>
+                  <a:srgbClr val="CBD5E1"/>
+                </a:solidFill>
+                <a:latin typeface="Menlo"/>
+              </a:rPr>
+              <a:t>run_test [write] drop_table [dangerous]</a:t>
+            </a:r>
+          </a:p>
+          <a:p>
+            <a:pPr>
+              <a:lnSpc>
+                <a:spcPct val="115000"/>
+              </a:lnSpc>
+            </a:pPr>
+            <a:r>
+              <a:rPr sz="1300" b="1">
+                <a:solidFill>
+                  <a:srgbClr val="34D399"/>
+                </a:solidFill>
+                <a:latin typeface="Menlo"/>
+              </a:rPr>
+              <a:t>$ aep tools call get_weather --city BJ</a:t>
+            </a:r>
+          </a:p>
+          <a:p>
+            <a:pPr>
+              <a:lnSpc>
+                <a:spcPct val="115000"/>
+              </a:lnSpc>
+            </a:pPr>
+            <a:r>
+              <a:rPr sz="1300">
+                <a:solidFill>
+                  <a:srgbClr val="CBD5E1"/>
+                </a:solidFill>
+                <a:latin typeface="Menlo"/>
+              </a:rPr>
+              <a:t>sunny::BJ  (latency 0.4ms)</a:t>
+            </a:r>
+          </a:p>
+          <a:p>
+            <a:pPr>
+              <a:lnSpc>
+                <a:spcPct val="115000"/>
+              </a:lnSpc>
+            </a:pPr>
+            <a:r>
+              <a:rPr sz="1300">
+                <a:solidFill>
+                  <a:srgbClr val="94A3B8"/>
+                </a:solidFill>
+                <a:latin typeface="Menlo"/>
+              </a:rPr>
+              <a:t># 工具先单测,再接模型</a:t>
+            </a:r>
+          </a:p>
+        </p:txBody>
+      </p:sp>
+      <p:sp>
+        <p:nvSpPr>
+          <p:cNvPr id="12" name="TextBox 11"/>
+          <p:cNvSpPr txBox="1"/>
+          <p:nvPr/>
+        </p:nvSpPr>
+        <p:spPr>
+          <a:xfrm>
+            <a:off x="10287000" y="6534150"/>
+            <a:ext cx="1619250" cy="266700"/>
           </a:xfrm>
           <a:prstGeom prst="rect">
             <a:avLst/>
@@ -25141,351 +25410,6 @@
               </a:lnSpc>
             </a:pPr>
             <a:r>
-              <a:rPr sz="1100" b="0">
-                <a:solidFill>
-                  <a:srgbClr val="94A3B8"/>
-                </a:solidFill>
-                <a:latin typeface="PingFang SC"/>
-              </a:rPr>
-              <a:t>教学调试闭环</a:t>
-            </a:r>
-          </a:p>
-        </p:txBody>
-      </p:sp>
-      <p:sp>
-        <p:nvSpPr>
-          <p:cNvPr id="6" name="Rounded Rectangle 5"/>
-          <p:cNvSpPr/>
-          <p:nvPr/>
-        </p:nvSpPr>
-        <p:spPr>
-          <a:xfrm>
-            <a:off x="1333500" y="952500"/>
-            <a:ext cx="9525000" cy="5048250"/>
-          </a:xfrm>
-          <a:prstGeom prst="roundRect">
-            <a:avLst>
-              <a:gd name="adj" fmla="val 8000"/>
-            </a:avLst>
-          </a:prstGeom>
-          <a:solidFill>
-            <a:srgbClr val="0D1117"/>
-          </a:solidFill>
-          <a:ln>
-            <a:noFill/>
-          </a:ln>
-          <a:effectLst/>
-        </p:spPr>
-        <p:style>
-          <a:lnRef idx="1">
-            <a:schemeClr val="accent1"/>
-          </a:lnRef>
-          <a:fillRef idx="3">
-            <a:schemeClr val="accent1"/>
-          </a:fillRef>
-          <a:effectRef idx="2">
-            <a:schemeClr val="accent1"/>
-          </a:effectRef>
-          <a:fontRef idx="minor">
-            <a:schemeClr val="lt1"/>
-          </a:fontRef>
-        </p:style>
-        <p:txBody>
-          <a:bodyPr rtlCol="0" anchor="ctr"/>
-          <a:lstStyle/>
-          <a:p>
-            <a:pPr algn="ctr"/>
-          </a:p>
-        </p:txBody>
-      </p:sp>
-      <p:sp>
-        <p:nvSpPr>
-          <p:cNvPr id="7" name="Rectangle 6"/>
-          <p:cNvSpPr/>
-          <p:nvPr/>
-        </p:nvSpPr>
-        <p:spPr>
-          <a:xfrm>
-            <a:off x="1333500" y="952500"/>
-            <a:ext cx="9525000" cy="381000"/>
-          </a:xfrm>
-          <a:prstGeom prst="rect">
-            <a:avLst/>
-          </a:prstGeom>
-          <a:solidFill>
-            <a:srgbClr val="1F2937"/>
-          </a:solidFill>
-          <a:ln>
-            <a:noFill/>
-          </a:ln>
-          <a:effectLst/>
-        </p:spPr>
-        <p:style>
-          <a:lnRef idx="1">
-            <a:schemeClr val="accent1"/>
-          </a:lnRef>
-          <a:fillRef idx="3">
-            <a:schemeClr val="accent1"/>
-          </a:fillRef>
-          <a:effectRef idx="2">
-            <a:schemeClr val="accent1"/>
-          </a:effectRef>
-          <a:fontRef idx="minor">
-            <a:schemeClr val="lt1"/>
-          </a:fontRef>
-        </p:style>
-        <p:txBody>
-          <a:bodyPr rtlCol="0" anchor="ctr"/>
-          <a:lstStyle/>
-          <a:p>
-            <a:pPr algn="ctr"/>
-          </a:p>
-        </p:txBody>
-      </p:sp>
-      <p:sp>
-        <p:nvSpPr>
-          <p:cNvPr id="8" name="Rounded Rectangle 7"/>
-          <p:cNvSpPr/>
-          <p:nvPr/>
-        </p:nvSpPr>
-        <p:spPr>
-          <a:xfrm>
-            <a:off x="1504950" y="1085850"/>
-            <a:ext cx="123825" cy="123825"/>
-          </a:xfrm>
-          <a:prstGeom prst="roundRect">
-            <a:avLst>
-              <a:gd name="adj" fmla="val 8000"/>
-            </a:avLst>
-          </a:prstGeom>
-          <a:solidFill>
-            <a:srgbClr val="F87171"/>
-          </a:solidFill>
-          <a:ln>
-            <a:noFill/>
-          </a:ln>
-          <a:effectLst/>
-        </p:spPr>
-        <p:style>
-          <a:lnRef idx="1">
-            <a:schemeClr val="accent1"/>
-          </a:lnRef>
-          <a:fillRef idx="3">
-            <a:schemeClr val="accent1"/>
-          </a:fillRef>
-          <a:effectRef idx="2">
-            <a:schemeClr val="accent1"/>
-          </a:effectRef>
-          <a:fontRef idx="minor">
-            <a:schemeClr val="lt1"/>
-          </a:fontRef>
-        </p:style>
-        <p:txBody>
-          <a:bodyPr rtlCol="0" anchor="ctr"/>
-          <a:lstStyle/>
-          <a:p>
-            <a:pPr algn="ctr"/>
-          </a:p>
-        </p:txBody>
-      </p:sp>
-      <p:sp>
-        <p:nvSpPr>
-          <p:cNvPr id="9" name="Rounded Rectangle 8"/>
-          <p:cNvSpPr/>
-          <p:nvPr/>
-        </p:nvSpPr>
-        <p:spPr>
-          <a:xfrm>
-            <a:off x="1752600" y="1085850"/>
-            <a:ext cx="123825" cy="123825"/>
-          </a:xfrm>
-          <a:prstGeom prst="roundRect">
-            <a:avLst>
-              <a:gd name="adj" fmla="val 8000"/>
-            </a:avLst>
-          </a:prstGeom>
-          <a:solidFill>
-            <a:srgbClr val="F59E0B"/>
-          </a:solidFill>
-          <a:ln>
-            <a:noFill/>
-          </a:ln>
-          <a:effectLst/>
-        </p:spPr>
-        <p:style>
-          <a:lnRef idx="1">
-            <a:schemeClr val="accent1"/>
-          </a:lnRef>
-          <a:fillRef idx="3">
-            <a:schemeClr val="accent1"/>
-          </a:fillRef>
-          <a:effectRef idx="2">
-            <a:schemeClr val="accent1"/>
-          </a:effectRef>
-          <a:fontRef idx="minor">
-            <a:schemeClr val="lt1"/>
-          </a:fontRef>
-        </p:style>
-        <p:txBody>
-          <a:bodyPr rtlCol="0" anchor="ctr"/>
-          <a:lstStyle/>
-          <a:p>
-            <a:pPr algn="ctr"/>
-          </a:p>
-        </p:txBody>
-      </p:sp>
-      <p:sp>
-        <p:nvSpPr>
-          <p:cNvPr id="10" name="Rounded Rectangle 9"/>
-          <p:cNvSpPr/>
-          <p:nvPr/>
-        </p:nvSpPr>
-        <p:spPr>
-          <a:xfrm>
-            <a:off x="2000250" y="1085850"/>
-            <a:ext cx="123825" cy="123825"/>
-          </a:xfrm>
-          <a:prstGeom prst="roundRect">
-            <a:avLst>
-              <a:gd name="adj" fmla="val 8000"/>
-            </a:avLst>
-          </a:prstGeom>
-          <a:solidFill>
-            <a:srgbClr val="34D399"/>
-          </a:solidFill>
-          <a:ln>
-            <a:noFill/>
-          </a:ln>
-          <a:effectLst/>
-        </p:spPr>
-        <p:style>
-          <a:lnRef idx="1">
-            <a:schemeClr val="accent1"/>
-          </a:lnRef>
-          <a:fillRef idx="3">
-            <a:schemeClr val="accent1"/>
-          </a:fillRef>
-          <a:effectRef idx="2">
-            <a:schemeClr val="accent1"/>
-          </a:effectRef>
-          <a:fontRef idx="minor">
-            <a:schemeClr val="lt1"/>
-          </a:fontRef>
-        </p:style>
-        <p:txBody>
-          <a:bodyPr rtlCol="0" anchor="ctr"/>
-          <a:lstStyle/>
-          <a:p>
-            <a:pPr algn="ctr"/>
-          </a:p>
-        </p:txBody>
-      </p:sp>
-      <p:sp>
-        <p:nvSpPr>
-          <p:cNvPr id="11" name="TextBox 10"/>
-          <p:cNvSpPr txBox="1"/>
-          <p:nvPr/>
-        </p:nvSpPr>
-        <p:spPr>
-          <a:xfrm>
-            <a:off x="2381250" y="952500"/>
-            <a:ext cx="8286750" cy="381000"/>
-          </a:xfrm>
-          <a:prstGeom prst="rect">
-            <a:avLst/>
-          </a:prstGeom>
-          <a:noFill/>
-        </p:spPr>
-        <p:txBody>
-          <a:bodyPr wrap="square" anchor="ctr">
-            <a:spAutoFit/>
-          </a:bodyPr>
-          <a:lstStyle/>
-          <a:p>
-            <a:pPr algn="l">
-              <a:lnSpc>
-                <a:spcPct val="100000"/>
-              </a:lnSpc>
-            </a:pPr>
-            <a:r>
-              <a:rPr sz="1100" b="0">
-                <a:solidFill>
-                  <a:srgbClr val="94A3B8"/>
-                </a:solidFill>
-                <a:latin typeface="PingFang SC"/>
-              </a:rPr>
-              <a:t>terminal — 平台实测</a:t>
-            </a:r>
-          </a:p>
-        </p:txBody>
-      </p:sp>
-      <p:sp>
-        <p:nvSpPr>
-          <p:cNvPr id="12" name="TextBox 11"/>
-          <p:cNvSpPr txBox="1"/>
-          <p:nvPr/>
-        </p:nvSpPr>
-        <p:spPr>
-          <a:xfrm>
-            <a:off x="1562100" y="1485900"/>
-            <a:ext cx="9067800" cy="4381500"/>
-          </a:xfrm>
-          <a:prstGeom prst="rect">
-            <a:avLst/>
-          </a:prstGeom>
-          <a:noFill/>
-        </p:spPr>
-        <p:txBody>
-          <a:bodyPr wrap="square">
-            <a:spAutoFit/>
-          </a:bodyPr>
-          <a:lstStyle/>
-          <a:p>
-            <a:pPr>
-              <a:lnSpc>
-                <a:spcPct val="115000"/>
-              </a:lnSpc>
-            </a:pPr>
-            <a:r>
-              <a:rPr sz="1300">
-                <a:solidFill>
-                  <a:srgbClr val="CBD5E1"/>
-                </a:solidFill>
-                <a:latin typeface="Menlo"/>
-              </a:rPr>
-              <a:t>教学调试闭环</a:t>
-            </a:r>
-          </a:p>
-        </p:txBody>
-      </p:sp>
-      <p:sp>
-        <p:nvSpPr>
-          <p:cNvPr id="13" name="TextBox 12"/>
-          <p:cNvSpPr txBox="1"/>
-          <p:nvPr/>
-        </p:nvSpPr>
-        <p:spPr>
-          <a:xfrm>
-            <a:off x="10287000" y="6534150"/>
-            <a:ext cx="1619250" cy="266700"/>
-          </a:xfrm>
-          <a:prstGeom prst="rect">
-            <a:avLst/>
-          </a:prstGeom>
-          <a:noFill/>
-        </p:spPr>
-        <p:txBody>
-          <a:bodyPr wrap="square" anchor="ctr">
-            <a:spAutoFit/>
-          </a:bodyPr>
-          <a:lstStyle/>
-          <a:p>
-            <a:pPr algn="r">
-              <a:lnSpc>
-                <a:spcPct val="100000"/>
-              </a:lnSpc>
-            </a:pPr>
-            <a:r>
               <a:rPr sz="900" b="0">
                 <a:solidFill>
                   <a:srgbClr val="94A3B8"/>
@@ -25499,7 +25423,7 @@
       </p:sp>
       <p:sp>
         <p:nvSpPr>
-          <p:cNvPr id="14" name="TextBox 13"/>
+          <p:cNvPr id="13" name="TextBox 12"/>
           <p:cNvSpPr txBox="1"/>
           <p:nvPr/>
         </p:nvSpPr>
@@ -26678,14 +26602,1376 @@
       </p:sp>
       <p:sp>
         <p:nvSpPr>
-          <p:cNvPr id="5" name="TextBox 4"/>
+          <p:cNvPr id="5" name="Rounded Rectangle 4"/>
+          <p:cNvSpPr/>
+          <p:nvPr/>
+        </p:nvSpPr>
+        <p:spPr>
+          <a:xfrm>
+            <a:off x="1847850" y="914400"/>
+            <a:ext cx="8877300" cy="1100137"/>
+          </a:xfrm>
+          <a:prstGeom prst="roundRect">
+            <a:avLst>
+              <a:gd name="adj" fmla="val 8000"/>
+            </a:avLst>
+          </a:prstGeom>
+          <a:solidFill>
+            <a:srgbClr val="F1F5F9"/>
+          </a:solidFill>
+          <a:ln>
+            <a:noFill/>
+          </a:ln>
+          <a:effectLst/>
+        </p:spPr>
+        <p:style>
+          <a:lnRef idx="1">
+            <a:schemeClr val="accent1"/>
+          </a:lnRef>
+          <a:fillRef idx="3">
+            <a:schemeClr val="accent1"/>
+          </a:fillRef>
+          <a:effectRef idx="2">
+            <a:schemeClr val="accent1"/>
+          </a:effectRef>
+          <a:fontRef idx="minor">
+            <a:schemeClr val="lt1"/>
+          </a:fontRef>
+        </p:style>
+        <p:txBody>
+          <a:bodyPr rtlCol="0" anchor="ctr"/>
+          <a:lstStyle/>
+          <a:p>
+            <a:pPr algn="ctr"/>
+          </a:p>
+        </p:txBody>
+      </p:sp>
+      <p:sp>
+        <p:nvSpPr>
+          <p:cNvPr id="6" name="TextBox 5"/>
           <p:cNvSpPr txBox="1"/>
           <p:nvPr/>
         </p:nvSpPr>
         <p:spPr>
           <a:xfrm>
-            <a:off x="9334500" y="0"/>
-            <a:ext cx="2667000" cy="704850"/>
+            <a:off x="1962150" y="685800"/>
+            <a:ext cx="1905000" cy="209550"/>
+          </a:xfrm>
+          <a:prstGeom prst="rect">
+            <a:avLst/>
+          </a:prstGeom>
+          <a:noFill/>
+        </p:spPr>
+        <p:txBody>
+          <a:bodyPr wrap="square" anchor="ctr">
+            <a:spAutoFit/>
+          </a:bodyPr>
+          <a:lstStyle/>
+          <a:p>
+            <a:pPr algn="l">
+              <a:lnSpc>
+                <a:spcPct val="100000"/>
+              </a:lnSpc>
+            </a:pPr>
+            <a:r>
+              <a:rPr sz="1100" b="1">
+                <a:solidFill>
+                  <a:srgbClr val="2563EB"/>
+                </a:solidFill>
+                <a:latin typeface="PingFang SC"/>
+              </a:rPr>
+              <a:t>L1</a:t>
+            </a:r>
+          </a:p>
+        </p:txBody>
+      </p:sp>
+      <p:sp>
+        <p:nvSpPr>
+          <p:cNvPr id="7" name="Rounded Rectangle 6"/>
+          <p:cNvSpPr/>
+          <p:nvPr/>
+        </p:nvSpPr>
+        <p:spPr>
+          <a:xfrm>
+            <a:off x="1905000" y="952500"/>
+            <a:ext cx="8763000" cy="1023937"/>
+          </a:xfrm>
+          <a:prstGeom prst="roundRect">
+            <a:avLst>
+              <a:gd name="adj" fmla="val 8000"/>
+            </a:avLst>
+          </a:prstGeom>
+          <a:solidFill>
+            <a:srgbClr val="FFFFFF"/>
+          </a:solidFill>
+          <a:ln w="12700">
+            <a:solidFill>
+              <a:srgbClr val="2563EB"/>
+            </a:solidFill>
+          </a:ln>
+          <a:effectLst/>
+        </p:spPr>
+        <p:style>
+          <a:lnRef idx="1">
+            <a:schemeClr val="accent1"/>
+          </a:lnRef>
+          <a:fillRef idx="3">
+            <a:schemeClr val="accent1"/>
+          </a:fillRef>
+          <a:effectRef idx="2">
+            <a:schemeClr val="accent1"/>
+          </a:effectRef>
+          <a:fontRef idx="minor">
+            <a:schemeClr val="lt1"/>
+          </a:fontRef>
+        </p:style>
+        <p:txBody>
+          <a:bodyPr rtlCol="0" anchor="ctr"/>
+          <a:lstStyle/>
+          <a:p>
+            <a:pPr algn="ctr"/>
+          </a:p>
+        </p:txBody>
+      </p:sp>
+      <p:sp>
+        <p:nvSpPr>
+          <p:cNvPr id="8" name="Rectangle 7"/>
+          <p:cNvSpPr/>
+          <p:nvPr/>
+        </p:nvSpPr>
+        <p:spPr>
+          <a:xfrm>
+            <a:off x="1905000" y="952500"/>
+            <a:ext cx="47625" cy="1023937"/>
+          </a:xfrm>
+          <a:prstGeom prst="rect">
+            <a:avLst/>
+          </a:prstGeom>
+          <a:solidFill>
+            <a:srgbClr val="2563EB"/>
+          </a:solidFill>
+          <a:ln>
+            <a:noFill/>
+          </a:ln>
+          <a:effectLst/>
+        </p:spPr>
+        <p:style>
+          <a:lnRef idx="1">
+            <a:schemeClr val="accent1"/>
+          </a:lnRef>
+          <a:fillRef idx="3">
+            <a:schemeClr val="accent1"/>
+          </a:fillRef>
+          <a:effectRef idx="2">
+            <a:schemeClr val="accent1"/>
+          </a:effectRef>
+          <a:fontRef idx="minor">
+            <a:schemeClr val="lt1"/>
+          </a:fontRef>
+        </p:style>
+        <p:txBody>
+          <a:bodyPr rtlCol="0" anchor="ctr"/>
+          <a:lstStyle/>
+          <a:p>
+            <a:pPr algn="ctr"/>
+          </a:p>
+        </p:txBody>
+      </p:sp>
+      <p:sp>
+        <p:nvSpPr>
+          <p:cNvPr id="9" name="TextBox 8"/>
+          <p:cNvSpPr txBox="1"/>
+          <p:nvPr/>
+        </p:nvSpPr>
+        <p:spPr>
+          <a:xfrm>
+            <a:off x="2057400" y="952500"/>
+            <a:ext cx="8496300" cy="1023937"/>
+          </a:xfrm>
+          <a:prstGeom prst="rect">
+            <a:avLst/>
+          </a:prstGeom>
+          <a:noFill/>
+        </p:spPr>
+        <p:txBody>
+          <a:bodyPr wrap="none" anchor="ctr">
+            <a:spAutoFit/>
+          </a:bodyPr>
+          <a:lstStyle/>
+          <a:p>
+            <a:pPr algn="l">
+              <a:lnSpc>
+                <a:spcPct val="115000"/>
+              </a:lnSpc>
+            </a:pPr>
+            <a:r>
+              <a:rPr sz="1100" b="1">
+                <a:solidFill>
+                  <a:srgbClr val="0B1D3A"/>
+                </a:solidFill>
+                <a:latin typeface="PingFang SC"/>
+              </a:rPr>
+              <a:t>选择:模型意图(span)</a:t>
+            </a:r>
+          </a:p>
+        </p:txBody>
+      </p:sp>
+      <p:cxnSp>
+        <p:nvCxnSpPr>
+          <p:cNvPr id="10" name="Connector 9"/>
+          <p:cNvCxnSpPr/>
+          <p:nvPr/>
+        </p:nvCxnSpPr>
+        <p:spPr>
+          <a:xfrm>
+            <a:off x="6096000" y="2033587"/>
+            <a:ext cx="0" cy="152400"/>
+          </a:xfrm>
+          <a:prstGeom prst="line">
+            <a:avLst/>
+          </a:prstGeom>
+          <a:ln w="17780">
+            <a:solidFill>
+              <a:srgbClr val="475569"/>
+            </a:solidFill>
+          </a:ln>
+        </p:spPr>
+        <p:style>
+          <a:lnRef idx="2">
+            <a:schemeClr val="accent1"/>
+          </a:lnRef>
+          <a:fillRef idx="0">
+            <a:schemeClr val="accent1"/>
+          </a:fillRef>
+          <a:effectRef idx="1">
+            <a:schemeClr val="accent1"/>
+          </a:effectRef>
+          <a:fontRef idx="minor">
+            <a:schemeClr val="tx1"/>
+          </a:fontRef>
+        </p:style>
+      </p:cxnSp>
+      <p:sp>
+        <p:nvSpPr>
+          <p:cNvPr id="11" name="Isosceles Triangle 10"/>
+          <p:cNvSpPr/>
+          <p:nvPr/>
+        </p:nvSpPr>
+        <p:spPr>
+          <a:xfrm rot="10800000">
+            <a:off x="6053138" y="2100263"/>
+            <a:ext cx="85725" cy="85725"/>
+          </a:xfrm>
+          <a:prstGeom prst="triangle">
+            <a:avLst/>
+          </a:prstGeom>
+          <a:solidFill>
+            <a:srgbClr val="475569"/>
+          </a:solidFill>
+          <a:ln>
+            <a:noFill/>
+          </a:ln>
+          <a:effectLst/>
+        </p:spPr>
+        <p:style>
+          <a:lnRef idx="1">
+            <a:schemeClr val="accent1"/>
+          </a:lnRef>
+          <a:fillRef idx="3">
+            <a:schemeClr val="accent1"/>
+          </a:fillRef>
+          <a:effectRef idx="2">
+            <a:schemeClr val="accent1"/>
+          </a:effectRef>
+          <a:fontRef idx="minor">
+            <a:schemeClr val="lt1"/>
+          </a:fontRef>
+        </p:style>
+        <p:txBody>
+          <a:bodyPr rtlCol="0" anchor="ctr"/>
+          <a:lstStyle/>
+          <a:p>
+            <a:pPr algn="ctr"/>
+          </a:p>
+        </p:txBody>
+      </p:sp>
+      <p:sp>
+        <p:nvSpPr>
+          <p:cNvPr id="12" name="Rounded Rectangle 11"/>
+          <p:cNvSpPr/>
+          <p:nvPr/>
+        </p:nvSpPr>
+        <p:spPr>
+          <a:xfrm>
+            <a:off x="5743575" y="2014537"/>
+            <a:ext cx="704850" cy="171450"/>
+          </a:xfrm>
+          <a:prstGeom prst="roundRect">
+            <a:avLst>
+              <a:gd name="adj" fmla="val 8000"/>
+            </a:avLst>
+          </a:prstGeom>
+          <a:solidFill>
+            <a:srgbClr val="FFFFFF"/>
+          </a:solidFill>
+          <a:ln w="12700">
+            <a:solidFill>
+              <a:srgbClr val="DDE5EE"/>
+            </a:solidFill>
+          </a:ln>
+          <a:effectLst/>
+        </p:spPr>
+        <p:style>
+          <a:lnRef idx="1">
+            <a:schemeClr val="accent1"/>
+          </a:lnRef>
+          <a:fillRef idx="3">
+            <a:schemeClr val="accent1"/>
+          </a:fillRef>
+          <a:effectRef idx="2">
+            <a:schemeClr val="accent1"/>
+          </a:effectRef>
+          <a:fontRef idx="minor">
+            <a:schemeClr val="lt1"/>
+          </a:fontRef>
+        </p:style>
+        <p:txBody>
+          <a:bodyPr rtlCol="0" anchor="ctr"/>
+          <a:lstStyle/>
+          <a:p>
+            <a:pPr algn="ctr"/>
+          </a:p>
+        </p:txBody>
+      </p:sp>
+      <p:sp>
+        <p:nvSpPr>
+          <p:cNvPr id="13" name="TextBox 12"/>
+          <p:cNvSpPr txBox="1"/>
+          <p:nvPr/>
+        </p:nvSpPr>
+        <p:spPr>
+          <a:xfrm>
+            <a:off x="5743575" y="2014537"/>
+            <a:ext cx="704850" cy="171450"/>
+          </a:xfrm>
+          <a:prstGeom prst="rect">
+            <a:avLst/>
+          </a:prstGeom>
+          <a:noFill/>
+        </p:spPr>
+        <p:txBody>
+          <a:bodyPr wrap="square" anchor="ctr">
+            <a:spAutoFit/>
+          </a:bodyPr>
+          <a:lstStyle/>
+          <a:p>
+            <a:pPr algn="ctr">
+              <a:lnSpc>
+                <a:spcPct val="100000"/>
+              </a:lnSpc>
+            </a:pPr>
+            <a:r>
+              <a:rPr sz="1100" b="1">
+                <a:solidFill>
+                  <a:srgbClr val="0B1D3A"/>
+                </a:solidFill>
+                <a:latin typeface="PingFang SC"/>
+              </a:rPr>
+              <a:t>串联</a:t>
+            </a:r>
+          </a:p>
+        </p:txBody>
+      </p:sp>
+      <p:sp>
+        <p:nvSpPr>
+          <p:cNvPr id="14" name="Rounded Rectangle 13"/>
+          <p:cNvSpPr/>
+          <p:nvPr/>
+        </p:nvSpPr>
+        <p:spPr>
+          <a:xfrm>
+            <a:off x="1847850" y="2185987"/>
+            <a:ext cx="8877300" cy="1100137"/>
+          </a:xfrm>
+          <a:prstGeom prst="roundRect">
+            <a:avLst>
+              <a:gd name="adj" fmla="val 8000"/>
+            </a:avLst>
+          </a:prstGeom>
+          <a:solidFill>
+            <a:srgbClr val="F1F5F9"/>
+          </a:solidFill>
+          <a:ln>
+            <a:noFill/>
+          </a:ln>
+          <a:effectLst/>
+        </p:spPr>
+        <p:style>
+          <a:lnRef idx="1">
+            <a:schemeClr val="accent1"/>
+          </a:lnRef>
+          <a:fillRef idx="3">
+            <a:schemeClr val="accent1"/>
+          </a:fillRef>
+          <a:effectRef idx="2">
+            <a:schemeClr val="accent1"/>
+          </a:effectRef>
+          <a:fontRef idx="minor">
+            <a:schemeClr val="lt1"/>
+          </a:fontRef>
+        </p:style>
+        <p:txBody>
+          <a:bodyPr rtlCol="0" anchor="ctr"/>
+          <a:lstStyle/>
+          <a:p>
+            <a:pPr algn="ctr"/>
+          </a:p>
+        </p:txBody>
+      </p:sp>
+      <p:sp>
+        <p:nvSpPr>
+          <p:cNvPr id="15" name="TextBox 14"/>
+          <p:cNvSpPr txBox="1"/>
+          <p:nvPr/>
+        </p:nvSpPr>
+        <p:spPr>
+          <a:xfrm>
+            <a:off x="1962150" y="1957387"/>
+            <a:ext cx="1905000" cy="209550"/>
+          </a:xfrm>
+          <a:prstGeom prst="rect">
+            <a:avLst/>
+          </a:prstGeom>
+          <a:noFill/>
+        </p:spPr>
+        <p:txBody>
+          <a:bodyPr wrap="square" anchor="ctr">
+            <a:spAutoFit/>
+          </a:bodyPr>
+          <a:lstStyle/>
+          <a:p>
+            <a:pPr algn="l">
+              <a:lnSpc>
+                <a:spcPct val="100000"/>
+              </a:lnSpc>
+            </a:pPr>
+            <a:r>
+              <a:rPr sz="1100" b="1">
+                <a:solidFill>
+                  <a:srgbClr val="14B8A6"/>
+                </a:solidFill>
+                <a:latin typeface="PingFang SC"/>
+              </a:rPr>
+              <a:t>L2</a:t>
+            </a:r>
+          </a:p>
+        </p:txBody>
+      </p:sp>
+      <p:sp>
+        <p:nvSpPr>
+          <p:cNvPr id="16" name="Rounded Rectangle 15"/>
+          <p:cNvSpPr/>
+          <p:nvPr/>
+        </p:nvSpPr>
+        <p:spPr>
+          <a:xfrm>
+            <a:off x="1905000" y="2224087"/>
+            <a:ext cx="8763000" cy="1023937"/>
+          </a:xfrm>
+          <a:prstGeom prst="roundRect">
+            <a:avLst>
+              <a:gd name="adj" fmla="val 8000"/>
+            </a:avLst>
+          </a:prstGeom>
+          <a:solidFill>
+            <a:srgbClr val="FFFFFF"/>
+          </a:solidFill>
+          <a:ln w="12700">
+            <a:solidFill>
+              <a:srgbClr val="14B8A6"/>
+            </a:solidFill>
+          </a:ln>
+          <a:effectLst/>
+        </p:spPr>
+        <p:style>
+          <a:lnRef idx="1">
+            <a:schemeClr val="accent1"/>
+          </a:lnRef>
+          <a:fillRef idx="3">
+            <a:schemeClr val="accent1"/>
+          </a:fillRef>
+          <a:effectRef idx="2">
+            <a:schemeClr val="accent1"/>
+          </a:effectRef>
+          <a:fontRef idx="minor">
+            <a:schemeClr val="lt1"/>
+          </a:fontRef>
+        </p:style>
+        <p:txBody>
+          <a:bodyPr rtlCol="0" anchor="ctr"/>
+          <a:lstStyle/>
+          <a:p>
+            <a:pPr algn="ctr"/>
+          </a:p>
+        </p:txBody>
+      </p:sp>
+      <p:sp>
+        <p:nvSpPr>
+          <p:cNvPr id="17" name="Rectangle 16"/>
+          <p:cNvSpPr/>
+          <p:nvPr/>
+        </p:nvSpPr>
+        <p:spPr>
+          <a:xfrm>
+            <a:off x="1905000" y="2224087"/>
+            <a:ext cx="47625" cy="1023937"/>
+          </a:xfrm>
+          <a:prstGeom prst="rect">
+            <a:avLst/>
+          </a:prstGeom>
+          <a:solidFill>
+            <a:srgbClr val="14B8A6"/>
+          </a:solidFill>
+          <a:ln>
+            <a:noFill/>
+          </a:ln>
+          <a:effectLst/>
+        </p:spPr>
+        <p:style>
+          <a:lnRef idx="1">
+            <a:schemeClr val="accent1"/>
+          </a:lnRef>
+          <a:fillRef idx="3">
+            <a:schemeClr val="accent1"/>
+          </a:fillRef>
+          <a:effectRef idx="2">
+            <a:schemeClr val="accent1"/>
+          </a:effectRef>
+          <a:fontRef idx="minor">
+            <a:schemeClr val="lt1"/>
+          </a:fontRef>
+        </p:style>
+        <p:txBody>
+          <a:bodyPr rtlCol="0" anchor="ctr"/>
+          <a:lstStyle/>
+          <a:p>
+            <a:pPr algn="ctr"/>
+          </a:p>
+        </p:txBody>
+      </p:sp>
+      <p:sp>
+        <p:nvSpPr>
+          <p:cNvPr id="18" name="TextBox 17"/>
+          <p:cNvSpPr txBox="1"/>
+          <p:nvPr/>
+        </p:nvSpPr>
+        <p:spPr>
+          <a:xfrm>
+            <a:off x="2057400" y="2224087"/>
+            <a:ext cx="8496300" cy="1023937"/>
+          </a:xfrm>
+          <a:prstGeom prst="rect">
+            <a:avLst/>
+          </a:prstGeom>
+          <a:noFill/>
+        </p:spPr>
+        <p:txBody>
+          <a:bodyPr wrap="none" anchor="ctr">
+            <a:spAutoFit/>
+          </a:bodyPr>
+          <a:lstStyle/>
+          <a:p>
+            <a:pPr algn="l">
+              <a:lnSpc>
+                <a:spcPct val="115000"/>
+              </a:lnSpc>
+            </a:pPr>
+            <a:r>
+              <a:rPr sz="1100" b="1">
+                <a:solidFill>
+                  <a:srgbClr val="0B1D3A"/>
+                </a:solidFill>
+                <a:latin typeface="PingFang SC"/>
+              </a:rPr>
+              <a:t>参数:Schema 校验(span)</a:t>
+            </a:r>
+          </a:p>
+        </p:txBody>
+      </p:sp>
+      <p:cxnSp>
+        <p:nvCxnSpPr>
+          <p:cNvPr id="19" name="Connector 18"/>
+          <p:cNvCxnSpPr/>
+          <p:nvPr/>
+        </p:nvCxnSpPr>
+        <p:spPr>
+          <a:xfrm>
+            <a:off x="6096000" y="3305174"/>
+            <a:ext cx="0" cy="152400"/>
+          </a:xfrm>
+          <a:prstGeom prst="line">
+            <a:avLst/>
+          </a:prstGeom>
+          <a:ln w="17780">
+            <a:solidFill>
+              <a:srgbClr val="475569"/>
+            </a:solidFill>
+          </a:ln>
+        </p:spPr>
+        <p:style>
+          <a:lnRef idx="2">
+            <a:schemeClr val="accent1"/>
+          </a:lnRef>
+          <a:fillRef idx="0">
+            <a:schemeClr val="accent1"/>
+          </a:fillRef>
+          <a:effectRef idx="1">
+            <a:schemeClr val="accent1"/>
+          </a:effectRef>
+          <a:fontRef idx="minor">
+            <a:schemeClr val="tx1"/>
+          </a:fontRef>
+        </p:style>
+      </p:cxnSp>
+      <p:sp>
+        <p:nvSpPr>
+          <p:cNvPr id="20" name="Isosceles Triangle 19"/>
+          <p:cNvSpPr/>
+          <p:nvPr/>
+        </p:nvSpPr>
+        <p:spPr>
+          <a:xfrm rot="10800000">
+            <a:off x="6053138" y="3371850"/>
+            <a:ext cx="85725" cy="85725"/>
+          </a:xfrm>
+          <a:prstGeom prst="triangle">
+            <a:avLst/>
+          </a:prstGeom>
+          <a:solidFill>
+            <a:srgbClr val="475569"/>
+          </a:solidFill>
+          <a:ln>
+            <a:noFill/>
+          </a:ln>
+          <a:effectLst/>
+        </p:spPr>
+        <p:style>
+          <a:lnRef idx="1">
+            <a:schemeClr val="accent1"/>
+          </a:lnRef>
+          <a:fillRef idx="3">
+            <a:schemeClr val="accent1"/>
+          </a:fillRef>
+          <a:effectRef idx="2">
+            <a:schemeClr val="accent1"/>
+          </a:effectRef>
+          <a:fontRef idx="minor">
+            <a:schemeClr val="lt1"/>
+          </a:fontRef>
+        </p:style>
+        <p:txBody>
+          <a:bodyPr rtlCol="0" anchor="ctr"/>
+          <a:lstStyle/>
+          <a:p>
+            <a:pPr algn="ctr"/>
+          </a:p>
+        </p:txBody>
+      </p:sp>
+      <p:sp>
+        <p:nvSpPr>
+          <p:cNvPr id="21" name="Rounded Rectangle 20"/>
+          <p:cNvSpPr/>
+          <p:nvPr/>
+        </p:nvSpPr>
+        <p:spPr>
+          <a:xfrm>
+            <a:off x="5743575" y="3286124"/>
+            <a:ext cx="704850" cy="171450"/>
+          </a:xfrm>
+          <a:prstGeom prst="roundRect">
+            <a:avLst>
+              <a:gd name="adj" fmla="val 8000"/>
+            </a:avLst>
+          </a:prstGeom>
+          <a:solidFill>
+            <a:srgbClr val="FFFFFF"/>
+          </a:solidFill>
+          <a:ln w="12700">
+            <a:solidFill>
+              <a:srgbClr val="DDE5EE"/>
+            </a:solidFill>
+          </a:ln>
+          <a:effectLst/>
+        </p:spPr>
+        <p:style>
+          <a:lnRef idx="1">
+            <a:schemeClr val="accent1"/>
+          </a:lnRef>
+          <a:fillRef idx="3">
+            <a:schemeClr val="accent1"/>
+          </a:fillRef>
+          <a:effectRef idx="2">
+            <a:schemeClr val="accent1"/>
+          </a:effectRef>
+          <a:fontRef idx="minor">
+            <a:schemeClr val="lt1"/>
+          </a:fontRef>
+        </p:style>
+        <p:txBody>
+          <a:bodyPr rtlCol="0" anchor="ctr"/>
+          <a:lstStyle/>
+          <a:p>
+            <a:pPr algn="ctr"/>
+          </a:p>
+        </p:txBody>
+      </p:sp>
+      <p:sp>
+        <p:nvSpPr>
+          <p:cNvPr id="22" name="TextBox 21"/>
+          <p:cNvSpPr txBox="1"/>
+          <p:nvPr/>
+        </p:nvSpPr>
+        <p:spPr>
+          <a:xfrm>
+            <a:off x="5743575" y="3286124"/>
+            <a:ext cx="704850" cy="171450"/>
+          </a:xfrm>
+          <a:prstGeom prst="rect">
+            <a:avLst/>
+          </a:prstGeom>
+          <a:noFill/>
+        </p:spPr>
+        <p:txBody>
+          <a:bodyPr wrap="square" anchor="ctr">
+            <a:spAutoFit/>
+          </a:bodyPr>
+          <a:lstStyle/>
+          <a:p>
+            <a:pPr algn="ctr">
+              <a:lnSpc>
+                <a:spcPct val="100000"/>
+              </a:lnSpc>
+            </a:pPr>
+            <a:r>
+              <a:rPr sz="1100" b="1">
+                <a:solidFill>
+                  <a:srgbClr val="0B1D3A"/>
+                </a:solidFill>
+                <a:latin typeface="PingFang SC"/>
+              </a:rPr>
+              <a:t>计时</a:t>
+            </a:r>
+          </a:p>
+        </p:txBody>
+      </p:sp>
+      <p:sp>
+        <p:nvSpPr>
+          <p:cNvPr id="23" name="Rounded Rectangle 22"/>
+          <p:cNvSpPr/>
+          <p:nvPr/>
+        </p:nvSpPr>
+        <p:spPr>
+          <a:xfrm>
+            <a:off x="1847850" y="3457574"/>
+            <a:ext cx="8877300" cy="1100137"/>
+          </a:xfrm>
+          <a:prstGeom prst="roundRect">
+            <a:avLst>
+              <a:gd name="adj" fmla="val 8000"/>
+            </a:avLst>
+          </a:prstGeom>
+          <a:solidFill>
+            <a:srgbClr val="F1F5F9"/>
+          </a:solidFill>
+          <a:ln>
+            <a:noFill/>
+          </a:ln>
+          <a:effectLst/>
+        </p:spPr>
+        <p:style>
+          <a:lnRef idx="1">
+            <a:schemeClr val="accent1"/>
+          </a:lnRef>
+          <a:fillRef idx="3">
+            <a:schemeClr val="accent1"/>
+          </a:fillRef>
+          <a:effectRef idx="2">
+            <a:schemeClr val="accent1"/>
+          </a:effectRef>
+          <a:fontRef idx="minor">
+            <a:schemeClr val="lt1"/>
+          </a:fontRef>
+        </p:style>
+        <p:txBody>
+          <a:bodyPr rtlCol="0" anchor="ctr"/>
+          <a:lstStyle/>
+          <a:p>
+            <a:pPr algn="ctr"/>
+          </a:p>
+        </p:txBody>
+      </p:sp>
+      <p:sp>
+        <p:nvSpPr>
+          <p:cNvPr id="24" name="TextBox 23"/>
+          <p:cNvSpPr txBox="1"/>
+          <p:nvPr/>
+        </p:nvSpPr>
+        <p:spPr>
+          <a:xfrm>
+            <a:off x="1962150" y="3228974"/>
+            <a:ext cx="1905000" cy="209550"/>
+          </a:xfrm>
+          <a:prstGeom prst="rect">
+            <a:avLst/>
+          </a:prstGeom>
+          <a:noFill/>
+        </p:spPr>
+        <p:txBody>
+          <a:bodyPr wrap="square" anchor="ctr">
+            <a:spAutoFit/>
+          </a:bodyPr>
+          <a:lstStyle/>
+          <a:p>
+            <a:pPr algn="l">
+              <a:lnSpc>
+                <a:spcPct val="100000"/>
+              </a:lnSpc>
+            </a:pPr>
+            <a:r>
+              <a:rPr sz="1100" b="1">
+                <a:solidFill>
+                  <a:srgbClr val="8B5CF6"/>
+                </a:solidFill>
+                <a:latin typeface="PingFang SC"/>
+              </a:rPr>
+              <a:t>L3</a:t>
+            </a:r>
+          </a:p>
+        </p:txBody>
+      </p:sp>
+      <p:sp>
+        <p:nvSpPr>
+          <p:cNvPr id="25" name="Rounded Rectangle 24"/>
+          <p:cNvSpPr/>
+          <p:nvPr/>
+        </p:nvSpPr>
+        <p:spPr>
+          <a:xfrm>
+            <a:off x="1905000" y="3495674"/>
+            <a:ext cx="8763000" cy="1023937"/>
+          </a:xfrm>
+          <a:prstGeom prst="roundRect">
+            <a:avLst>
+              <a:gd name="adj" fmla="val 8000"/>
+            </a:avLst>
+          </a:prstGeom>
+          <a:solidFill>
+            <a:srgbClr val="FFFFFF"/>
+          </a:solidFill>
+          <a:ln w="12700">
+            <a:solidFill>
+              <a:srgbClr val="8B5CF6"/>
+            </a:solidFill>
+          </a:ln>
+          <a:effectLst/>
+        </p:spPr>
+        <p:style>
+          <a:lnRef idx="1">
+            <a:schemeClr val="accent1"/>
+          </a:lnRef>
+          <a:fillRef idx="3">
+            <a:schemeClr val="accent1"/>
+          </a:fillRef>
+          <a:effectRef idx="2">
+            <a:schemeClr val="accent1"/>
+          </a:effectRef>
+          <a:fontRef idx="minor">
+            <a:schemeClr val="lt1"/>
+          </a:fontRef>
+        </p:style>
+        <p:txBody>
+          <a:bodyPr rtlCol="0" anchor="ctr"/>
+          <a:lstStyle/>
+          <a:p>
+            <a:pPr algn="ctr"/>
+          </a:p>
+        </p:txBody>
+      </p:sp>
+      <p:sp>
+        <p:nvSpPr>
+          <p:cNvPr id="26" name="Rectangle 25"/>
+          <p:cNvSpPr/>
+          <p:nvPr/>
+        </p:nvSpPr>
+        <p:spPr>
+          <a:xfrm>
+            <a:off x="1905000" y="3495674"/>
+            <a:ext cx="47625" cy="1023937"/>
+          </a:xfrm>
+          <a:prstGeom prst="rect">
+            <a:avLst/>
+          </a:prstGeom>
+          <a:solidFill>
+            <a:srgbClr val="8B5CF6"/>
+          </a:solidFill>
+          <a:ln>
+            <a:noFill/>
+          </a:ln>
+          <a:effectLst/>
+        </p:spPr>
+        <p:style>
+          <a:lnRef idx="1">
+            <a:schemeClr val="accent1"/>
+          </a:lnRef>
+          <a:fillRef idx="3">
+            <a:schemeClr val="accent1"/>
+          </a:fillRef>
+          <a:effectRef idx="2">
+            <a:schemeClr val="accent1"/>
+          </a:effectRef>
+          <a:fontRef idx="minor">
+            <a:schemeClr val="lt1"/>
+          </a:fontRef>
+        </p:style>
+        <p:txBody>
+          <a:bodyPr rtlCol="0" anchor="ctr"/>
+          <a:lstStyle/>
+          <a:p>
+            <a:pPr algn="ctr"/>
+          </a:p>
+        </p:txBody>
+      </p:sp>
+      <p:sp>
+        <p:nvSpPr>
+          <p:cNvPr id="27" name="TextBox 26"/>
+          <p:cNvSpPr txBox="1"/>
+          <p:nvPr/>
+        </p:nvSpPr>
+        <p:spPr>
+          <a:xfrm>
+            <a:off x="2057400" y="3495674"/>
+            <a:ext cx="8496300" cy="1023937"/>
+          </a:xfrm>
+          <a:prstGeom prst="rect">
+            <a:avLst/>
+          </a:prstGeom>
+          <a:noFill/>
+        </p:spPr>
+        <p:txBody>
+          <a:bodyPr wrap="none" anchor="ctr">
+            <a:spAutoFit/>
+          </a:bodyPr>
+          <a:lstStyle/>
+          <a:p>
+            <a:pPr algn="l">
+              <a:lnSpc>
+                <a:spcPct val="115000"/>
+              </a:lnSpc>
+            </a:pPr>
+            <a:r>
+              <a:rPr sz="900" b="1">
+                <a:solidFill>
+                  <a:srgbClr val="0B1D3A"/>
+                </a:solidFill>
+                <a:latin typeface="PingFang SC"/>
+              </a:rPr>
+              <a:t>执行:wait_for 超时(span)</a:t>
+            </a:r>
+          </a:p>
+        </p:txBody>
+      </p:sp>
+      <p:cxnSp>
+        <p:nvCxnSpPr>
+          <p:cNvPr id="28" name="Connector 27"/>
+          <p:cNvCxnSpPr/>
+          <p:nvPr/>
+        </p:nvCxnSpPr>
+        <p:spPr>
+          <a:xfrm>
+            <a:off x="6096000" y="4576761"/>
+            <a:ext cx="0" cy="152400"/>
+          </a:xfrm>
+          <a:prstGeom prst="line">
+            <a:avLst/>
+          </a:prstGeom>
+          <a:ln w="17780">
+            <a:solidFill>
+              <a:srgbClr val="475569"/>
+            </a:solidFill>
+          </a:ln>
+        </p:spPr>
+        <p:style>
+          <a:lnRef idx="2">
+            <a:schemeClr val="accent1"/>
+          </a:lnRef>
+          <a:fillRef idx="0">
+            <a:schemeClr val="accent1"/>
+          </a:fillRef>
+          <a:effectRef idx="1">
+            <a:schemeClr val="accent1"/>
+          </a:effectRef>
+          <a:fontRef idx="minor">
+            <a:schemeClr val="tx1"/>
+          </a:fontRef>
+        </p:style>
+      </p:cxnSp>
+      <p:sp>
+        <p:nvSpPr>
+          <p:cNvPr id="29" name="Isosceles Triangle 28"/>
+          <p:cNvSpPr/>
+          <p:nvPr/>
+        </p:nvSpPr>
+        <p:spPr>
+          <a:xfrm rot="10800000">
+            <a:off x="6053138" y="4643437"/>
+            <a:ext cx="85725" cy="85725"/>
+          </a:xfrm>
+          <a:prstGeom prst="triangle">
+            <a:avLst/>
+          </a:prstGeom>
+          <a:solidFill>
+            <a:srgbClr val="475569"/>
+          </a:solidFill>
+          <a:ln>
+            <a:noFill/>
+          </a:ln>
+          <a:effectLst/>
+        </p:spPr>
+        <p:style>
+          <a:lnRef idx="1">
+            <a:schemeClr val="accent1"/>
+          </a:lnRef>
+          <a:fillRef idx="3">
+            <a:schemeClr val="accent1"/>
+          </a:fillRef>
+          <a:effectRef idx="2">
+            <a:schemeClr val="accent1"/>
+          </a:effectRef>
+          <a:fontRef idx="minor">
+            <a:schemeClr val="lt1"/>
+          </a:fontRef>
+        </p:style>
+        <p:txBody>
+          <a:bodyPr rtlCol="0" anchor="ctr"/>
+          <a:lstStyle/>
+          <a:p>
+            <a:pPr algn="ctr"/>
+          </a:p>
+        </p:txBody>
+      </p:sp>
+      <p:sp>
+        <p:nvSpPr>
+          <p:cNvPr id="30" name="Rounded Rectangle 29"/>
+          <p:cNvSpPr/>
+          <p:nvPr/>
+        </p:nvSpPr>
+        <p:spPr>
+          <a:xfrm>
+            <a:off x="5743575" y="4557711"/>
+            <a:ext cx="704850" cy="171450"/>
+          </a:xfrm>
+          <a:prstGeom prst="roundRect">
+            <a:avLst>
+              <a:gd name="adj" fmla="val 8000"/>
+            </a:avLst>
+          </a:prstGeom>
+          <a:solidFill>
+            <a:srgbClr val="FFFFFF"/>
+          </a:solidFill>
+          <a:ln w="12700">
+            <a:solidFill>
+              <a:srgbClr val="DDE5EE"/>
+            </a:solidFill>
+          </a:ln>
+          <a:effectLst/>
+        </p:spPr>
+        <p:style>
+          <a:lnRef idx="1">
+            <a:schemeClr val="accent1"/>
+          </a:lnRef>
+          <a:fillRef idx="3">
+            <a:schemeClr val="accent1"/>
+          </a:fillRef>
+          <a:effectRef idx="2">
+            <a:schemeClr val="accent1"/>
+          </a:effectRef>
+          <a:fontRef idx="minor">
+            <a:schemeClr val="lt1"/>
+          </a:fontRef>
+        </p:style>
+        <p:txBody>
+          <a:bodyPr rtlCol="0" anchor="ctr"/>
+          <a:lstStyle/>
+          <a:p>
+            <a:pPr algn="ctr"/>
+          </a:p>
+        </p:txBody>
+      </p:sp>
+      <p:sp>
+        <p:nvSpPr>
+          <p:cNvPr id="31" name="TextBox 30"/>
+          <p:cNvSpPr txBox="1"/>
+          <p:nvPr/>
+        </p:nvSpPr>
+        <p:spPr>
+          <a:xfrm>
+            <a:off x="5743575" y="4557711"/>
+            <a:ext cx="704850" cy="171450"/>
+          </a:xfrm>
+          <a:prstGeom prst="rect">
+            <a:avLst/>
+          </a:prstGeom>
+          <a:noFill/>
+        </p:spPr>
+        <p:txBody>
+          <a:bodyPr wrap="square" anchor="ctr">
+            <a:spAutoFit/>
+          </a:bodyPr>
+          <a:lstStyle/>
+          <a:p>
+            <a:pPr algn="ctr">
+              <a:lnSpc>
+                <a:spcPct val="100000"/>
+              </a:lnSpc>
+            </a:pPr>
+            <a:r>
+              <a:rPr sz="1100" b="1">
+                <a:solidFill>
+                  <a:srgbClr val="0B1D3A"/>
+                </a:solidFill>
+                <a:latin typeface="PingFang SC"/>
+              </a:rPr>
+              <a:t>归档</a:t>
+            </a:r>
+          </a:p>
+        </p:txBody>
+      </p:sp>
+      <p:sp>
+        <p:nvSpPr>
+          <p:cNvPr id="32" name="Rounded Rectangle 31"/>
+          <p:cNvSpPr/>
+          <p:nvPr/>
+        </p:nvSpPr>
+        <p:spPr>
+          <a:xfrm>
+            <a:off x="1847850" y="4729161"/>
+            <a:ext cx="8877300" cy="1100137"/>
+          </a:xfrm>
+          <a:prstGeom prst="roundRect">
+            <a:avLst>
+              <a:gd name="adj" fmla="val 8000"/>
+            </a:avLst>
+          </a:prstGeom>
+          <a:solidFill>
+            <a:srgbClr val="F1F5F9"/>
+          </a:solidFill>
+          <a:ln>
+            <a:noFill/>
+          </a:ln>
+          <a:effectLst/>
+        </p:spPr>
+        <p:style>
+          <a:lnRef idx="1">
+            <a:schemeClr val="accent1"/>
+          </a:lnRef>
+          <a:fillRef idx="3">
+            <a:schemeClr val="accent1"/>
+          </a:fillRef>
+          <a:effectRef idx="2">
+            <a:schemeClr val="accent1"/>
+          </a:effectRef>
+          <a:fontRef idx="minor">
+            <a:schemeClr val="lt1"/>
+          </a:fontRef>
+        </p:style>
+        <p:txBody>
+          <a:bodyPr rtlCol="0" anchor="ctr"/>
+          <a:lstStyle/>
+          <a:p>
+            <a:pPr algn="ctr"/>
+          </a:p>
+        </p:txBody>
+      </p:sp>
+      <p:sp>
+        <p:nvSpPr>
+          <p:cNvPr id="33" name="TextBox 32"/>
+          <p:cNvSpPr txBox="1"/>
+          <p:nvPr/>
+        </p:nvSpPr>
+        <p:spPr>
+          <a:xfrm>
+            <a:off x="1962150" y="4500561"/>
+            <a:ext cx="1905000" cy="209550"/>
+          </a:xfrm>
+          <a:prstGeom prst="rect">
+            <a:avLst/>
+          </a:prstGeom>
+          <a:noFill/>
+        </p:spPr>
+        <p:txBody>
+          <a:bodyPr wrap="square" anchor="ctr">
+            <a:spAutoFit/>
+          </a:bodyPr>
+          <a:lstStyle/>
+          <a:p>
+            <a:pPr algn="l">
+              <a:lnSpc>
+                <a:spcPct val="100000"/>
+              </a:lnSpc>
+            </a:pPr>
+            <a:r>
+              <a:rPr sz="1100" b="1">
+                <a:solidFill>
+                  <a:srgbClr val="F59E0B"/>
+                </a:solidFill>
+                <a:latin typeface="PingFang SC"/>
+              </a:rPr>
+              <a:t>L4</a:t>
+            </a:r>
+          </a:p>
+        </p:txBody>
+      </p:sp>
+      <p:sp>
+        <p:nvSpPr>
+          <p:cNvPr id="34" name="Rounded Rectangle 33"/>
+          <p:cNvSpPr/>
+          <p:nvPr/>
+        </p:nvSpPr>
+        <p:spPr>
+          <a:xfrm>
+            <a:off x="1905000" y="4767261"/>
+            <a:ext cx="8763000" cy="1023937"/>
+          </a:xfrm>
+          <a:prstGeom prst="roundRect">
+            <a:avLst>
+              <a:gd name="adj" fmla="val 8000"/>
+            </a:avLst>
+          </a:prstGeom>
+          <a:solidFill>
+            <a:srgbClr val="FFFFFF"/>
+          </a:solidFill>
+          <a:ln w="12700">
+            <a:solidFill>
+              <a:srgbClr val="F59E0B"/>
+            </a:solidFill>
+          </a:ln>
+          <a:effectLst/>
+        </p:spPr>
+        <p:style>
+          <a:lnRef idx="1">
+            <a:schemeClr val="accent1"/>
+          </a:lnRef>
+          <a:fillRef idx="3">
+            <a:schemeClr val="accent1"/>
+          </a:fillRef>
+          <a:effectRef idx="2">
+            <a:schemeClr val="accent1"/>
+          </a:effectRef>
+          <a:fontRef idx="minor">
+            <a:schemeClr val="lt1"/>
+          </a:fontRef>
+        </p:style>
+        <p:txBody>
+          <a:bodyPr rtlCol="0" anchor="ctr"/>
+          <a:lstStyle/>
+          <a:p>
+            <a:pPr algn="ctr"/>
+          </a:p>
+        </p:txBody>
+      </p:sp>
+      <p:sp>
+        <p:nvSpPr>
+          <p:cNvPr id="35" name="Rectangle 34"/>
+          <p:cNvSpPr/>
+          <p:nvPr/>
+        </p:nvSpPr>
+        <p:spPr>
+          <a:xfrm>
+            <a:off x="1905000" y="4767261"/>
+            <a:ext cx="47625" cy="1023937"/>
+          </a:xfrm>
+          <a:prstGeom prst="rect">
+            <a:avLst/>
+          </a:prstGeom>
+          <a:solidFill>
+            <a:srgbClr val="F59E0B"/>
+          </a:solidFill>
+          <a:ln>
+            <a:noFill/>
+          </a:ln>
+          <a:effectLst/>
+        </p:spPr>
+        <p:style>
+          <a:lnRef idx="1">
+            <a:schemeClr val="accent1"/>
+          </a:lnRef>
+          <a:fillRef idx="3">
+            <a:schemeClr val="accent1"/>
+          </a:fillRef>
+          <a:effectRef idx="2">
+            <a:schemeClr val="accent1"/>
+          </a:effectRef>
+          <a:fontRef idx="minor">
+            <a:schemeClr val="lt1"/>
+          </a:fontRef>
+        </p:style>
+        <p:txBody>
+          <a:bodyPr rtlCol="0" anchor="ctr"/>
+          <a:lstStyle/>
+          <a:p>
+            <a:pPr algn="ctr"/>
+          </a:p>
+        </p:txBody>
+      </p:sp>
+      <p:sp>
+        <p:nvSpPr>
+          <p:cNvPr id="36" name="TextBox 35"/>
+          <p:cNvSpPr txBox="1"/>
+          <p:nvPr/>
+        </p:nvSpPr>
+        <p:spPr>
+          <a:xfrm>
+            <a:off x="2057400" y="4767261"/>
+            <a:ext cx="8496300" cy="1023937"/>
+          </a:xfrm>
+          <a:prstGeom prst="rect">
+            <a:avLst/>
+          </a:prstGeom>
+          <a:noFill/>
+        </p:spPr>
+        <p:txBody>
+          <a:bodyPr wrap="none" anchor="ctr">
+            <a:spAutoFit/>
+          </a:bodyPr>
+          <a:lstStyle/>
+          <a:p>
+            <a:pPr algn="l">
+              <a:lnSpc>
+                <a:spcPct val="115000"/>
+              </a:lnSpc>
+            </a:pPr>
+            <a:r>
+              <a:rPr sz="1100" b="1">
+                <a:solidFill>
+                  <a:srgbClr val="0B1D3A"/>
+                </a:solidFill>
+                <a:latin typeface="PingFang SC"/>
+              </a:rPr>
+              <a:t>审计:脱敏落盘(span)</a:t>
+            </a:r>
+          </a:p>
+        </p:txBody>
+      </p:sp>
+      <p:sp>
+        <p:nvSpPr>
+          <p:cNvPr id="37" name="TextBox 36"/>
+          <p:cNvSpPr txBox="1"/>
+          <p:nvPr/>
+        </p:nvSpPr>
+        <p:spPr>
+          <a:xfrm>
+            <a:off x="10287000" y="6534150"/>
+            <a:ext cx="1619250" cy="266700"/>
           </a:xfrm>
           <a:prstGeom prst="rect">
             <a:avLst/>
@@ -26704,1107 +27990,6 @@
               </a:lnSpc>
             </a:pPr>
             <a:r>
-              <a:rPr sz="1100" b="0">
-                <a:solidFill>
-                  <a:srgbClr val="94A3B8"/>
-                </a:solidFill>
-                <a:latin typeface="PingFang SC"/>
-              </a:rPr>
-              <a:t>run_id 串起全链路</a:t>
-            </a:r>
-          </a:p>
-        </p:txBody>
-      </p:sp>
-      <p:sp>
-        <p:nvSpPr>
-          <p:cNvPr id="6" name="Rounded Rectangle 5"/>
-          <p:cNvSpPr/>
-          <p:nvPr/>
-        </p:nvSpPr>
-        <p:spPr>
-          <a:xfrm>
-            <a:off x="1847850" y="914400"/>
-            <a:ext cx="8877300" cy="1100137"/>
-          </a:xfrm>
-          <a:prstGeom prst="roundRect">
-            <a:avLst>
-              <a:gd name="adj" fmla="val 8000"/>
-            </a:avLst>
-          </a:prstGeom>
-          <a:solidFill>
-            <a:srgbClr val="F1F5F9"/>
-          </a:solidFill>
-          <a:ln>
-            <a:noFill/>
-          </a:ln>
-          <a:effectLst/>
-        </p:spPr>
-        <p:style>
-          <a:lnRef idx="1">
-            <a:schemeClr val="accent1"/>
-          </a:lnRef>
-          <a:fillRef idx="3">
-            <a:schemeClr val="accent1"/>
-          </a:fillRef>
-          <a:effectRef idx="2">
-            <a:schemeClr val="accent1"/>
-          </a:effectRef>
-          <a:fontRef idx="minor">
-            <a:schemeClr val="lt1"/>
-          </a:fontRef>
-        </p:style>
-        <p:txBody>
-          <a:bodyPr rtlCol="0" anchor="ctr"/>
-          <a:lstStyle/>
-          <a:p>
-            <a:pPr algn="ctr"/>
-          </a:p>
-        </p:txBody>
-      </p:sp>
-      <p:sp>
-        <p:nvSpPr>
-          <p:cNvPr id="7" name="Rounded Rectangle 6"/>
-          <p:cNvSpPr/>
-          <p:nvPr/>
-        </p:nvSpPr>
-        <p:spPr>
-          <a:xfrm>
-            <a:off x="1905000" y="952500"/>
-            <a:ext cx="8763000" cy="1023937"/>
-          </a:xfrm>
-          <a:prstGeom prst="roundRect">
-            <a:avLst>
-              <a:gd name="adj" fmla="val 8000"/>
-            </a:avLst>
-          </a:prstGeom>
-          <a:solidFill>
-            <a:srgbClr val="FFFFFF"/>
-          </a:solidFill>
-          <a:ln w="12700">
-            <a:solidFill>
-              <a:srgbClr val="2563EB"/>
-            </a:solidFill>
-          </a:ln>
-          <a:effectLst/>
-        </p:spPr>
-        <p:style>
-          <a:lnRef idx="1">
-            <a:schemeClr val="accent1"/>
-          </a:lnRef>
-          <a:fillRef idx="3">
-            <a:schemeClr val="accent1"/>
-          </a:fillRef>
-          <a:effectRef idx="2">
-            <a:schemeClr val="accent1"/>
-          </a:effectRef>
-          <a:fontRef idx="minor">
-            <a:schemeClr val="lt1"/>
-          </a:fontRef>
-        </p:style>
-        <p:txBody>
-          <a:bodyPr rtlCol="0" anchor="ctr"/>
-          <a:lstStyle/>
-          <a:p>
-            <a:pPr algn="ctr"/>
-          </a:p>
-        </p:txBody>
-      </p:sp>
-      <p:sp>
-        <p:nvSpPr>
-          <p:cNvPr id="8" name="Rectangle 7"/>
-          <p:cNvSpPr/>
-          <p:nvPr/>
-        </p:nvSpPr>
-        <p:spPr>
-          <a:xfrm>
-            <a:off x="1905000" y="952500"/>
-            <a:ext cx="47625" cy="1023937"/>
-          </a:xfrm>
-          <a:prstGeom prst="rect">
-            <a:avLst/>
-          </a:prstGeom>
-          <a:solidFill>
-            <a:srgbClr val="2563EB"/>
-          </a:solidFill>
-          <a:ln>
-            <a:noFill/>
-          </a:ln>
-          <a:effectLst/>
-        </p:spPr>
-        <p:style>
-          <a:lnRef idx="1">
-            <a:schemeClr val="accent1"/>
-          </a:lnRef>
-          <a:fillRef idx="3">
-            <a:schemeClr val="accent1"/>
-          </a:fillRef>
-          <a:effectRef idx="2">
-            <a:schemeClr val="accent1"/>
-          </a:effectRef>
-          <a:fontRef idx="minor">
-            <a:schemeClr val="lt1"/>
-          </a:fontRef>
-        </p:style>
-        <p:txBody>
-          <a:bodyPr rtlCol="0" anchor="ctr"/>
-          <a:lstStyle/>
-          <a:p>
-            <a:pPr algn="ctr"/>
-          </a:p>
-        </p:txBody>
-      </p:sp>
-      <p:sp>
-        <p:nvSpPr>
-          <p:cNvPr id="9" name="TextBox 8"/>
-          <p:cNvSpPr txBox="1"/>
-          <p:nvPr/>
-        </p:nvSpPr>
-        <p:spPr>
-          <a:xfrm>
-            <a:off x="2038350" y="952500"/>
-            <a:ext cx="8534400" cy="1023937"/>
-          </a:xfrm>
-          <a:prstGeom prst="rect">
-            <a:avLst/>
-          </a:prstGeom>
-          <a:noFill/>
-        </p:spPr>
-        <p:txBody>
-          <a:bodyPr wrap="square" anchor="ctr">
-            <a:spAutoFit/>
-          </a:bodyPr>
-          <a:lstStyle/>
-          <a:p>
-            <a:pPr algn="l">
-              <a:lnSpc>
-                <a:spcPct val="100000"/>
-              </a:lnSpc>
-            </a:pPr>
-            <a:r>
-              <a:rPr sz="1200" b="1">
-                <a:solidFill>
-                  <a:srgbClr val="475569"/>
-                </a:solidFill>
-                <a:latin typeface="PingFang SC"/>
-              </a:rPr>
-              <a:t>选择:模型意图(span)</a:t>
-            </a:r>
-          </a:p>
-        </p:txBody>
-      </p:sp>
-      <p:cxnSp>
-        <p:nvCxnSpPr>
-          <p:cNvPr id="10" name="Connector 9"/>
-          <p:cNvCxnSpPr/>
-          <p:nvPr/>
-        </p:nvCxnSpPr>
-        <p:spPr>
-          <a:xfrm>
-            <a:off x="6096000" y="2033587"/>
-            <a:ext cx="0" cy="152400"/>
-          </a:xfrm>
-          <a:prstGeom prst="line">
-            <a:avLst/>
-          </a:prstGeom>
-          <a:ln w="15240">
-            <a:solidFill>
-              <a:srgbClr val="94A3B8"/>
-            </a:solidFill>
-          </a:ln>
-        </p:spPr>
-        <p:style>
-          <a:lnRef idx="2">
-            <a:schemeClr val="accent1"/>
-          </a:lnRef>
-          <a:fillRef idx="0">
-            <a:schemeClr val="accent1"/>
-          </a:fillRef>
-          <a:effectRef idx="1">
-            <a:schemeClr val="accent1"/>
-          </a:effectRef>
-          <a:fontRef idx="minor">
-            <a:schemeClr val="tx1"/>
-          </a:fontRef>
-        </p:style>
-      </p:cxnSp>
-      <p:sp>
-        <p:nvSpPr>
-          <p:cNvPr id="11" name="Isosceles Triangle 10"/>
-          <p:cNvSpPr/>
-          <p:nvPr/>
-        </p:nvSpPr>
-        <p:spPr>
-          <a:xfrm rot="10800000">
-            <a:off x="6053138" y="2100263"/>
-            <a:ext cx="85725" cy="85725"/>
-          </a:xfrm>
-          <a:prstGeom prst="triangle">
-            <a:avLst/>
-          </a:prstGeom>
-          <a:solidFill>
-            <a:srgbClr val="94A3B8"/>
-          </a:solidFill>
-          <a:ln>
-            <a:noFill/>
-          </a:ln>
-          <a:effectLst/>
-        </p:spPr>
-        <p:style>
-          <a:lnRef idx="1">
-            <a:schemeClr val="accent1"/>
-          </a:lnRef>
-          <a:fillRef idx="3">
-            <a:schemeClr val="accent1"/>
-          </a:fillRef>
-          <a:effectRef idx="2">
-            <a:schemeClr val="accent1"/>
-          </a:effectRef>
-          <a:fontRef idx="minor">
-            <a:schemeClr val="lt1"/>
-          </a:fontRef>
-        </p:style>
-        <p:txBody>
-          <a:bodyPr rtlCol="0" anchor="ctr"/>
-          <a:lstStyle/>
-          <a:p>
-            <a:pPr algn="ctr"/>
-          </a:p>
-        </p:txBody>
-      </p:sp>
-      <p:sp>
-        <p:nvSpPr>
-          <p:cNvPr id="12" name="TextBox 11"/>
-          <p:cNvSpPr txBox="1"/>
-          <p:nvPr/>
-        </p:nvSpPr>
-        <p:spPr>
-          <a:xfrm>
-            <a:off x="6248400" y="1976437"/>
-            <a:ext cx="2095500" cy="247650"/>
-          </a:xfrm>
-          <a:prstGeom prst="rect">
-            <a:avLst/>
-          </a:prstGeom>
-          <a:noFill/>
-        </p:spPr>
-        <p:txBody>
-          <a:bodyPr wrap="square" anchor="ctr">
-            <a:spAutoFit/>
-          </a:bodyPr>
-          <a:lstStyle/>
-          <a:p>
-            <a:pPr algn="l">
-              <a:lnSpc>
-                <a:spcPct val="100000"/>
-              </a:lnSpc>
-            </a:pPr>
-            <a:r>
-              <a:rPr sz="1000" b="0">
-                <a:solidFill>
-                  <a:srgbClr val="94A3B8"/>
-                </a:solidFill>
-                <a:latin typeface="PingFang SC"/>
-              </a:rPr>
-              <a:t>串联</a:t>
-            </a:r>
-          </a:p>
-        </p:txBody>
-      </p:sp>
-      <p:sp>
-        <p:nvSpPr>
-          <p:cNvPr id="13" name="Rounded Rectangle 12"/>
-          <p:cNvSpPr/>
-          <p:nvPr/>
-        </p:nvSpPr>
-        <p:spPr>
-          <a:xfrm>
-            <a:off x="1847850" y="2185987"/>
-            <a:ext cx="8877300" cy="1100137"/>
-          </a:xfrm>
-          <a:prstGeom prst="roundRect">
-            <a:avLst>
-              <a:gd name="adj" fmla="val 8000"/>
-            </a:avLst>
-          </a:prstGeom>
-          <a:solidFill>
-            <a:srgbClr val="F1F5F9"/>
-          </a:solidFill>
-          <a:ln>
-            <a:noFill/>
-          </a:ln>
-          <a:effectLst/>
-        </p:spPr>
-        <p:style>
-          <a:lnRef idx="1">
-            <a:schemeClr val="accent1"/>
-          </a:lnRef>
-          <a:fillRef idx="3">
-            <a:schemeClr val="accent1"/>
-          </a:fillRef>
-          <a:effectRef idx="2">
-            <a:schemeClr val="accent1"/>
-          </a:effectRef>
-          <a:fontRef idx="minor">
-            <a:schemeClr val="lt1"/>
-          </a:fontRef>
-        </p:style>
-        <p:txBody>
-          <a:bodyPr rtlCol="0" anchor="ctr"/>
-          <a:lstStyle/>
-          <a:p>
-            <a:pPr algn="ctr"/>
-          </a:p>
-        </p:txBody>
-      </p:sp>
-      <p:sp>
-        <p:nvSpPr>
-          <p:cNvPr id="14" name="Rounded Rectangle 13"/>
-          <p:cNvSpPr/>
-          <p:nvPr/>
-        </p:nvSpPr>
-        <p:spPr>
-          <a:xfrm>
-            <a:off x="1905000" y="2224087"/>
-            <a:ext cx="8763000" cy="1023937"/>
-          </a:xfrm>
-          <a:prstGeom prst="roundRect">
-            <a:avLst>
-              <a:gd name="adj" fmla="val 8000"/>
-            </a:avLst>
-          </a:prstGeom>
-          <a:solidFill>
-            <a:srgbClr val="FFFFFF"/>
-          </a:solidFill>
-          <a:ln w="12700">
-            <a:solidFill>
-              <a:srgbClr val="14B8A6"/>
-            </a:solidFill>
-          </a:ln>
-          <a:effectLst/>
-        </p:spPr>
-        <p:style>
-          <a:lnRef idx="1">
-            <a:schemeClr val="accent1"/>
-          </a:lnRef>
-          <a:fillRef idx="3">
-            <a:schemeClr val="accent1"/>
-          </a:fillRef>
-          <a:effectRef idx="2">
-            <a:schemeClr val="accent1"/>
-          </a:effectRef>
-          <a:fontRef idx="minor">
-            <a:schemeClr val="lt1"/>
-          </a:fontRef>
-        </p:style>
-        <p:txBody>
-          <a:bodyPr rtlCol="0" anchor="ctr"/>
-          <a:lstStyle/>
-          <a:p>
-            <a:pPr algn="ctr"/>
-          </a:p>
-        </p:txBody>
-      </p:sp>
-      <p:sp>
-        <p:nvSpPr>
-          <p:cNvPr id="15" name="Rectangle 14"/>
-          <p:cNvSpPr/>
-          <p:nvPr/>
-        </p:nvSpPr>
-        <p:spPr>
-          <a:xfrm>
-            <a:off x="1905000" y="2224087"/>
-            <a:ext cx="47625" cy="1023937"/>
-          </a:xfrm>
-          <a:prstGeom prst="rect">
-            <a:avLst/>
-          </a:prstGeom>
-          <a:solidFill>
-            <a:srgbClr val="14B8A6"/>
-          </a:solidFill>
-          <a:ln>
-            <a:noFill/>
-          </a:ln>
-          <a:effectLst/>
-        </p:spPr>
-        <p:style>
-          <a:lnRef idx="1">
-            <a:schemeClr val="accent1"/>
-          </a:lnRef>
-          <a:fillRef idx="3">
-            <a:schemeClr val="accent1"/>
-          </a:fillRef>
-          <a:effectRef idx="2">
-            <a:schemeClr val="accent1"/>
-          </a:effectRef>
-          <a:fontRef idx="minor">
-            <a:schemeClr val="lt1"/>
-          </a:fontRef>
-        </p:style>
-        <p:txBody>
-          <a:bodyPr rtlCol="0" anchor="ctr"/>
-          <a:lstStyle/>
-          <a:p>
-            <a:pPr algn="ctr"/>
-          </a:p>
-        </p:txBody>
-      </p:sp>
-      <p:sp>
-        <p:nvSpPr>
-          <p:cNvPr id="16" name="TextBox 15"/>
-          <p:cNvSpPr txBox="1"/>
-          <p:nvPr/>
-        </p:nvSpPr>
-        <p:spPr>
-          <a:xfrm>
-            <a:off x="2038350" y="2224087"/>
-            <a:ext cx="8534400" cy="1023937"/>
-          </a:xfrm>
-          <a:prstGeom prst="rect">
-            <a:avLst/>
-          </a:prstGeom>
-          <a:noFill/>
-        </p:spPr>
-        <p:txBody>
-          <a:bodyPr wrap="square" anchor="ctr">
-            <a:spAutoFit/>
-          </a:bodyPr>
-          <a:lstStyle/>
-          <a:p>
-            <a:pPr algn="l">
-              <a:lnSpc>
-                <a:spcPct val="100000"/>
-              </a:lnSpc>
-            </a:pPr>
-            <a:r>
-              <a:rPr sz="1200" b="1">
-                <a:solidFill>
-                  <a:srgbClr val="475569"/>
-                </a:solidFill>
-                <a:latin typeface="PingFang SC"/>
-              </a:rPr>
-              <a:t>参数:Schema 校验(span)</a:t>
-            </a:r>
-          </a:p>
-        </p:txBody>
-      </p:sp>
-      <p:cxnSp>
-        <p:nvCxnSpPr>
-          <p:cNvPr id="17" name="Connector 16"/>
-          <p:cNvCxnSpPr/>
-          <p:nvPr/>
-        </p:nvCxnSpPr>
-        <p:spPr>
-          <a:xfrm>
-            <a:off x="6096000" y="3305174"/>
-            <a:ext cx="0" cy="152400"/>
-          </a:xfrm>
-          <a:prstGeom prst="line">
-            <a:avLst/>
-          </a:prstGeom>
-          <a:ln w="15240">
-            <a:solidFill>
-              <a:srgbClr val="94A3B8"/>
-            </a:solidFill>
-          </a:ln>
-        </p:spPr>
-        <p:style>
-          <a:lnRef idx="2">
-            <a:schemeClr val="accent1"/>
-          </a:lnRef>
-          <a:fillRef idx="0">
-            <a:schemeClr val="accent1"/>
-          </a:fillRef>
-          <a:effectRef idx="1">
-            <a:schemeClr val="accent1"/>
-          </a:effectRef>
-          <a:fontRef idx="minor">
-            <a:schemeClr val="tx1"/>
-          </a:fontRef>
-        </p:style>
-      </p:cxnSp>
-      <p:sp>
-        <p:nvSpPr>
-          <p:cNvPr id="18" name="Isosceles Triangle 17"/>
-          <p:cNvSpPr/>
-          <p:nvPr/>
-        </p:nvSpPr>
-        <p:spPr>
-          <a:xfrm rot="10800000">
-            <a:off x="6053138" y="3371850"/>
-            <a:ext cx="85725" cy="85725"/>
-          </a:xfrm>
-          <a:prstGeom prst="triangle">
-            <a:avLst/>
-          </a:prstGeom>
-          <a:solidFill>
-            <a:srgbClr val="94A3B8"/>
-          </a:solidFill>
-          <a:ln>
-            <a:noFill/>
-          </a:ln>
-          <a:effectLst/>
-        </p:spPr>
-        <p:style>
-          <a:lnRef idx="1">
-            <a:schemeClr val="accent1"/>
-          </a:lnRef>
-          <a:fillRef idx="3">
-            <a:schemeClr val="accent1"/>
-          </a:fillRef>
-          <a:effectRef idx="2">
-            <a:schemeClr val="accent1"/>
-          </a:effectRef>
-          <a:fontRef idx="minor">
-            <a:schemeClr val="lt1"/>
-          </a:fontRef>
-        </p:style>
-        <p:txBody>
-          <a:bodyPr rtlCol="0" anchor="ctr"/>
-          <a:lstStyle/>
-          <a:p>
-            <a:pPr algn="ctr"/>
-          </a:p>
-        </p:txBody>
-      </p:sp>
-      <p:sp>
-        <p:nvSpPr>
-          <p:cNvPr id="19" name="TextBox 18"/>
-          <p:cNvSpPr txBox="1"/>
-          <p:nvPr/>
-        </p:nvSpPr>
-        <p:spPr>
-          <a:xfrm>
-            <a:off x="6248400" y="3248024"/>
-            <a:ext cx="2095500" cy="247650"/>
-          </a:xfrm>
-          <a:prstGeom prst="rect">
-            <a:avLst/>
-          </a:prstGeom>
-          <a:noFill/>
-        </p:spPr>
-        <p:txBody>
-          <a:bodyPr wrap="square" anchor="ctr">
-            <a:spAutoFit/>
-          </a:bodyPr>
-          <a:lstStyle/>
-          <a:p>
-            <a:pPr algn="l">
-              <a:lnSpc>
-                <a:spcPct val="100000"/>
-              </a:lnSpc>
-            </a:pPr>
-            <a:r>
-              <a:rPr sz="1000" b="0">
-                <a:solidFill>
-                  <a:srgbClr val="94A3B8"/>
-                </a:solidFill>
-                <a:latin typeface="PingFang SC"/>
-              </a:rPr>
-              <a:t>计时</a:t>
-            </a:r>
-          </a:p>
-        </p:txBody>
-      </p:sp>
-      <p:sp>
-        <p:nvSpPr>
-          <p:cNvPr id="20" name="Rounded Rectangle 19"/>
-          <p:cNvSpPr/>
-          <p:nvPr/>
-        </p:nvSpPr>
-        <p:spPr>
-          <a:xfrm>
-            <a:off x="1847850" y="3457574"/>
-            <a:ext cx="8877300" cy="1100137"/>
-          </a:xfrm>
-          <a:prstGeom prst="roundRect">
-            <a:avLst>
-              <a:gd name="adj" fmla="val 8000"/>
-            </a:avLst>
-          </a:prstGeom>
-          <a:solidFill>
-            <a:srgbClr val="F1F5F9"/>
-          </a:solidFill>
-          <a:ln>
-            <a:noFill/>
-          </a:ln>
-          <a:effectLst/>
-        </p:spPr>
-        <p:style>
-          <a:lnRef idx="1">
-            <a:schemeClr val="accent1"/>
-          </a:lnRef>
-          <a:fillRef idx="3">
-            <a:schemeClr val="accent1"/>
-          </a:fillRef>
-          <a:effectRef idx="2">
-            <a:schemeClr val="accent1"/>
-          </a:effectRef>
-          <a:fontRef idx="minor">
-            <a:schemeClr val="lt1"/>
-          </a:fontRef>
-        </p:style>
-        <p:txBody>
-          <a:bodyPr rtlCol="0" anchor="ctr"/>
-          <a:lstStyle/>
-          <a:p>
-            <a:pPr algn="ctr"/>
-          </a:p>
-        </p:txBody>
-      </p:sp>
-      <p:sp>
-        <p:nvSpPr>
-          <p:cNvPr id="21" name="Rounded Rectangle 20"/>
-          <p:cNvSpPr/>
-          <p:nvPr/>
-        </p:nvSpPr>
-        <p:spPr>
-          <a:xfrm>
-            <a:off x="1905000" y="3495674"/>
-            <a:ext cx="8763000" cy="1023937"/>
-          </a:xfrm>
-          <a:prstGeom prst="roundRect">
-            <a:avLst>
-              <a:gd name="adj" fmla="val 8000"/>
-            </a:avLst>
-          </a:prstGeom>
-          <a:solidFill>
-            <a:srgbClr val="FFFFFF"/>
-          </a:solidFill>
-          <a:ln w="12700">
-            <a:solidFill>
-              <a:srgbClr val="8B5CF6"/>
-            </a:solidFill>
-          </a:ln>
-          <a:effectLst/>
-        </p:spPr>
-        <p:style>
-          <a:lnRef idx="1">
-            <a:schemeClr val="accent1"/>
-          </a:lnRef>
-          <a:fillRef idx="3">
-            <a:schemeClr val="accent1"/>
-          </a:fillRef>
-          <a:effectRef idx="2">
-            <a:schemeClr val="accent1"/>
-          </a:effectRef>
-          <a:fontRef idx="minor">
-            <a:schemeClr val="lt1"/>
-          </a:fontRef>
-        </p:style>
-        <p:txBody>
-          <a:bodyPr rtlCol="0" anchor="ctr"/>
-          <a:lstStyle/>
-          <a:p>
-            <a:pPr algn="ctr"/>
-          </a:p>
-        </p:txBody>
-      </p:sp>
-      <p:sp>
-        <p:nvSpPr>
-          <p:cNvPr id="22" name="Rectangle 21"/>
-          <p:cNvSpPr/>
-          <p:nvPr/>
-        </p:nvSpPr>
-        <p:spPr>
-          <a:xfrm>
-            <a:off x="1905000" y="3495674"/>
-            <a:ext cx="47625" cy="1023937"/>
-          </a:xfrm>
-          <a:prstGeom prst="rect">
-            <a:avLst/>
-          </a:prstGeom>
-          <a:solidFill>
-            <a:srgbClr val="8B5CF6"/>
-          </a:solidFill>
-          <a:ln>
-            <a:noFill/>
-          </a:ln>
-          <a:effectLst/>
-        </p:spPr>
-        <p:style>
-          <a:lnRef idx="1">
-            <a:schemeClr val="accent1"/>
-          </a:lnRef>
-          <a:fillRef idx="3">
-            <a:schemeClr val="accent1"/>
-          </a:fillRef>
-          <a:effectRef idx="2">
-            <a:schemeClr val="accent1"/>
-          </a:effectRef>
-          <a:fontRef idx="minor">
-            <a:schemeClr val="lt1"/>
-          </a:fontRef>
-        </p:style>
-        <p:txBody>
-          <a:bodyPr rtlCol="0" anchor="ctr"/>
-          <a:lstStyle/>
-          <a:p>
-            <a:pPr algn="ctr"/>
-          </a:p>
-        </p:txBody>
-      </p:sp>
-      <p:sp>
-        <p:nvSpPr>
-          <p:cNvPr id="23" name="TextBox 22"/>
-          <p:cNvSpPr txBox="1"/>
-          <p:nvPr/>
-        </p:nvSpPr>
-        <p:spPr>
-          <a:xfrm>
-            <a:off x="2038350" y="3495674"/>
-            <a:ext cx="8534400" cy="1023937"/>
-          </a:xfrm>
-          <a:prstGeom prst="rect">
-            <a:avLst/>
-          </a:prstGeom>
-          <a:noFill/>
-        </p:spPr>
-        <p:txBody>
-          <a:bodyPr wrap="square" anchor="ctr">
-            <a:spAutoFit/>
-          </a:bodyPr>
-          <a:lstStyle/>
-          <a:p>
-            <a:pPr algn="l">
-              <a:lnSpc>
-                <a:spcPct val="100000"/>
-              </a:lnSpc>
-            </a:pPr>
-            <a:r>
-              <a:rPr sz="1200" b="1">
-                <a:solidFill>
-                  <a:srgbClr val="475569"/>
-                </a:solidFill>
-                <a:latin typeface="PingFang SC"/>
-              </a:rPr>
-              <a:t>执行:wait_for 超时(span)</a:t>
-            </a:r>
-          </a:p>
-        </p:txBody>
-      </p:sp>
-      <p:cxnSp>
-        <p:nvCxnSpPr>
-          <p:cNvPr id="24" name="Connector 23"/>
-          <p:cNvCxnSpPr/>
-          <p:nvPr/>
-        </p:nvCxnSpPr>
-        <p:spPr>
-          <a:xfrm>
-            <a:off x="6096000" y="4576761"/>
-            <a:ext cx="0" cy="152400"/>
-          </a:xfrm>
-          <a:prstGeom prst="line">
-            <a:avLst/>
-          </a:prstGeom>
-          <a:ln w="15240">
-            <a:solidFill>
-              <a:srgbClr val="94A3B8"/>
-            </a:solidFill>
-          </a:ln>
-        </p:spPr>
-        <p:style>
-          <a:lnRef idx="2">
-            <a:schemeClr val="accent1"/>
-          </a:lnRef>
-          <a:fillRef idx="0">
-            <a:schemeClr val="accent1"/>
-          </a:fillRef>
-          <a:effectRef idx="1">
-            <a:schemeClr val="accent1"/>
-          </a:effectRef>
-          <a:fontRef idx="minor">
-            <a:schemeClr val="tx1"/>
-          </a:fontRef>
-        </p:style>
-      </p:cxnSp>
-      <p:sp>
-        <p:nvSpPr>
-          <p:cNvPr id="25" name="Isosceles Triangle 24"/>
-          <p:cNvSpPr/>
-          <p:nvPr/>
-        </p:nvSpPr>
-        <p:spPr>
-          <a:xfrm rot="10800000">
-            <a:off x="6053138" y="4643437"/>
-            <a:ext cx="85725" cy="85725"/>
-          </a:xfrm>
-          <a:prstGeom prst="triangle">
-            <a:avLst/>
-          </a:prstGeom>
-          <a:solidFill>
-            <a:srgbClr val="94A3B8"/>
-          </a:solidFill>
-          <a:ln>
-            <a:noFill/>
-          </a:ln>
-          <a:effectLst/>
-        </p:spPr>
-        <p:style>
-          <a:lnRef idx="1">
-            <a:schemeClr val="accent1"/>
-          </a:lnRef>
-          <a:fillRef idx="3">
-            <a:schemeClr val="accent1"/>
-          </a:fillRef>
-          <a:effectRef idx="2">
-            <a:schemeClr val="accent1"/>
-          </a:effectRef>
-          <a:fontRef idx="minor">
-            <a:schemeClr val="lt1"/>
-          </a:fontRef>
-        </p:style>
-        <p:txBody>
-          <a:bodyPr rtlCol="0" anchor="ctr"/>
-          <a:lstStyle/>
-          <a:p>
-            <a:pPr algn="ctr"/>
-          </a:p>
-        </p:txBody>
-      </p:sp>
-      <p:sp>
-        <p:nvSpPr>
-          <p:cNvPr id="26" name="TextBox 25"/>
-          <p:cNvSpPr txBox="1"/>
-          <p:nvPr/>
-        </p:nvSpPr>
-        <p:spPr>
-          <a:xfrm>
-            <a:off x="6248400" y="4519611"/>
-            <a:ext cx="2095500" cy="247650"/>
-          </a:xfrm>
-          <a:prstGeom prst="rect">
-            <a:avLst/>
-          </a:prstGeom>
-          <a:noFill/>
-        </p:spPr>
-        <p:txBody>
-          <a:bodyPr wrap="square" anchor="ctr">
-            <a:spAutoFit/>
-          </a:bodyPr>
-          <a:lstStyle/>
-          <a:p>
-            <a:pPr algn="l">
-              <a:lnSpc>
-                <a:spcPct val="100000"/>
-              </a:lnSpc>
-            </a:pPr>
-            <a:r>
-              <a:rPr sz="1000" b="0">
-                <a:solidFill>
-                  <a:srgbClr val="94A3B8"/>
-                </a:solidFill>
-                <a:latin typeface="PingFang SC"/>
-              </a:rPr>
-              <a:t>归档</a:t>
-            </a:r>
-          </a:p>
-        </p:txBody>
-      </p:sp>
-      <p:sp>
-        <p:nvSpPr>
-          <p:cNvPr id="27" name="Rounded Rectangle 26"/>
-          <p:cNvSpPr/>
-          <p:nvPr/>
-        </p:nvSpPr>
-        <p:spPr>
-          <a:xfrm>
-            <a:off x="1847850" y="4729161"/>
-            <a:ext cx="8877300" cy="1100137"/>
-          </a:xfrm>
-          <a:prstGeom prst="roundRect">
-            <a:avLst>
-              <a:gd name="adj" fmla="val 8000"/>
-            </a:avLst>
-          </a:prstGeom>
-          <a:solidFill>
-            <a:srgbClr val="F1F5F9"/>
-          </a:solidFill>
-          <a:ln>
-            <a:noFill/>
-          </a:ln>
-          <a:effectLst/>
-        </p:spPr>
-        <p:style>
-          <a:lnRef idx="1">
-            <a:schemeClr val="accent1"/>
-          </a:lnRef>
-          <a:fillRef idx="3">
-            <a:schemeClr val="accent1"/>
-          </a:fillRef>
-          <a:effectRef idx="2">
-            <a:schemeClr val="accent1"/>
-          </a:effectRef>
-          <a:fontRef idx="minor">
-            <a:schemeClr val="lt1"/>
-          </a:fontRef>
-        </p:style>
-        <p:txBody>
-          <a:bodyPr rtlCol="0" anchor="ctr"/>
-          <a:lstStyle/>
-          <a:p>
-            <a:pPr algn="ctr"/>
-          </a:p>
-        </p:txBody>
-      </p:sp>
-      <p:sp>
-        <p:nvSpPr>
-          <p:cNvPr id="28" name="Rounded Rectangle 27"/>
-          <p:cNvSpPr/>
-          <p:nvPr/>
-        </p:nvSpPr>
-        <p:spPr>
-          <a:xfrm>
-            <a:off x="1905000" y="4767261"/>
-            <a:ext cx="8763000" cy="1023937"/>
-          </a:xfrm>
-          <a:prstGeom prst="roundRect">
-            <a:avLst>
-              <a:gd name="adj" fmla="val 8000"/>
-            </a:avLst>
-          </a:prstGeom>
-          <a:solidFill>
-            <a:srgbClr val="FFFFFF"/>
-          </a:solidFill>
-          <a:ln w="12700">
-            <a:solidFill>
-              <a:srgbClr val="F59E0B"/>
-            </a:solidFill>
-          </a:ln>
-          <a:effectLst/>
-        </p:spPr>
-        <p:style>
-          <a:lnRef idx="1">
-            <a:schemeClr val="accent1"/>
-          </a:lnRef>
-          <a:fillRef idx="3">
-            <a:schemeClr val="accent1"/>
-          </a:fillRef>
-          <a:effectRef idx="2">
-            <a:schemeClr val="accent1"/>
-          </a:effectRef>
-          <a:fontRef idx="minor">
-            <a:schemeClr val="lt1"/>
-          </a:fontRef>
-        </p:style>
-        <p:txBody>
-          <a:bodyPr rtlCol="0" anchor="ctr"/>
-          <a:lstStyle/>
-          <a:p>
-            <a:pPr algn="ctr"/>
-          </a:p>
-        </p:txBody>
-      </p:sp>
-      <p:sp>
-        <p:nvSpPr>
-          <p:cNvPr id="29" name="Rectangle 28"/>
-          <p:cNvSpPr/>
-          <p:nvPr/>
-        </p:nvSpPr>
-        <p:spPr>
-          <a:xfrm>
-            <a:off x="1905000" y="4767261"/>
-            <a:ext cx="47625" cy="1023937"/>
-          </a:xfrm>
-          <a:prstGeom prst="rect">
-            <a:avLst/>
-          </a:prstGeom>
-          <a:solidFill>
-            <a:srgbClr val="F59E0B"/>
-          </a:solidFill>
-          <a:ln>
-            <a:noFill/>
-          </a:ln>
-          <a:effectLst/>
-        </p:spPr>
-        <p:style>
-          <a:lnRef idx="1">
-            <a:schemeClr val="accent1"/>
-          </a:lnRef>
-          <a:fillRef idx="3">
-            <a:schemeClr val="accent1"/>
-          </a:fillRef>
-          <a:effectRef idx="2">
-            <a:schemeClr val="accent1"/>
-          </a:effectRef>
-          <a:fontRef idx="minor">
-            <a:schemeClr val="lt1"/>
-          </a:fontRef>
-        </p:style>
-        <p:txBody>
-          <a:bodyPr rtlCol="0" anchor="ctr"/>
-          <a:lstStyle/>
-          <a:p>
-            <a:pPr algn="ctr"/>
-          </a:p>
-        </p:txBody>
-      </p:sp>
-      <p:sp>
-        <p:nvSpPr>
-          <p:cNvPr id="30" name="TextBox 29"/>
-          <p:cNvSpPr txBox="1"/>
-          <p:nvPr/>
-        </p:nvSpPr>
-        <p:spPr>
-          <a:xfrm>
-            <a:off x="2038350" y="4767261"/>
-            <a:ext cx="8534400" cy="1023937"/>
-          </a:xfrm>
-          <a:prstGeom prst="rect">
-            <a:avLst/>
-          </a:prstGeom>
-          <a:noFill/>
-        </p:spPr>
-        <p:txBody>
-          <a:bodyPr wrap="square" anchor="ctr">
-            <a:spAutoFit/>
-          </a:bodyPr>
-          <a:lstStyle/>
-          <a:p>
-            <a:pPr algn="l">
-              <a:lnSpc>
-                <a:spcPct val="100000"/>
-              </a:lnSpc>
-            </a:pPr>
-            <a:r>
-              <a:rPr sz="1200" b="1">
-                <a:solidFill>
-                  <a:srgbClr val="475569"/>
-                </a:solidFill>
-                <a:latin typeface="PingFang SC"/>
-              </a:rPr>
-              <a:t>审计:脱敏落盘(span)|run_id 串起全链路</a:t>
-            </a:r>
-          </a:p>
-        </p:txBody>
-      </p:sp>
-      <p:sp>
-        <p:nvSpPr>
-          <p:cNvPr id="31" name="TextBox 30"/>
-          <p:cNvSpPr txBox="1"/>
-          <p:nvPr/>
-        </p:nvSpPr>
-        <p:spPr>
-          <a:xfrm>
-            <a:off x="10287000" y="6534150"/>
-            <a:ext cx="1619250" cy="266700"/>
-          </a:xfrm>
-          <a:prstGeom prst="rect">
-            <a:avLst/>
-          </a:prstGeom>
-          <a:noFill/>
-        </p:spPr>
-        <p:txBody>
-          <a:bodyPr wrap="square" anchor="ctr">
-            <a:spAutoFit/>
-          </a:bodyPr>
-          <a:lstStyle/>
-          <a:p>
-            <a:pPr algn="r">
-              <a:lnSpc>
-                <a:spcPct val="100000"/>
-              </a:lnSpc>
-            </a:pPr>
-            <a:r>
               <a:rPr sz="900" b="0">
                 <a:solidFill>
                   <a:srgbClr val="94A3B8"/>
@@ -27818,7 +28003,7 @@
       </p:sp>
       <p:sp>
         <p:nvSpPr>
-          <p:cNvPr id="32" name="TextBox 31"/>
+          <p:cNvPr id="38" name="TextBox 37"/>
           <p:cNvSpPr txBox="1"/>
           <p:nvPr/>
         </p:nvSpPr>

--- a/03-课件PPT/讲次版/第2章-5-讲次 2-5 · Agent Tool Runtime .pptx
+++ b/03-课件PPT/讲次版/第2章-5-讲次 2-5 · Agent Tool Runtime .pptx
@@ -26794,7 +26794,7 @@
           <a:noFill/>
         </p:spPr>
         <p:txBody>
-          <a:bodyPr wrap="none" anchor="ctr">
+          <a:bodyPr wrap="square" anchor="ctr">
             <a:spAutoFit/>
           </a:bodyPr>
           <a:lstStyle/>
@@ -26805,7 +26805,7 @@
               </a:lnSpc>
             </a:pPr>
             <a:r>
-              <a:rPr sz="1100" b="1">
+              <a:rPr sz="1300" b="1">
                 <a:solidFill>
                   <a:srgbClr val="0B1D3A"/>
                 </a:solidFill>
@@ -27176,7 +27176,7 @@
           <a:noFill/>
         </p:spPr>
         <p:txBody>
-          <a:bodyPr wrap="none" anchor="ctr">
+          <a:bodyPr wrap="square" anchor="ctr">
             <a:spAutoFit/>
           </a:bodyPr>
           <a:lstStyle/>
@@ -27187,7 +27187,7 @@
               </a:lnSpc>
             </a:pPr>
             <a:r>
-              <a:rPr sz="1100" b="1">
+              <a:rPr sz="1300" b="1">
                 <a:solidFill>
                   <a:srgbClr val="0B1D3A"/>
                 </a:solidFill>
@@ -27558,7 +27558,7 @@
           <a:noFill/>
         </p:spPr>
         <p:txBody>
-          <a:bodyPr wrap="none" anchor="ctr">
+          <a:bodyPr wrap="square" anchor="ctr">
             <a:spAutoFit/>
           </a:bodyPr>
           <a:lstStyle/>
@@ -27569,7 +27569,7 @@
               </a:lnSpc>
             </a:pPr>
             <a:r>
-              <a:rPr sz="900" b="1">
+              <a:rPr sz="1300" b="1">
                 <a:solidFill>
                   <a:srgbClr val="0B1D3A"/>
                 </a:solidFill>
@@ -27940,7 +27940,7 @@
           <a:noFill/>
         </p:spPr>
         <p:txBody>
-          <a:bodyPr wrap="none" anchor="ctr">
+          <a:bodyPr wrap="square" anchor="ctr">
             <a:spAutoFit/>
           </a:bodyPr>
           <a:lstStyle/>
@@ -27951,7 +27951,7 @@
               </a:lnSpc>
             </a:pPr>
             <a:r>
-              <a:rPr sz="1100" b="1">
+              <a:rPr sz="1300" b="1">
                 <a:solidFill>
                   <a:srgbClr val="0B1D3A"/>
                 </a:solidFill>
